--- a/relatorio_parcial_raic/Apresentacao_Oral_RAIC_2026_Pedro_ENVIO.pptx
+++ b/relatorio_parcial_raic/Apresentacao_Oral_RAIC_2026_Pedro_ENVIO.pptx
@@ -5,30 +5,29 @@
     <p:sldMasterId id="2147483648" r:id="rId1"/>
   </p:sldMasterIdLst>
   <p:notesMasterIdLst>
-    <p:notesMasterId r:id="rId5"/>
+    <p:notesMasterId r:id="rId19"/>
   </p:notesMasterIdLst>
   <p:handoutMasterIdLst>
-    <p:handoutMasterId r:id="rId6"/>
+    <p:handoutMasterId r:id="rId20"/>
   </p:handoutMasterIdLst>
   <p:sldIdLst>
     <p:sldId id="258" r:id="rId2"/>
-    <p:sldId id="260" r:id="rId11"/>
-    <p:sldId id="261" r:id="rId12"/>
-    <p:sldId id="262" r:id="rId13"/>
-    <p:sldId id="263" r:id="rId14"/>
-    <p:sldId id="264" r:id="rId15"/>
-    <p:sldId id="265" r:id="rId16"/>
-    <p:sldId id="266" r:id="rId17"/>
-    <p:sldId id="267" r:id="rId18"/>
-    <p:sldId id="268" r:id="rId19"/>
-    <p:sldId id="259" r:id="rId4"/>
-    <p:sldId id="269" r:id="rId20"/>
-    <p:sldId id="270" r:id="rId21"/>
-    <p:sldId id="271" r:id="rId22"/>
-    <p:sldId id="272" r:id="rId23"/>
-    <p:sldId id="273" r:id="rId24"/>
-    <p:sldId id="274" r:id="rId25"/>
-    <p:sldId id="275" r:id="rId26"/>
+    <p:sldId id="260" r:id="rId3"/>
+    <p:sldId id="261" r:id="rId4"/>
+    <p:sldId id="262" r:id="rId5"/>
+    <p:sldId id="263" r:id="rId6"/>
+    <p:sldId id="264" r:id="rId7"/>
+    <p:sldId id="265" r:id="rId8"/>
+    <p:sldId id="266" r:id="rId9"/>
+    <p:sldId id="267" r:id="rId10"/>
+    <p:sldId id="268" r:id="rId11"/>
+    <p:sldId id="259" r:id="rId12"/>
+    <p:sldId id="269" r:id="rId13"/>
+    <p:sldId id="270" r:id="rId14"/>
+    <p:sldId id="271" r:id="rId15"/>
+    <p:sldId id="272" r:id="rId16"/>
+    <p:sldId id="273" r:id="rId17"/>
+    <p:sldId id="274" r:id="rId18"/>
   </p:sldIdLst>
   <p:sldSz cx="12192000" cy="6858000"/>
   <p:notesSz cx="6858000" cy="9144000"/>
@@ -127,6 +126,14 @@
       </a:defRPr>
     </a:lvl9pPr>
   </p:defaultTextStyle>
+  <p:extLst>
+    <p:ext uri="{EFAFB233-063F-42B5-8137-9DF3F51BA10A}">
+      <p15:sldGuideLst xmlns:p15="http://schemas.microsoft.com/office/powerpoint/2012/main"/>
+    </p:ext>
+    <p:ext uri="{2D200454-40CA-4A62-9FC3-DE9A4176ACB9}">
+      <p15:notesGuideLst xmlns:p15="http://schemas.microsoft.com/office/powerpoint/2012/main"/>
+    </p:ext>
+  </p:extLst>
 </p:presentation>
 </file>
 
@@ -224,7 +231,7 @@
           <a:p>
             <a:fld id="{1E270E38-9B1F-4DFA-BFD7-0C447CDADE5D}" type="datetimeFigureOut">
               <a:rPr lang="pt-BR" smtClean="0"/>
-              <a:t>07/10/2026</a:t>
+              <a:t>19/10/2026</a:t>
             </a:fld>
             <a:endParaRPr lang="pt-BR"/>
           </a:p>
@@ -401,7 +408,7 @@
           <a:p>
             <a:fld id="{D63913CB-ECD4-4CC1-8F40-AF8C3B526E04}" type="datetimeFigureOut">
               <a:rPr lang="pt-BR" smtClean="0"/>
-              <a:t>07/10/2026</a:t>
+              <a:t>19/10/2026</a:t>
             </a:fld>
             <a:endParaRPr lang="pt-BR"/>
           </a:p>
@@ -722,7 +729,7 @@
           <a:p>
             <a:fld id="{DFBF97BC-9976-4586-BDEC-EE7A82F6E13F}" type="datetimeFigureOut">
               <a:rPr lang="pt-BR" smtClean="0"/>
-              <a:t>07/10/2026</a:t>
+              <a:t>19/10/2026</a:t>
             </a:fld>
             <a:endParaRPr lang="pt-BR"/>
           </a:p>
@@ -1051,7 +1058,7 @@
           <a:p>
             <a:fld id="{DFBF97BC-9976-4586-BDEC-EE7A82F6E13F}" type="datetimeFigureOut">
               <a:rPr lang="pt-BR" smtClean="0"/>
-              <a:t>07/10/2026</a:t>
+              <a:t>19/10/2026</a:t>
             </a:fld>
             <a:endParaRPr lang="pt-BR"/>
           </a:p>
@@ -1494,7 +1501,7 @@
               </a:spcAft>
             </a:pPr>
             <a:r>
-              <a:rPr sz="2200" b="1">
+              <a:rPr lang="pt-BR" sz="2200" b="1" noProof="0" dirty="0">
                 <a:solidFill>
                   <a:srgbClr val="1F2A33"/>
                 </a:solidFill>
@@ -1539,7 +1546,7 @@
               </a:spcAft>
             </a:pPr>
             <a:r>
-              <a:rPr sz="1600" b="1">
+              <a:rPr lang="pt-BR" sz="1600" b="1" noProof="0" dirty="0">
                 <a:solidFill>
                   <a:srgbClr val="1F2A33"/>
                 </a:solidFill>
@@ -1555,7 +1562,7 @@
               </a:spcAft>
             </a:pPr>
             <a:r>
-              <a:rPr sz="1600" b="1">
+              <a:rPr lang="pt-BR" sz="1600" b="1" noProof="0" dirty="0">
                 <a:solidFill>
                   <a:srgbClr val="1F2A33"/>
                 </a:solidFill>
@@ -1571,7 +1578,7 @@
               </a:spcAft>
             </a:pPr>
             <a:r>
-              <a:rPr sz="1600" b="1">
+              <a:rPr lang="pt-BR" sz="1600" b="1" noProof="0" dirty="0">
                 <a:solidFill>
                   <a:srgbClr val="1F2A33"/>
                 </a:solidFill>
@@ -1616,7 +1623,7 @@
               </a:spcAft>
             </a:pPr>
             <a:r>
-              <a:rPr sz="1600" b="0">
+              <a:rPr lang="pt-BR" sz="1600" b="0" noProof="0" dirty="0">
                 <a:solidFill>
                   <a:srgbClr val="1F2A33"/>
                 </a:solidFill>
@@ -1625,16 +1632,13 @@
               <a:t>Grupo de Pesquisa no Programa: </a:t>
             </a:r>
             <a:r>
-              <a:rPr sz="1600" b="1">
+              <a:rPr lang="pt-BR" sz="1600" b="1" noProof="0" dirty="0">
                 <a:solidFill>
                   <a:srgbClr val="1F2A33"/>
                 </a:solidFill>
-                <a:highlight>
-                  <a:srgbClr val="FFFF00"/>
-                </a:highlight>
                 <a:latin typeface="Calibri"/>
               </a:rPr>
-              <a:t>A CONFIRMAR (o relatório traz o núcleo NESPE)</a:t>
+              <a:t>NESPE</a:t>
             </a:r>
           </a:p>
         </p:txBody>
@@ -1673,7 +1677,7 @@
               </a:spcAft>
             </a:pPr>
             <a:r>
-              <a:rPr sz="1600" b="0">
+              <a:rPr lang="pt-BR" sz="1600" b="0" noProof="0" dirty="0">
                 <a:solidFill>
                   <a:srgbClr val="1F2A33"/>
                 </a:solidFill>
@@ -1689,7 +1693,7 @@
               </a:spcAft>
             </a:pPr>
             <a:r>
-              <a:rPr sz="1600" b="0">
+              <a:rPr lang="pt-BR" sz="1600" b="0" noProof="0" dirty="0">
                 <a:solidFill>
                   <a:srgbClr val="1F2A33"/>
                 </a:solidFill>
@@ -1730,7 +1734,7 @@
           <a:p>
             <a:pPr algn="ctr"/>
             <a:r>
-              <a:rPr lang="pt-BR" sz="1600" b="1" dirty="0"/>
+              <a:rPr lang="pt-BR" sz="1600" b="1" noProof="0" dirty="0"/>
               <a:t>Belo Horizonte, 2026</a:t>
             </a:r>
           </a:p>
@@ -1750,7 +1754,7 @@
 </file>
 
 <file path=ppt/slides/slide10.xml><?xml version="1.0" encoding="utf-8"?>
-<p:sld xmlns:a="http://schemas.openxmlformats.org/drawingml/2006/main" xmlns:p="http://schemas.openxmlformats.org/presentationml/2006/main" xmlns:r="http://schemas.openxmlformats.org/officeDocument/2006/relationships">
+<p:sld xmlns:a="http://schemas.openxmlformats.org/drawingml/2006/main" xmlns:r="http://schemas.openxmlformats.org/officeDocument/2006/relationships" xmlns:p="http://schemas.openxmlformats.org/presentationml/2006/main">
   <p:cSld>
     <p:spTree>
       <p:nvGrpSpPr>
@@ -1758,7 +1762,14 @@
         <p:cNvGrpSpPr/>
         <p:nvPr/>
       </p:nvGrpSpPr>
-      <p:grpSpPr/>
+      <p:grpSpPr>
+        <a:xfrm>
+          <a:off x="0" y="0"/>
+          <a:ext cx="0" cy="0"/>
+          <a:chOff x="0" y="0"/>
+          <a:chExt cx="0" cy="0"/>
+        </a:xfrm>
+      </p:grpSpPr>
       <p:sp>
         <p:nvSpPr>
           <p:cNvPr id="2" name="Rectangle 1"/>
@@ -1794,7 +1805,7 @@
           </a:fontRef>
         </p:style>
         <p:txBody>
-          <a:bodyPr rtlCol="0" anchor="t" lIns="125999" rIns="125999" tIns="54000" bIns="54000" wrap="square"/>
+          <a:bodyPr wrap="square" lIns="125999" tIns="54000" rIns="125999" bIns="54000" rtlCol="0" anchor="t"/>
           <a:lstStyle/>
           <a:p>
             <a:pPr algn="l">
@@ -1803,7 +1814,7 @@
               </a:spcAft>
             </a:pPr>
             <a:r>
-              <a:rPr sz="1300" b="1">
+              <a:rPr lang="pt-BR" sz="1300" b="1" noProof="0" dirty="0">
                 <a:solidFill>
                   <a:srgbClr val="3B848E"/>
                 </a:solidFill>
@@ -1849,7 +1860,7 @@
           </a:fontRef>
         </p:style>
         <p:txBody>
-          <a:bodyPr rtlCol="0" anchor="ctr" lIns="125999" rIns="125999" tIns="54000" bIns="54000" wrap="square"/>
+          <a:bodyPr wrap="square" lIns="125999" tIns="54000" rIns="125999" bIns="54000" rtlCol="0" anchor="ctr"/>
           <a:lstStyle/>
           <a:p>
             <a:pPr algn="l">
@@ -1858,7 +1869,7 @@
               </a:spcAft>
             </a:pPr>
             <a:r>
-              <a:rPr sz="2600" b="1">
+              <a:rPr lang="pt-BR" sz="2600" b="1" noProof="0" dirty="0">
                 <a:solidFill>
                   <a:srgbClr val="1F2A33"/>
                 </a:solidFill>
@@ -1906,7 +1917,7 @@
           </a:fontRef>
         </p:style>
         <p:txBody>
-          <a:bodyPr rtlCol="0" anchor="t" lIns="125999" rIns="125999" tIns="54000" bIns="54000" wrap="square"/>
+          <a:bodyPr wrap="square" lIns="125999" tIns="54000" rIns="125999" bIns="54000" rtlCol="0" anchor="t"/>
           <a:lstStyle/>
           <a:p>
             <a:pPr algn="l">
@@ -1915,7 +1926,7 @@
               </a:spcAft>
             </a:pPr>
             <a:r>
-              <a:rPr sz="2100" b="1">
+              <a:rPr lang="pt-BR" sz="2100" b="1" noProof="0" dirty="0">
                 <a:solidFill>
                   <a:srgbClr val="FFFFFF"/>
                 </a:solidFill>
@@ -1931,7 +1942,7 @@
               </a:spcAft>
             </a:pPr>
             <a:r>
-              <a:rPr sz="2000" b="1">
+              <a:rPr lang="pt-BR" sz="2000" b="1" noProof="0" dirty="0">
                 <a:solidFill>
                   <a:srgbClr val="FFFFFF"/>
                 </a:solidFill>
@@ -1940,7 +1951,7 @@
               <a:t>1  </a:t>
             </a:r>
             <a:r>
-              <a:rPr sz="2000" b="0">
+              <a:rPr lang="pt-BR" sz="2000" b="0" noProof="0" dirty="0">
                 <a:solidFill>
                   <a:srgbClr val="FFFFFF"/>
                 </a:solidFill>
@@ -1956,7 +1967,7 @@
               </a:spcAft>
             </a:pPr>
             <a:r>
-              <a:rPr sz="2000" b="1">
+              <a:rPr lang="pt-BR" sz="2000" b="1" noProof="0" dirty="0">
                 <a:solidFill>
                   <a:srgbClr val="FFFFFF"/>
                 </a:solidFill>
@@ -1965,7 +1976,7 @@
               <a:t>2  </a:t>
             </a:r>
             <a:r>
-              <a:rPr sz="2000" b="0">
+              <a:rPr lang="pt-BR" sz="2000" b="0" noProof="0" dirty="0">
                 <a:solidFill>
                   <a:srgbClr val="FFFFFF"/>
                 </a:solidFill>
@@ -1981,7 +1992,7 @@
               </a:spcAft>
             </a:pPr>
             <a:r>
-              <a:rPr sz="2000" b="1">
+              <a:rPr lang="pt-BR" sz="2000" b="1" noProof="0" dirty="0">
                 <a:solidFill>
                   <a:srgbClr val="FFFFFF"/>
                 </a:solidFill>
@@ -1990,7 +2001,7 @@
               <a:t>3  </a:t>
             </a:r>
             <a:r>
-              <a:rPr sz="2000" b="0">
+              <a:rPr lang="pt-BR" sz="2000" b="0" noProof="0" dirty="0">
                 <a:solidFill>
                   <a:srgbClr val="FFFFFF"/>
                 </a:solidFill>
@@ -2036,7 +2047,7 @@
           </a:fontRef>
         </p:style>
         <p:txBody>
-          <a:bodyPr rtlCol="0" anchor="ctr" lIns="125999" rIns="125999" tIns="54000" bIns="54000" wrap="square"/>
+          <a:bodyPr wrap="square" lIns="125999" tIns="54000" rIns="125999" bIns="54000" rtlCol="0" anchor="ctr"/>
           <a:lstStyle/>
           <a:p>
             <a:pPr algn="l">
@@ -2045,7 +2056,7 @@
               </a:spcAft>
             </a:pPr>
             <a:r>
-              <a:rPr sz="2100" b="1">
+              <a:rPr lang="pt-BR" sz="2100" b="1" noProof="0" dirty="0">
                 <a:solidFill>
                   <a:srgbClr val="3B848E"/>
                 </a:solidFill>
@@ -2093,7 +2104,7 @@
           </a:fontRef>
         </p:style>
         <p:txBody>
-          <a:bodyPr rtlCol="0" anchor="ctr" lIns="125999" rIns="125999" tIns="54000" bIns="54000" wrap="square"/>
+          <a:bodyPr wrap="square" lIns="125999" tIns="54000" rIns="125999" bIns="54000" rtlCol="0" anchor="ctr"/>
           <a:lstStyle/>
           <a:p>
             <a:pPr algn="l">
@@ -2102,7 +2113,7 @@
               </a:spcAft>
             </a:pPr>
             <a:r>
-              <a:rPr sz="1800" b="1">
+              <a:rPr lang="pt-BR" sz="1800" b="1" noProof="0" dirty="0">
                 <a:solidFill>
                   <a:srgbClr val="1F2A33"/>
                 </a:solidFill>
@@ -2150,7 +2161,7 @@
           </a:fontRef>
         </p:style>
         <p:txBody>
-          <a:bodyPr rtlCol="0" anchor="ctr" lIns="125999" rIns="125999" tIns="54000" bIns="54000" wrap="square"/>
+          <a:bodyPr wrap="square" lIns="125999" tIns="54000" rIns="125999" bIns="54000" rtlCol="0" anchor="ctr"/>
           <a:lstStyle/>
           <a:p>
             <a:pPr algn="l">
@@ -2159,7 +2170,7 @@
               </a:spcAft>
             </a:pPr>
             <a:r>
-              <a:rPr sz="1800" b="1">
+              <a:rPr lang="pt-BR" sz="1800" b="1" noProof="0" dirty="0">
                 <a:solidFill>
                   <a:srgbClr val="1F2A33"/>
                 </a:solidFill>
@@ -2207,7 +2218,7 @@
           </a:fontRef>
         </p:style>
         <p:txBody>
-          <a:bodyPr rtlCol="0" anchor="ctr" lIns="125999" rIns="125999" tIns="54000" bIns="54000" wrap="square"/>
+          <a:bodyPr wrap="square" lIns="125999" tIns="54000" rIns="125999" bIns="54000" rtlCol="0" anchor="ctr"/>
           <a:lstStyle/>
           <a:p>
             <a:pPr algn="l">
@@ -2216,7 +2227,7 @@
               </a:spcAft>
             </a:pPr>
             <a:r>
-              <a:rPr sz="1800" b="1">
+              <a:rPr lang="pt-BR" sz="1800" b="1" noProof="0" dirty="0">
                 <a:solidFill>
                   <a:srgbClr val="1F2A33"/>
                 </a:solidFill>
@@ -2264,7 +2275,7 @@
           </a:fontRef>
         </p:style>
         <p:txBody>
-          <a:bodyPr rtlCol="0" anchor="ctr" lIns="125999" rIns="125999" tIns="54000" bIns="54000" wrap="square"/>
+          <a:bodyPr wrap="square" lIns="125999" tIns="54000" rIns="125999" bIns="54000" rtlCol="0" anchor="ctr"/>
           <a:lstStyle/>
           <a:p>
             <a:pPr algn="l">
@@ -2273,7 +2284,7 @@
               </a:spcAft>
             </a:pPr>
             <a:r>
-              <a:rPr sz="1800" b="1">
+              <a:rPr lang="pt-BR" sz="1800" b="1" noProof="0" dirty="0">
                 <a:solidFill>
                   <a:srgbClr val="1F2A33"/>
                 </a:solidFill>
@@ -2321,7 +2332,7 @@
           </a:fontRef>
         </p:style>
         <p:txBody>
-          <a:bodyPr rtlCol="0" anchor="ctr" lIns="125999" rIns="125999" tIns="54000" bIns="54000" wrap="square"/>
+          <a:bodyPr wrap="square" lIns="125999" tIns="54000" rIns="125999" bIns="54000" rtlCol="0" anchor="ctr"/>
           <a:lstStyle/>
           <a:p>
             <a:pPr algn="l">
@@ -2330,7 +2341,7 @@
               </a:spcAft>
             </a:pPr>
             <a:r>
-              <a:rPr sz="1800" b="1">
+              <a:rPr lang="pt-BR" sz="1800" b="1" noProof="0" dirty="0">
                 <a:solidFill>
                   <a:srgbClr val="1F2A33"/>
                 </a:solidFill>
@@ -2344,73 +2355,6 @@
       <p:sp>
         <p:nvSpPr>
           <p:cNvPr id="11" name="Rectangle 10"/>
-          <p:cNvSpPr/>
-          <p:nvPr/>
-        </p:nvSpPr>
-        <p:spPr>
-          <a:xfrm>
-            <a:off x="7236000" y="5076000"/>
-            <a:ext cx="4608000" cy="468000"/>
-          </a:xfrm>
-          <a:prstGeom prst="rect">
-            <a:avLst/>
-          </a:prstGeom>
-          <a:noFill/>
-          <a:ln>
-            <a:noFill/>
-          </a:ln>
-          <a:effectLst/>
-        </p:spPr>
-        <p:style>
-          <a:lnRef idx="1">
-            <a:schemeClr val="accent1"/>
-          </a:lnRef>
-          <a:fillRef idx="3">
-            <a:schemeClr val="accent1"/>
-          </a:fillRef>
-          <a:effectRef idx="2">
-            <a:schemeClr val="accent1"/>
-          </a:effectRef>
-          <a:fontRef idx="minor">
-            <a:schemeClr val="lt1"/>
-          </a:fontRef>
-        </p:style>
-        <p:txBody>
-          <a:bodyPr rtlCol="0" anchor="t" lIns="125999" rIns="125999" tIns="54000" bIns="54000" wrap="square"/>
-          <a:lstStyle/>
-          <a:p>
-            <a:pPr algn="l">
-              <a:spcAft>
-                <a:spcPts val="600"/>
-              </a:spcAft>
-            </a:pPr>
-            <a:r>
-              <a:rPr sz="1400" b="1">
-                <a:solidFill>
-                  <a:srgbClr val="1F2A33"/>
-                </a:solidFill>
-                <a:latin typeface="Calibri"/>
-              </a:rPr>
-              <a:t>Fatorial: </a:t>
-            </a:r>
-            <a:r>
-              <a:rPr sz="1400" b="1">
-                <a:solidFill>
-                  <a:srgbClr val="1F2A33"/>
-                </a:solidFill>
-                <a:highlight>
-                  <a:srgbClr val="FFFF00"/>
-                </a:highlight>
-                <a:latin typeface="Calibri"/>
-              </a:rPr>
-              <a:t>A CONFIRMAR — frase combinada com a Profa. Amanda</a:t>
-            </a:r>
-          </a:p>
-        </p:txBody>
-      </p:sp>
-      <p:sp>
-        <p:nvSpPr>
-          <p:cNvPr id="12" name="Rectangle 11"/>
           <p:cNvSpPr/>
           <p:nvPr/>
         </p:nvSpPr>
@@ -2445,7 +2389,7 @@
           </a:fontRef>
         </p:style>
         <p:txBody>
-          <a:bodyPr rtlCol="0" anchor="ctr" lIns="125999" rIns="125999" tIns="54000" bIns="54000" wrap="square"/>
+          <a:bodyPr wrap="square" lIns="125999" tIns="54000" rIns="125999" bIns="54000" rtlCol="0" anchor="ctr"/>
           <a:lstStyle/>
           <a:p>
             <a:pPr algn="ctr">
@@ -2454,7 +2398,7 @@
               </a:spcAft>
             </a:pPr>
             <a:r>
-              <a:rPr sz="2100" b="1">
+              <a:rPr lang="pt-BR" sz="2100" b="1" noProof="0" dirty="0">
                 <a:solidFill>
                   <a:srgbClr val="3B848E"/>
                 </a:solidFill>
@@ -2470,7 +2414,7 @@
               </a:spcAft>
             </a:pPr>
             <a:r>
-              <a:rPr sz="1600" b="0">
+              <a:rPr lang="pt-BR" sz="1600" b="0" noProof="0" dirty="0">
                 <a:solidFill>
                   <a:srgbClr val="6B7780"/>
                 </a:solidFill>
@@ -2536,7 +2480,7 @@
           <a:p>
             <a:pPr algn="r"/>
             <a:r>
-              <a:rPr lang="pt-BR" sz="2800" b="1" dirty="0"/>
+              <a:rPr lang="pt-BR" sz="2800" b="1" noProof="0" dirty="0"/>
               <a:t>Obrigado(a)!</a:t>
             </a:r>
           </a:p>
@@ -2556,7 +2500,7 @@
 </file>
 
 <file path=ppt/slides/slide12.xml><?xml version="1.0" encoding="utf-8"?>
-<p:sld xmlns:a="http://schemas.openxmlformats.org/drawingml/2006/main" xmlns:p="http://schemas.openxmlformats.org/presentationml/2006/main" xmlns:r="http://schemas.openxmlformats.org/officeDocument/2006/relationships">
+<p:sld xmlns:a="http://schemas.openxmlformats.org/drawingml/2006/main" xmlns:r="http://schemas.openxmlformats.org/officeDocument/2006/relationships" xmlns:p="http://schemas.openxmlformats.org/presentationml/2006/main">
   <p:cSld>
     <p:spTree>
       <p:nvGrpSpPr>
@@ -2564,7 +2508,14 @@
         <p:cNvGrpSpPr/>
         <p:nvPr/>
       </p:nvGrpSpPr>
-      <p:grpSpPr/>
+      <p:grpSpPr>
+        <a:xfrm>
+          <a:off x="0" y="0"/>
+          <a:ext cx="0" cy="0"/>
+          <a:chOff x="0" y="0"/>
+          <a:chExt cx="0" cy="0"/>
+        </a:xfrm>
+      </p:grpSpPr>
       <p:sp>
         <p:nvSpPr>
           <p:cNvPr id="2" name="Rectangle 1"/>
@@ -2600,7 +2551,7 @@
           </a:fontRef>
         </p:style>
         <p:txBody>
-          <a:bodyPr rtlCol="0" anchor="ctr" lIns="125999" rIns="125999" tIns="54000" bIns="54000" wrap="square"/>
+          <a:bodyPr wrap="square" lIns="125999" tIns="54000" rIns="125999" bIns="54000" rtlCol="0" anchor="ctr"/>
           <a:lstStyle/>
           <a:p>
             <a:pPr algn="l">
@@ -2609,7 +2560,7 @@
               </a:spcAft>
             </a:pPr>
             <a:r>
-              <a:rPr sz="2600" b="1">
+              <a:rPr lang="pt-BR" sz="2600" b="1" noProof="0" dirty="0">
                 <a:solidFill>
                   <a:srgbClr val="1F2A33"/>
                 </a:solidFill>
@@ -2626,7 +2577,13 @@
           <p:cNvGraphicFramePr>
             <a:graphicFrameLocks noGrp="1"/>
           </p:cNvGraphicFramePr>
-          <p:nvPr/>
+          <p:nvPr>
+            <p:extLst>
+              <p:ext uri="{D42A27DB-BD31-4B8C-83A1-F6EECF244321}">
+                <p14:modId xmlns:p14="http://schemas.microsoft.com/office/powerpoint/2010/main" val="2908416610"/>
+              </p:ext>
+            </p:extLst>
+          </p:nvPr>
         </p:nvGraphicFramePr>
         <p:xfrm>
           <a:off x="324000" y="1692000"/>
@@ -2639,14 +2596,32 @@
                 <a:tableStyleId>{5C22544A-7EE6-4342-B048-85BDC9FD1C3A}</a:tableStyleId>
               </a:tblPr>
               <a:tblGrid>
-                <a:gridCol w="3780000"/>
-                <a:gridCol w="3780000"/>
-                <a:gridCol w="3960000"/>
+                <a:gridCol w="3780000">
+                  <a:extLst>
+                    <a:ext uri="{9D8B030D-6E8A-4147-A177-3AD203B41FA5}">
+                      <a16:colId xmlns:a16="http://schemas.microsoft.com/office/drawing/2014/main" val="20000"/>
+                    </a:ext>
+                  </a:extLst>
+                </a:gridCol>
+                <a:gridCol w="3780000">
+                  <a:extLst>
+                    <a:ext uri="{9D8B030D-6E8A-4147-A177-3AD203B41FA5}">
+                      <a16:colId xmlns:a16="http://schemas.microsoft.com/office/drawing/2014/main" val="20001"/>
+                    </a:ext>
+                  </a:extLst>
+                </a:gridCol>
+                <a:gridCol w="3960000">
+                  <a:extLst>
+                    <a:ext uri="{9D8B030D-6E8A-4147-A177-3AD203B41FA5}">
+                      <a16:colId xmlns:a16="http://schemas.microsoft.com/office/drawing/2014/main" val="20002"/>
+                    </a:ext>
+                  </a:extLst>
+                </a:gridCol>
               </a:tblGrid>
               <a:tr h="413999">
                 <a:tc>
                   <a:txBody>
-                    <a:bodyPr wrap="square"/>
+                    <a:bodyPr/>
                     <a:lstStyle/>
                     <a:p>
                       <a:pPr algn="l">
@@ -2655,7 +2630,7 @@
                         </a:spcAft>
                       </a:pPr>
                       <a:r>
-                        <a:rPr sz="1500" b="1">
+                        <a:rPr lang="pt-BR" sz="1500" b="1" noProof="0" dirty="0">
                           <a:solidFill>
                             <a:srgbClr val="FFFFFF"/>
                           </a:solidFill>
@@ -2673,7 +2648,7 @@
                 </a:tc>
                 <a:tc>
                   <a:txBody>
-                    <a:bodyPr wrap="square"/>
+                    <a:bodyPr/>
                     <a:lstStyle/>
                     <a:p>
                       <a:pPr algn="ctr">
@@ -2682,7 +2657,7 @@
                         </a:spcAft>
                       </a:pPr>
                       <a:r>
-                        <a:rPr sz="1500" b="1">
+                        <a:rPr lang="pt-BR" sz="1500" b="1" noProof="0" dirty="0">
                           <a:solidFill>
                             <a:srgbClr val="FFFFFF"/>
                           </a:solidFill>
@@ -2700,7 +2675,7 @@
                 </a:tc>
                 <a:tc>
                   <a:txBody>
-                    <a:bodyPr wrap="square"/>
+                    <a:bodyPr/>
                     <a:lstStyle/>
                     <a:p>
                       <a:pPr algn="ctr">
@@ -2709,7 +2684,7 @@
                         </a:spcAft>
                       </a:pPr>
                       <a:r>
-                        <a:rPr sz="1500" b="1">
+                        <a:rPr lang="pt-BR" sz="1500" b="1" noProof="0" dirty="0">
                           <a:solidFill>
                             <a:srgbClr val="FFFFFF"/>
                           </a:solidFill>
@@ -2725,11 +2700,16 @@
                     </a:solidFill>
                   </a:tcPr>
                 </a:tc>
+                <a:extLst>
+                  <a:ext uri="{0D108BD9-81ED-4DB2-BD59-A6C34878D82A}">
+                    <a16:rowId xmlns:a16="http://schemas.microsoft.com/office/drawing/2014/main" val="10000"/>
+                  </a:ext>
+                </a:extLst>
               </a:tr>
               <a:tr h="413999">
                 <a:tc>
                   <a:txBody>
-                    <a:bodyPr wrap="square"/>
+                    <a:bodyPr/>
                     <a:lstStyle/>
                     <a:p>
                       <a:pPr algn="l">
@@ -2738,7 +2718,7 @@
                         </a:spcAft>
                       </a:pPr>
                       <a:r>
-                        <a:rPr sz="1500" b="0">
+                        <a:rPr lang="pt-BR" sz="1500" b="0" noProof="0" dirty="0">
                           <a:solidFill>
                             <a:srgbClr val="1F2A33"/>
                           </a:solidFill>
@@ -2756,7 +2736,7 @@
                 </a:tc>
                 <a:tc>
                   <a:txBody>
-                    <a:bodyPr wrap="square"/>
+                    <a:bodyPr/>
                     <a:lstStyle/>
                     <a:p>
                       <a:pPr algn="ctr">
@@ -2765,7 +2745,7 @@
                         </a:spcAft>
                       </a:pPr>
                       <a:r>
-                        <a:rPr sz="1500" b="0">
+                        <a:rPr lang="pt-BR" sz="1500" b="0" noProof="0" dirty="0">
                           <a:solidFill>
                             <a:srgbClr val="1F2A33"/>
                           </a:solidFill>
@@ -2783,7 +2763,7 @@
                 </a:tc>
                 <a:tc>
                   <a:txBody>
-                    <a:bodyPr wrap="square"/>
+                    <a:bodyPr/>
                     <a:lstStyle/>
                     <a:p>
                       <a:pPr algn="ctr">
@@ -2792,13 +2772,31 @@
                         </a:spcAft>
                       </a:pPr>
                       <a:r>
-                        <a:rPr sz="1500" b="0">
+                        <a:rPr lang="pt-BR" sz="1500" b="0" noProof="0" dirty="0">
                           <a:solidFill>
                             <a:srgbClr val="1F2A33"/>
                           </a:solidFill>
                           <a:latin typeface="Calibri"/>
                         </a:rPr>
-                        <a:t>V00001 (domicílios part. perm. ocupados)</a:t>
+                        <a:t>V00001 (domicílios part. </a:t>
+                      </a:r>
+                      <a:r>
+                        <a:rPr lang="pt-BR" sz="1500" b="0" noProof="0" dirty="0" err="1">
+                          <a:solidFill>
+                            <a:srgbClr val="1F2A33"/>
+                          </a:solidFill>
+                          <a:latin typeface="Calibri"/>
+                        </a:rPr>
+                        <a:t>perm</a:t>
+                      </a:r>
+                      <a:r>
+                        <a:rPr lang="pt-BR" sz="1500" b="0" noProof="0" dirty="0">
+                          <a:solidFill>
+                            <a:srgbClr val="1F2A33"/>
+                          </a:solidFill>
+                          <a:latin typeface="Calibri"/>
+                        </a:rPr>
+                        <a:t>. ocupados)</a:t>
                       </a:r>
                     </a:p>
                   </a:txBody>
@@ -2808,11 +2806,16 @@
                     </a:solidFill>
                   </a:tcPr>
                 </a:tc>
+                <a:extLst>
+                  <a:ext uri="{0D108BD9-81ED-4DB2-BD59-A6C34878D82A}">
+                    <a16:rowId xmlns:a16="http://schemas.microsoft.com/office/drawing/2014/main" val="10001"/>
+                  </a:ext>
+                </a:extLst>
               </a:tr>
               <a:tr h="413999">
                 <a:tc>
                   <a:txBody>
-                    <a:bodyPr wrap="square"/>
+                    <a:bodyPr/>
                     <a:lstStyle/>
                     <a:p>
                       <a:pPr algn="l">
@@ -2821,7 +2824,7 @@
                         </a:spcAft>
                       </a:pPr>
                       <a:r>
-                        <a:rPr sz="1500" b="0">
+                        <a:rPr lang="pt-BR" sz="1500" b="0" noProof="0" dirty="0">
                           <a:solidFill>
                             <a:srgbClr val="1F2A33"/>
                           </a:solidFill>
@@ -2839,7 +2842,7 @@
                 </a:tc>
                 <a:tc>
                   <a:txBody>
-                    <a:bodyPr wrap="square"/>
+                    <a:bodyPr/>
                     <a:lstStyle/>
                     <a:p>
                       <a:pPr algn="ctr">
@@ -2848,7 +2851,7 @@
                         </a:spcAft>
                       </a:pPr>
                       <a:r>
-                        <a:rPr sz="1500" b="0">
+                        <a:rPr lang="pt-BR" sz="1500" b="0" noProof="0" dirty="0">
                           <a:solidFill>
                             <a:srgbClr val="1F2A33"/>
                           </a:solidFill>
@@ -2866,7 +2869,7 @@
                 </a:tc>
                 <a:tc>
                   <a:txBody>
-                    <a:bodyPr wrap="square"/>
+                    <a:bodyPr/>
                     <a:lstStyle/>
                     <a:p>
                       <a:pPr algn="ctr">
@@ -2875,7 +2878,7 @@
                         </a:spcAft>
                       </a:pPr>
                       <a:r>
-                        <a:rPr sz="1500" b="0">
+                        <a:rPr lang="pt-BR" sz="1500" b="0" noProof="0" dirty="0">
                           <a:solidFill>
                             <a:srgbClr val="1F2A33"/>
                           </a:solidFill>
@@ -2891,11 +2894,16 @@
                     </a:solidFill>
                   </a:tcPr>
                 </a:tc>
+                <a:extLst>
+                  <a:ext uri="{0D108BD9-81ED-4DB2-BD59-A6C34878D82A}">
+                    <a16:rowId xmlns:a16="http://schemas.microsoft.com/office/drawing/2014/main" val="10002"/>
+                  </a:ext>
+                </a:extLst>
               </a:tr>
               <a:tr h="413999">
                 <a:tc>
                   <a:txBody>
-                    <a:bodyPr wrap="square"/>
+                    <a:bodyPr/>
                     <a:lstStyle/>
                     <a:p>
                       <a:pPr algn="l">
@@ -2904,7 +2912,7 @@
                         </a:spcAft>
                       </a:pPr>
                       <a:r>
-                        <a:rPr sz="1500" b="0">
+                        <a:rPr lang="pt-BR" sz="1500" b="0" noProof="0" dirty="0">
                           <a:solidFill>
                             <a:srgbClr val="1F2A33"/>
                           </a:solidFill>
@@ -2922,7 +2930,7 @@
                 </a:tc>
                 <a:tc>
                   <a:txBody>
-                    <a:bodyPr wrap="square"/>
+                    <a:bodyPr/>
                     <a:lstStyle/>
                     <a:p>
                       <a:pPr algn="ctr">
@@ -2931,7 +2939,7 @@
                         </a:spcAft>
                       </a:pPr>
                       <a:r>
-                        <a:rPr sz="1500" b="0">
+                        <a:rPr lang="pt-BR" sz="1500" b="0" noProof="0" dirty="0">
                           <a:solidFill>
                             <a:srgbClr val="1F2A33"/>
                           </a:solidFill>
@@ -2949,7 +2957,7 @@
                 </a:tc>
                 <a:tc>
                   <a:txBody>
-                    <a:bodyPr wrap="square"/>
+                    <a:bodyPr/>
                     <a:lstStyle/>
                     <a:p>
                       <a:pPr algn="ctr">
@@ -2958,7 +2966,7 @@
                         </a:spcAft>
                       </a:pPr>
                       <a:r>
-                        <a:rPr sz="1500" b="0">
+                        <a:rPr lang="pt-BR" sz="1500" b="0" noProof="0" dirty="0">
                           <a:solidFill>
                             <a:srgbClr val="1F2A33"/>
                           </a:solidFill>
@@ -2974,11 +2982,16 @@
                     </a:solidFill>
                   </a:tcPr>
                 </a:tc>
+                <a:extLst>
+                  <a:ext uri="{0D108BD9-81ED-4DB2-BD59-A6C34878D82A}">
+                    <a16:rowId xmlns:a16="http://schemas.microsoft.com/office/drawing/2014/main" val="10003"/>
+                  </a:ext>
+                </a:extLst>
               </a:tr>
               <a:tr h="413999">
                 <a:tc>
                   <a:txBody>
-                    <a:bodyPr wrap="square"/>
+                    <a:bodyPr/>
                     <a:lstStyle/>
                     <a:p>
                       <a:pPr algn="l">
@@ -2987,7 +3000,7 @@
                         </a:spcAft>
                       </a:pPr>
                       <a:r>
-                        <a:rPr sz="1500" b="0">
+                        <a:rPr lang="pt-BR" sz="1500" b="0" noProof="0" dirty="0">
                           <a:solidFill>
                             <a:srgbClr val="1F2A33"/>
                           </a:solidFill>
@@ -3005,7 +3018,7 @@
                 </a:tc>
                 <a:tc>
                   <a:txBody>
-                    <a:bodyPr wrap="square"/>
+                    <a:bodyPr/>
                     <a:lstStyle/>
                     <a:p>
                       <a:pPr algn="ctr">
@@ -3014,7 +3027,7 @@
                         </a:spcAft>
                       </a:pPr>
                       <a:r>
-                        <a:rPr sz="1500" b="0">
+                        <a:rPr lang="pt-BR" sz="1500" b="0" noProof="0" dirty="0">
                           <a:solidFill>
                             <a:srgbClr val="1F2A33"/>
                           </a:solidFill>
@@ -3032,7 +3045,7 @@
                 </a:tc>
                 <a:tc>
                   <a:txBody>
-                    <a:bodyPr wrap="square"/>
+                    <a:bodyPr/>
                     <a:lstStyle/>
                     <a:p>
                       <a:pPr algn="ctr">
@@ -3041,7 +3054,7 @@
                         </a:spcAft>
                       </a:pPr>
                       <a:r>
-                        <a:rPr sz="1500" b="0">
+                        <a:rPr lang="pt-BR" sz="1500" b="0" noProof="0" dirty="0">
                           <a:solidFill>
                             <a:srgbClr val="1F2A33"/>
                           </a:solidFill>
@@ -3057,11 +3070,16 @@
                     </a:solidFill>
                   </a:tcPr>
                 </a:tc>
+                <a:extLst>
+                  <a:ext uri="{0D108BD9-81ED-4DB2-BD59-A6C34878D82A}">
+                    <a16:rowId xmlns:a16="http://schemas.microsoft.com/office/drawing/2014/main" val="10004"/>
+                  </a:ext>
+                </a:extLst>
               </a:tr>
               <a:tr h="413999">
                 <a:tc>
                   <a:txBody>
-                    <a:bodyPr wrap="square"/>
+                    <a:bodyPr/>
                     <a:lstStyle/>
                     <a:p>
                       <a:pPr algn="l">
@@ -3070,7 +3088,7 @@
                         </a:spcAft>
                       </a:pPr>
                       <a:r>
-                        <a:rPr sz="1500" b="0">
+                        <a:rPr lang="pt-BR" sz="1500" b="0" noProof="0" dirty="0">
                           <a:solidFill>
                             <a:srgbClr val="1F2A33"/>
                           </a:solidFill>
@@ -3088,7 +3106,7 @@
                 </a:tc>
                 <a:tc>
                   <a:txBody>
-                    <a:bodyPr wrap="square"/>
+                    <a:bodyPr/>
                     <a:lstStyle/>
                     <a:p>
                       <a:pPr algn="ctr">
@@ -3097,7 +3115,7 @@
                         </a:spcAft>
                       </a:pPr>
                       <a:r>
-                        <a:rPr sz="1500" b="0">
+                        <a:rPr lang="pt-BR" sz="1500" b="0" noProof="0" dirty="0">
                           <a:solidFill>
                             <a:srgbClr val="1F2A33"/>
                           </a:solidFill>
@@ -3115,7 +3133,7 @@
                 </a:tc>
                 <a:tc>
                   <a:txBody>
-                    <a:bodyPr wrap="square"/>
+                    <a:bodyPr/>
                     <a:lstStyle/>
                     <a:p>
                       <a:pPr algn="ctr">
@@ -3124,7 +3142,7 @@
                         </a:spcAft>
                       </a:pPr>
                       <a:r>
-                        <a:rPr sz="1500" b="0">
+                        <a:rPr lang="pt-BR" sz="1500" b="0" noProof="0" dirty="0">
                           <a:solidFill>
                             <a:srgbClr val="1F2A33"/>
                           </a:solidFill>
@@ -3140,11 +3158,16 @@
                     </a:solidFill>
                   </a:tcPr>
                 </a:tc>
+                <a:extLst>
+                  <a:ext uri="{0D108BD9-81ED-4DB2-BD59-A6C34878D82A}">
+                    <a16:rowId xmlns:a16="http://schemas.microsoft.com/office/drawing/2014/main" val="10005"/>
+                  </a:ext>
+                </a:extLst>
               </a:tr>
               <a:tr h="413999">
                 <a:tc>
                   <a:txBody>
-                    <a:bodyPr wrap="square"/>
+                    <a:bodyPr/>
                     <a:lstStyle/>
                     <a:p>
                       <a:pPr algn="l">
@@ -3153,7 +3176,7 @@
                         </a:spcAft>
                       </a:pPr>
                       <a:r>
-                        <a:rPr sz="1500" b="0">
+                        <a:rPr lang="pt-BR" sz="1500" b="0" noProof="0" dirty="0">
                           <a:solidFill>
                             <a:srgbClr val="1F2A33"/>
                           </a:solidFill>
@@ -3171,7 +3194,7 @@
                 </a:tc>
                 <a:tc>
                   <a:txBody>
-                    <a:bodyPr wrap="square"/>
+                    <a:bodyPr/>
                     <a:lstStyle/>
                     <a:p>
                       <a:pPr algn="ctr">
@@ -3180,7 +3203,7 @@
                         </a:spcAft>
                       </a:pPr>
                       <a:r>
-                        <a:rPr sz="1500" b="0">
+                        <a:rPr lang="pt-BR" sz="1500" b="0" noProof="0" dirty="0">
                           <a:solidFill>
                             <a:srgbClr val="1F2A33"/>
                           </a:solidFill>
@@ -3198,7 +3221,7 @@
                 </a:tc>
                 <a:tc>
                   <a:txBody>
-                    <a:bodyPr wrap="square"/>
+                    <a:bodyPr/>
                     <a:lstStyle/>
                     <a:p>
                       <a:pPr algn="ctr">
@@ -3207,7 +3230,7 @@
                         </a:spcAft>
                       </a:pPr>
                       <a:r>
-                        <a:rPr sz="1500" b="0">
+                        <a:rPr lang="pt-BR" sz="1500" b="0" noProof="0" dirty="0">
                           <a:solidFill>
                             <a:srgbClr val="1F2A33"/>
                           </a:solidFill>
@@ -3223,11 +3246,16 @@
                     </a:solidFill>
                   </a:tcPr>
                 </a:tc>
+                <a:extLst>
+                  <a:ext uri="{0D108BD9-81ED-4DB2-BD59-A6C34878D82A}">
+                    <a16:rowId xmlns:a16="http://schemas.microsoft.com/office/drawing/2014/main" val="10006"/>
+                  </a:ext>
+                </a:extLst>
               </a:tr>
               <a:tr h="414006">
                 <a:tc>
                   <a:txBody>
-                    <a:bodyPr wrap="square"/>
+                    <a:bodyPr/>
                     <a:lstStyle/>
                     <a:p>
                       <a:pPr algn="l">
@@ -3236,7 +3264,7 @@
                         </a:spcAft>
                       </a:pPr>
                       <a:r>
-                        <a:rPr sz="1500" b="0">
+                        <a:rPr lang="pt-BR" sz="1500" b="0" noProof="0" dirty="0">
                           <a:solidFill>
                             <a:srgbClr val="1F2A33"/>
                           </a:solidFill>
@@ -3254,7 +3282,7 @@
                 </a:tc>
                 <a:tc>
                   <a:txBody>
-                    <a:bodyPr wrap="square"/>
+                    <a:bodyPr/>
                     <a:lstStyle/>
                     <a:p>
                       <a:pPr algn="ctr">
@@ -3263,7 +3291,7 @@
                         </a:spcAft>
                       </a:pPr>
                       <a:r>
-                        <a:rPr sz="1500" b="0">
+                        <a:rPr lang="pt-BR" sz="1500" b="0" noProof="0" dirty="0">
                           <a:solidFill>
                             <a:srgbClr val="1F2A33"/>
                           </a:solidFill>
@@ -3281,7 +3309,7 @@
                 </a:tc>
                 <a:tc>
                   <a:txBody>
-                    <a:bodyPr wrap="square"/>
+                    <a:bodyPr/>
                     <a:lstStyle/>
                     <a:p>
                       <a:pPr algn="ctr">
@@ -3290,7 +3318,7 @@
                         </a:spcAft>
                       </a:pPr>
                       <a:r>
-                        <a:rPr sz="1500" b="0">
+                        <a:rPr lang="pt-BR" sz="1500" b="0" noProof="0" dirty="0">
                           <a:solidFill>
                             <a:srgbClr val="1F2A33"/>
                           </a:solidFill>
@@ -3306,6 +3334,11 @@
                     </a:solidFill>
                   </a:tcPr>
                 </a:tc>
+                <a:extLst>
+                  <a:ext uri="{0D108BD9-81ED-4DB2-BD59-A6C34878D82A}">
+                    <a16:rowId xmlns:a16="http://schemas.microsoft.com/office/drawing/2014/main" val="10007"/>
+                  </a:ext>
+                </a:extLst>
               </a:tr>
             </a:tbl>
           </a:graphicData>
@@ -3346,7 +3379,7 @@
           </a:fontRef>
         </p:style>
         <p:txBody>
-          <a:bodyPr rtlCol="0" anchor="t" lIns="125999" rIns="125999" tIns="54000" bIns="54000" wrap="square"/>
+          <a:bodyPr wrap="square" lIns="125999" tIns="54000" rIns="125999" bIns="54000" rtlCol="0" anchor="t"/>
           <a:lstStyle/>
           <a:p>
             <a:pPr algn="l">
@@ -3355,7 +3388,7 @@
               </a:spcAft>
             </a:pPr>
             <a:r>
-              <a:rPr sz="1500" b="0">
+              <a:rPr lang="pt-BR" sz="1500" b="0" noProof="0" dirty="0">
                 <a:solidFill>
                   <a:srgbClr val="6B7780"/>
                 </a:solidFill>
@@ -3401,7 +3434,7 @@
           </a:fontRef>
         </p:style>
         <p:txBody>
-          <a:bodyPr rtlCol="0" anchor="t" lIns="125999" rIns="125999" tIns="54000" bIns="54000" wrap="square"/>
+          <a:bodyPr wrap="square" lIns="125999" tIns="54000" rIns="125999" bIns="54000" rtlCol="0" anchor="t"/>
           <a:lstStyle/>
           <a:p>
             <a:pPr algn="l">
@@ -3410,7 +3443,7 @@
               </a:spcAft>
             </a:pPr>
             <a:r>
-              <a:rPr sz="1100" b="0">
+              <a:rPr lang="pt-BR" sz="1100" b="0" noProof="0" dirty="0">
                 <a:solidFill>
                   <a:srgbClr val="6B7780"/>
                 </a:solidFill>
@@ -3430,7 +3463,7 @@
 </file>
 
 <file path=ppt/slides/slide13.xml><?xml version="1.0" encoding="utf-8"?>
-<p:sld xmlns:a="http://schemas.openxmlformats.org/drawingml/2006/main" xmlns:p="http://schemas.openxmlformats.org/presentationml/2006/main" xmlns:r="http://schemas.openxmlformats.org/officeDocument/2006/relationships">
+<p:sld xmlns:a="http://schemas.openxmlformats.org/drawingml/2006/main" xmlns:r="http://schemas.openxmlformats.org/officeDocument/2006/relationships" xmlns:p="http://schemas.openxmlformats.org/presentationml/2006/main">
   <p:cSld>
     <p:spTree>
       <p:nvGrpSpPr>
@@ -3438,7 +3471,14 @@
         <p:cNvGrpSpPr/>
         <p:nvPr/>
       </p:nvGrpSpPr>
-      <p:grpSpPr/>
+      <p:grpSpPr>
+        <a:xfrm>
+          <a:off x="0" y="0"/>
+          <a:ext cx="0" cy="0"/>
+          <a:chOff x="0" y="0"/>
+          <a:chExt cx="0" cy="0"/>
+        </a:xfrm>
+      </p:grpSpPr>
       <p:sp>
         <p:nvSpPr>
           <p:cNvPr id="2" name="Rectangle 1"/>
@@ -3474,7 +3514,7 @@
           </a:fontRef>
         </p:style>
         <p:txBody>
-          <a:bodyPr rtlCol="0" anchor="ctr" lIns="125999" rIns="125999" tIns="54000" bIns="54000" wrap="square"/>
+          <a:bodyPr wrap="square" lIns="125999" tIns="54000" rIns="125999" bIns="54000" rtlCol="0" anchor="ctr"/>
           <a:lstStyle/>
           <a:p>
             <a:pPr algn="l">
@@ -3483,13 +3523,31 @@
               </a:spcAft>
             </a:pPr>
             <a:r>
-              <a:rPr sz="2600" b="1">
+              <a:rPr lang="pt-BR" sz="2600" b="1" noProof="0" dirty="0">
                 <a:solidFill>
                   <a:srgbClr val="1F2A33"/>
                 </a:solidFill>
                 <a:latin typeface="Calibri"/>
               </a:rPr>
-              <a:t>Reserva R2 · Correlação de Spearman entre os 12 indicadores</a:t>
+              <a:t>Reserva R2 · Correlação de </a:t>
+            </a:r>
+            <a:r>
+              <a:rPr lang="pt-BR" sz="2600" b="1" noProof="0" dirty="0" err="1">
+                <a:solidFill>
+                  <a:srgbClr val="1F2A33"/>
+                </a:solidFill>
+                <a:latin typeface="Calibri"/>
+              </a:rPr>
+              <a:t>Spearman</a:t>
+            </a:r>
+            <a:r>
+              <a:rPr lang="pt-BR" sz="2600" b="1" noProof="0" dirty="0">
+                <a:solidFill>
+                  <a:srgbClr val="1F2A33"/>
+                </a:solidFill>
+                <a:latin typeface="Calibri"/>
+              </a:rPr>
+              <a:t> entre os 12 indicadores</a:t>
             </a:r>
           </a:p>
         </p:txBody>
@@ -3553,7 +3611,7 @@
           </a:fontRef>
         </p:style>
         <p:txBody>
-          <a:bodyPr rtlCol="0" anchor="t" lIns="125999" rIns="125999" tIns="54000" bIns="54000" wrap="square"/>
+          <a:bodyPr wrap="square" lIns="125999" tIns="54000" rIns="125999" bIns="54000" rtlCol="0" anchor="t"/>
           <a:lstStyle/>
           <a:p>
             <a:pPr algn="l">
@@ -3562,13 +3620,22 @@
               </a:spcAft>
             </a:pPr>
             <a:r>
-              <a:rPr sz="1100" b="0">
+              <a:rPr lang="pt-BR" sz="1100" b="0" noProof="0" dirty="0" err="1">
                 <a:solidFill>
                   <a:srgbClr val="6B7780"/>
                 </a:solidFill>
                 <a:latin typeface="Calibri"/>
               </a:rPr>
-              <a:t>n = 75.629 setores com os 12 indicadores completos; renda invertida. Figura 1 do relatório parcial.</a:t>
+              <a:t>n</a:t>
+            </a:r>
+            <a:r>
+              <a:rPr lang="pt-BR" sz="1100" b="0" noProof="0" dirty="0">
+                <a:solidFill>
+                  <a:srgbClr val="6B7780"/>
+                </a:solidFill>
+                <a:latin typeface="Calibri"/>
+              </a:rPr>
+              <a:t> = 75.629 setores com os 12 indicadores completos; renda invertida. Figura 1 do relatório parcial.</a:t>
             </a:r>
           </a:p>
         </p:txBody>
@@ -3582,7 +3649,7 @@
 </file>
 
 <file path=ppt/slides/slide14.xml><?xml version="1.0" encoding="utf-8"?>
-<p:sld xmlns:a="http://schemas.openxmlformats.org/drawingml/2006/main" xmlns:p="http://schemas.openxmlformats.org/presentationml/2006/main" xmlns:r="http://schemas.openxmlformats.org/officeDocument/2006/relationships">
+<p:sld xmlns:a="http://schemas.openxmlformats.org/drawingml/2006/main" xmlns:r="http://schemas.openxmlformats.org/officeDocument/2006/relationships" xmlns:p="http://schemas.openxmlformats.org/presentationml/2006/main">
   <p:cSld>
     <p:spTree>
       <p:nvGrpSpPr>
@@ -3590,7 +3657,14 @@
         <p:cNvGrpSpPr/>
         <p:nvPr/>
       </p:nvGrpSpPr>
-      <p:grpSpPr/>
+      <p:grpSpPr>
+        <a:xfrm>
+          <a:off x="0" y="0"/>
+          <a:ext cx="0" cy="0"/>
+          <a:chOff x="0" y="0"/>
+          <a:chExt cx="0" cy="0"/>
+        </a:xfrm>
+      </p:grpSpPr>
       <p:sp>
         <p:nvSpPr>
           <p:cNvPr id="2" name="Rectangle 1"/>
@@ -3626,7 +3700,7 @@
           </a:fontRef>
         </p:style>
         <p:txBody>
-          <a:bodyPr rtlCol="0" anchor="ctr" lIns="125999" rIns="125999" tIns="54000" bIns="54000" wrap="square"/>
+          <a:bodyPr wrap="square" lIns="125999" tIns="54000" rIns="125999" bIns="54000" rtlCol="0" anchor="ctr"/>
           <a:lstStyle/>
           <a:p>
             <a:pPr algn="l">
@@ -3635,7 +3709,7 @@
               </a:spcAft>
             </a:pPr>
             <a:r>
-              <a:rPr sz="2600" b="1">
+              <a:rPr lang="pt-BR" sz="2600" b="1" noProof="0" dirty="0">
                 <a:solidFill>
                   <a:srgbClr val="1F2A33"/>
                 </a:solidFill>
@@ -3652,7 +3726,13 @@
           <p:cNvGraphicFramePr>
             <a:graphicFrameLocks noGrp="1"/>
           </p:cNvGraphicFramePr>
-          <p:nvPr/>
+          <p:nvPr>
+            <p:extLst>
+              <p:ext uri="{D42A27DB-BD31-4B8C-83A1-F6EECF244321}">
+                <p14:modId xmlns:p14="http://schemas.microsoft.com/office/powerpoint/2010/main" val="2175957227"/>
+              </p:ext>
+            </p:extLst>
+          </p:nvPr>
         </p:nvGraphicFramePr>
         <p:xfrm>
           <a:off x="324000" y="1584000"/>
@@ -3665,18 +3745,60 @@
                 <a:tableStyleId>{5C22544A-7EE6-4342-B048-85BDC9FD1C3A}</a:tableStyleId>
               </a:tblPr>
               <a:tblGrid>
-                <a:gridCol w="3311999"/>
-                <a:gridCol w="1296000"/>
-                <a:gridCol w="1368000"/>
-                <a:gridCol w="1368000"/>
-                <a:gridCol w="1368000"/>
-                <a:gridCol w="1440000"/>
-                <a:gridCol w="1368000"/>
+                <a:gridCol w="3311999">
+                  <a:extLst>
+                    <a:ext uri="{9D8B030D-6E8A-4147-A177-3AD203B41FA5}">
+                      <a16:colId xmlns:a16="http://schemas.microsoft.com/office/drawing/2014/main" val="20000"/>
+                    </a:ext>
+                  </a:extLst>
+                </a:gridCol>
+                <a:gridCol w="1296000">
+                  <a:extLst>
+                    <a:ext uri="{9D8B030D-6E8A-4147-A177-3AD203B41FA5}">
+                      <a16:colId xmlns:a16="http://schemas.microsoft.com/office/drawing/2014/main" val="20001"/>
+                    </a:ext>
+                  </a:extLst>
+                </a:gridCol>
+                <a:gridCol w="1368000">
+                  <a:extLst>
+                    <a:ext uri="{9D8B030D-6E8A-4147-A177-3AD203B41FA5}">
+                      <a16:colId xmlns:a16="http://schemas.microsoft.com/office/drawing/2014/main" val="20002"/>
+                    </a:ext>
+                  </a:extLst>
+                </a:gridCol>
+                <a:gridCol w="1368000">
+                  <a:extLst>
+                    <a:ext uri="{9D8B030D-6E8A-4147-A177-3AD203B41FA5}">
+                      <a16:colId xmlns:a16="http://schemas.microsoft.com/office/drawing/2014/main" val="20003"/>
+                    </a:ext>
+                  </a:extLst>
+                </a:gridCol>
+                <a:gridCol w="1368000">
+                  <a:extLst>
+                    <a:ext uri="{9D8B030D-6E8A-4147-A177-3AD203B41FA5}">
+                      <a16:colId xmlns:a16="http://schemas.microsoft.com/office/drawing/2014/main" val="20004"/>
+                    </a:ext>
+                  </a:extLst>
+                </a:gridCol>
+                <a:gridCol w="1440000">
+                  <a:extLst>
+                    <a:ext uri="{9D8B030D-6E8A-4147-A177-3AD203B41FA5}">
+                      <a16:colId xmlns:a16="http://schemas.microsoft.com/office/drawing/2014/main" val="20005"/>
+                    </a:ext>
+                  </a:extLst>
+                </a:gridCol>
+                <a:gridCol w="1368000">
+                  <a:extLst>
+                    <a:ext uri="{9D8B030D-6E8A-4147-A177-3AD203B41FA5}">
+                      <a16:colId xmlns:a16="http://schemas.microsoft.com/office/drawing/2014/main" val="20006"/>
+                    </a:ext>
+                  </a:extLst>
+                </a:gridCol>
               </a:tblGrid>
               <a:tr h="360000">
                 <a:tc>
                   <a:txBody>
-                    <a:bodyPr wrap="square"/>
+                    <a:bodyPr/>
                     <a:lstStyle/>
                     <a:p>
                       <a:pPr algn="l">
@@ -3685,7 +3807,7 @@
                         </a:spcAft>
                       </a:pPr>
                       <a:r>
-                        <a:rPr sz="1300" b="1">
+                        <a:rPr lang="pt-BR" sz="1300" b="1" noProof="0" dirty="0">
                           <a:solidFill>
                             <a:srgbClr val="FFFFFF"/>
                           </a:solidFill>
@@ -3703,7 +3825,7 @@
                 </a:tc>
                 <a:tc>
                   <a:txBody>
-                    <a:bodyPr wrap="square"/>
+                    <a:bodyPr/>
                     <a:lstStyle/>
                     <a:p>
                       <a:pPr algn="ctr">
@@ -3712,7 +3834,7 @@
                         </a:spcAft>
                       </a:pPr>
                       <a:r>
-                        <a:rPr sz="1300" b="1">
+                        <a:rPr lang="pt-BR" sz="1300" b="1" noProof="0" dirty="0" err="1">
                           <a:solidFill>
                             <a:srgbClr val="FFFFFF"/>
                           </a:solidFill>
@@ -3720,6 +3842,12 @@
                         </a:rPr>
                         <a:t>n</a:t>
                       </a:r>
+                      <a:endParaRPr lang="pt-BR" sz="1300" b="1" noProof="0" dirty="0">
+                        <a:solidFill>
+                          <a:srgbClr val="FFFFFF"/>
+                        </a:solidFill>
+                        <a:latin typeface="Calibri"/>
+                      </a:endParaRPr>
                     </a:p>
                   </a:txBody>
                   <a:tcPr marL="72000" marR="72000" marT="18000" marB="18000">
@@ -3730,7 +3858,7 @@
                 </a:tc>
                 <a:tc>
                   <a:txBody>
-                    <a:bodyPr wrap="square"/>
+                    <a:bodyPr/>
                     <a:lstStyle/>
                     <a:p>
                       <a:pPr algn="ctr">
@@ -3739,7 +3867,7 @@
                         </a:spcAft>
                       </a:pPr>
                       <a:r>
-                        <a:rPr sz="1300" b="1">
+                        <a:rPr lang="pt-BR" sz="1300" b="1" noProof="0" dirty="0">
                           <a:solidFill>
                             <a:srgbClr val="FFFFFF"/>
                           </a:solidFill>
@@ -3757,7 +3885,7 @@
                 </a:tc>
                 <a:tc>
                   <a:txBody>
-                    <a:bodyPr wrap="square"/>
+                    <a:bodyPr/>
                     <a:lstStyle/>
                     <a:p>
                       <a:pPr algn="ctr">
@@ -3766,7 +3894,7 @@
                         </a:spcAft>
                       </a:pPr>
                       <a:r>
-                        <a:rPr sz="1300" b="1">
+                        <a:rPr lang="pt-BR" sz="1300" b="1" noProof="0" dirty="0">
                           <a:solidFill>
                             <a:srgbClr val="FFFFFF"/>
                           </a:solidFill>
@@ -3784,7 +3912,7 @@
                 </a:tc>
                 <a:tc>
                   <a:txBody>
-                    <a:bodyPr wrap="square"/>
+                    <a:bodyPr/>
                     <a:lstStyle/>
                     <a:p>
                       <a:pPr algn="ctr">
@@ -3793,7 +3921,7 @@
                         </a:spcAft>
                       </a:pPr>
                       <a:r>
-                        <a:rPr sz="1300" b="1">
+                        <a:rPr lang="pt-BR" sz="1300" b="1" noProof="0" dirty="0">
                           <a:solidFill>
                             <a:srgbClr val="FFFFFF"/>
                           </a:solidFill>
@@ -3811,7 +3939,7 @@
                 </a:tc>
                 <a:tc>
                   <a:txBody>
-                    <a:bodyPr wrap="square"/>
+                    <a:bodyPr/>
                     <a:lstStyle/>
                     <a:p>
                       <a:pPr algn="ctr">
@@ -3820,7 +3948,7 @@
                         </a:spcAft>
                       </a:pPr>
                       <a:r>
-                        <a:rPr sz="1300" b="1">
+                        <a:rPr lang="pt-BR" sz="1300" b="1" noProof="0" dirty="0" err="1">
                           <a:solidFill>
                             <a:srgbClr val="FFFFFF"/>
                           </a:solidFill>
@@ -3828,6 +3956,12 @@
                         </a:rPr>
                         <a:t>Máx</a:t>
                       </a:r>
+                      <a:endParaRPr lang="pt-BR" sz="1300" b="1" noProof="0" dirty="0">
+                        <a:solidFill>
+                          <a:srgbClr val="FFFFFF"/>
+                        </a:solidFill>
+                        <a:latin typeface="Calibri"/>
+                      </a:endParaRPr>
                     </a:p>
                   </a:txBody>
                   <a:tcPr marL="72000" marR="72000" marT="18000" marB="18000">
@@ -3838,7 +3972,7 @@
                 </a:tc>
                 <a:tc>
                   <a:txBody>
-                    <a:bodyPr wrap="square"/>
+                    <a:bodyPr/>
                     <a:lstStyle/>
                     <a:p>
                       <a:pPr algn="ctr">
@@ -3847,7 +3981,7 @@
                         </a:spcAft>
                       </a:pPr>
                       <a:r>
-                        <a:rPr sz="1300" b="1">
+                        <a:rPr lang="pt-BR" sz="1300" b="1" noProof="0" dirty="0">
                           <a:solidFill>
                             <a:srgbClr val="FFFFFF"/>
                           </a:solidFill>
@@ -3863,11 +3997,16 @@
                     </a:solidFill>
                   </a:tcPr>
                 </a:tc>
+                <a:extLst>
+                  <a:ext uri="{0D108BD9-81ED-4DB2-BD59-A6C34878D82A}">
+                    <a16:rowId xmlns:a16="http://schemas.microsoft.com/office/drawing/2014/main" val="10000"/>
+                  </a:ext>
+                </a:extLst>
               </a:tr>
               <a:tr h="360000">
                 <a:tc>
                   <a:txBody>
-                    <a:bodyPr wrap="square"/>
+                    <a:bodyPr/>
                     <a:lstStyle/>
                     <a:p>
                       <a:pPr algn="l">
@@ -3876,7 +4015,7 @@
                         </a:spcAft>
                       </a:pPr>
                       <a:r>
-                        <a:rPr sz="1300" b="0">
+                        <a:rPr lang="pt-BR" sz="1300" b="0" noProof="0" dirty="0">
                           <a:solidFill>
                             <a:srgbClr val="1F2A33"/>
                           </a:solidFill>
@@ -3894,7 +4033,7 @@
                 </a:tc>
                 <a:tc>
                   <a:txBody>
-                    <a:bodyPr wrap="square"/>
+                    <a:bodyPr/>
                     <a:lstStyle/>
                     <a:p>
                       <a:pPr algn="ctr">
@@ -3903,7 +4042,7 @@
                         </a:spcAft>
                       </a:pPr>
                       <a:r>
-                        <a:rPr sz="1300" b="0">
+                        <a:rPr lang="pt-BR" sz="1300" b="0" noProof="0" dirty="0">
                           <a:solidFill>
                             <a:srgbClr val="1F2A33"/>
                           </a:solidFill>
@@ -3921,7 +4060,7 @@
                 </a:tc>
                 <a:tc>
                   <a:txBody>
-                    <a:bodyPr wrap="square"/>
+                    <a:bodyPr/>
                     <a:lstStyle/>
                     <a:p>
                       <a:pPr algn="ctr">
@@ -3930,7 +4069,7 @@
                         </a:spcAft>
                       </a:pPr>
                       <a:r>
-                        <a:rPr sz="1300" b="0">
+                        <a:rPr lang="pt-BR" sz="1300" b="0" noProof="0" dirty="0">
                           <a:solidFill>
                             <a:srgbClr val="1F2A33"/>
                           </a:solidFill>
@@ -3948,7 +4087,7 @@
                 </a:tc>
                 <a:tc>
                   <a:txBody>
-                    <a:bodyPr wrap="square"/>
+                    <a:bodyPr/>
                     <a:lstStyle/>
                     <a:p>
                       <a:pPr algn="ctr">
@@ -3957,7 +4096,7 @@
                         </a:spcAft>
                       </a:pPr>
                       <a:r>
-                        <a:rPr sz="1300" b="0">
+                        <a:rPr lang="pt-BR" sz="1300" b="0" noProof="0" dirty="0">
                           <a:solidFill>
                             <a:srgbClr val="1F2A33"/>
                           </a:solidFill>
@@ -3975,7 +4114,7 @@
                 </a:tc>
                 <a:tc>
                   <a:txBody>
-                    <a:bodyPr wrap="square"/>
+                    <a:bodyPr/>
                     <a:lstStyle/>
                     <a:p>
                       <a:pPr algn="ctr">
@@ -3984,7 +4123,7 @@
                         </a:spcAft>
                       </a:pPr>
                       <a:r>
-                        <a:rPr sz="1300" b="0">
+                        <a:rPr lang="pt-BR" sz="1300" b="0" noProof="0" dirty="0">
                           <a:solidFill>
                             <a:srgbClr val="1F2A33"/>
                           </a:solidFill>
@@ -4002,7 +4141,7 @@
                 </a:tc>
                 <a:tc>
                   <a:txBody>
-                    <a:bodyPr wrap="square"/>
+                    <a:bodyPr/>
                     <a:lstStyle/>
                     <a:p>
                       <a:pPr algn="ctr">
@@ -4011,7 +4150,7 @@
                         </a:spcAft>
                       </a:pPr>
                       <a:r>
-                        <a:rPr sz="1300" b="0">
+                        <a:rPr lang="pt-BR" sz="1300" b="0" noProof="0" dirty="0">
                           <a:solidFill>
                             <a:srgbClr val="1F2A33"/>
                           </a:solidFill>
@@ -4029,7 +4168,7 @@
                 </a:tc>
                 <a:tc>
                   <a:txBody>
-                    <a:bodyPr wrap="square"/>
+                    <a:bodyPr/>
                     <a:lstStyle/>
                     <a:p>
                       <a:pPr algn="ctr">
@@ -4038,7 +4177,7 @@
                         </a:spcAft>
                       </a:pPr>
                       <a:r>
-                        <a:rPr sz="1300" b="0">
+                        <a:rPr lang="pt-BR" sz="1300" b="0" noProof="0" dirty="0">
                           <a:solidFill>
                             <a:srgbClr val="1F2A33"/>
                           </a:solidFill>
@@ -4054,11 +4193,16 @@
                     </a:solidFill>
                   </a:tcPr>
                 </a:tc>
+                <a:extLst>
+                  <a:ext uri="{0D108BD9-81ED-4DB2-BD59-A6C34878D82A}">
+                    <a16:rowId xmlns:a16="http://schemas.microsoft.com/office/drawing/2014/main" val="10001"/>
+                  </a:ext>
+                </a:extLst>
               </a:tr>
               <a:tr h="360000">
                 <a:tc>
                   <a:txBody>
-                    <a:bodyPr wrap="square"/>
+                    <a:bodyPr/>
                     <a:lstStyle/>
                     <a:p>
                       <a:pPr algn="l">
@@ -4067,7 +4211,7 @@
                         </a:spcAft>
                       </a:pPr>
                       <a:r>
-                        <a:rPr sz="1300" b="0">
+                        <a:rPr lang="pt-BR" sz="1300" b="0" noProof="0" dirty="0">
                           <a:solidFill>
                             <a:srgbClr val="1F2A33"/>
                           </a:solidFill>
@@ -4085,7 +4229,7 @@
                 </a:tc>
                 <a:tc>
                   <a:txBody>
-                    <a:bodyPr wrap="square"/>
+                    <a:bodyPr/>
                     <a:lstStyle/>
                     <a:p>
                       <a:pPr algn="ctr">
@@ -4094,7 +4238,7 @@
                         </a:spcAft>
                       </a:pPr>
                       <a:r>
-                        <a:rPr sz="1300" b="0">
+                        <a:rPr lang="pt-BR" sz="1300" b="0" noProof="0" dirty="0">
                           <a:solidFill>
                             <a:srgbClr val="1F2A33"/>
                           </a:solidFill>
@@ -4112,7 +4256,7 @@
                 </a:tc>
                 <a:tc>
                   <a:txBody>
-                    <a:bodyPr wrap="square"/>
+                    <a:bodyPr/>
                     <a:lstStyle/>
                     <a:p>
                       <a:pPr algn="ctr">
@@ -4121,7 +4265,7 @@
                         </a:spcAft>
                       </a:pPr>
                       <a:r>
-                        <a:rPr sz="1300" b="0">
+                        <a:rPr lang="pt-BR" sz="1300" b="0" noProof="0" dirty="0">
                           <a:solidFill>
                             <a:srgbClr val="1F2A33"/>
                           </a:solidFill>
@@ -4139,7 +4283,7 @@
                 </a:tc>
                 <a:tc>
                   <a:txBody>
-                    <a:bodyPr wrap="square"/>
+                    <a:bodyPr/>
                     <a:lstStyle/>
                     <a:p>
                       <a:pPr algn="ctr">
@@ -4148,7 +4292,7 @@
                         </a:spcAft>
                       </a:pPr>
                       <a:r>
-                        <a:rPr sz="1300" b="0">
+                        <a:rPr lang="pt-BR" sz="1300" b="0" noProof="0" dirty="0">
                           <a:solidFill>
                             <a:srgbClr val="1F2A33"/>
                           </a:solidFill>
@@ -4166,7 +4310,7 @@
                 </a:tc>
                 <a:tc>
                   <a:txBody>
-                    <a:bodyPr wrap="square"/>
+                    <a:bodyPr/>
                     <a:lstStyle/>
                     <a:p>
                       <a:pPr algn="ctr">
@@ -4175,7 +4319,7 @@
                         </a:spcAft>
                       </a:pPr>
                       <a:r>
-                        <a:rPr sz="1300" b="0">
+                        <a:rPr lang="pt-BR" sz="1300" b="0" noProof="0" dirty="0">
                           <a:solidFill>
                             <a:srgbClr val="1F2A33"/>
                           </a:solidFill>
@@ -4193,7 +4337,7 @@
                 </a:tc>
                 <a:tc>
                   <a:txBody>
-                    <a:bodyPr wrap="square"/>
+                    <a:bodyPr/>
                     <a:lstStyle/>
                     <a:p>
                       <a:pPr algn="ctr">
@@ -4202,7 +4346,7 @@
                         </a:spcAft>
                       </a:pPr>
                       <a:r>
-                        <a:rPr sz="1300" b="0">
+                        <a:rPr lang="pt-BR" sz="1300" b="0" noProof="0" dirty="0">
                           <a:solidFill>
                             <a:srgbClr val="1F2A33"/>
                           </a:solidFill>
@@ -4220,7 +4364,7 @@
                 </a:tc>
                 <a:tc>
                   <a:txBody>
-                    <a:bodyPr wrap="square"/>
+                    <a:bodyPr/>
                     <a:lstStyle/>
                     <a:p>
                       <a:pPr algn="ctr">
@@ -4229,7 +4373,7 @@
                         </a:spcAft>
                       </a:pPr>
                       <a:r>
-                        <a:rPr sz="1300" b="0">
+                        <a:rPr lang="pt-BR" sz="1300" b="0" noProof="0" dirty="0">
                           <a:solidFill>
                             <a:srgbClr val="1F2A33"/>
                           </a:solidFill>
@@ -4245,11 +4389,16 @@
                     </a:solidFill>
                   </a:tcPr>
                 </a:tc>
+                <a:extLst>
+                  <a:ext uri="{0D108BD9-81ED-4DB2-BD59-A6C34878D82A}">
+                    <a16:rowId xmlns:a16="http://schemas.microsoft.com/office/drawing/2014/main" val="10002"/>
+                  </a:ext>
+                </a:extLst>
               </a:tr>
               <a:tr h="360000">
                 <a:tc>
                   <a:txBody>
-                    <a:bodyPr wrap="square"/>
+                    <a:bodyPr/>
                     <a:lstStyle/>
                     <a:p>
                       <a:pPr algn="l">
@@ -4258,7 +4407,7 @@
                         </a:spcAft>
                       </a:pPr>
                       <a:r>
-                        <a:rPr sz="1300" b="0">
+                        <a:rPr lang="pt-BR" sz="1300" b="0" noProof="0" dirty="0">
                           <a:solidFill>
                             <a:srgbClr val="1F2A33"/>
                           </a:solidFill>
@@ -4276,7 +4425,7 @@
                 </a:tc>
                 <a:tc>
                   <a:txBody>
-                    <a:bodyPr wrap="square"/>
+                    <a:bodyPr/>
                     <a:lstStyle/>
                     <a:p>
                       <a:pPr algn="ctr">
@@ -4285,7 +4434,7 @@
                         </a:spcAft>
                       </a:pPr>
                       <a:r>
-                        <a:rPr sz="1300" b="0">
+                        <a:rPr lang="pt-BR" sz="1300" b="0" noProof="0" dirty="0">
                           <a:solidFill>
                             <a:srgbClr val="1F2A33"/>
                           </a:solidFill>
@@ -4303,7 +4452,7 @@
                 </a:tc>
                 <a:tc>
                   <a:txBody>
-                    <a:bodyPr wrap="square"/>
+                    <a:bodyPr/>
                     <a:lstStyle/>
                     <a:p>
                       <a:pPr algn="ctr">
@@ -4312,7 +4461,7 @@
                         </a:spcAft>
                       </a:pPr>
                       <a:r>
-                        <a:rPr sz="1300" b="0">
+                        <a:rPr lang="pt-BR" sz="1300" b="0" noProof="0" dirty="0">
                           <a:solidFill>
                             <a:srgbClr val="1F2A33"/>
                           </a:solidFill>
@@ -4330,7 +4479,7 @@
                 </a:tc>
                 <a:tc>
                   <a:txBody>
-                    <a:bodyPr wrap="square"/>
+                    <a:bodyPr/>
                     <a:lstStyle/>
                     <a:p>
                       <a:pPr algn="ctr">
@@ -4339,7 +4488,7 @@
                         </a:spcAft>
                       </a:pPr>
                       <a:r>
-                        <a:rPr sz="1300" b="0">
+                        <a:rPr lang="pt-BR" sz="1300" b="0" noProof="0" dirty="0">
                           <a:solidFill>
                             <a:srgbClr val="1F2A33"/>
                           </a:solidFill>
@@ -4357,7 +4506,7 @@
                 </a:tc>
                 <a:tc>
                   <a:txBody>
-                    <a:bodyPr wrap="square"/>
+                    <a:bodyPr/>
                     <a:lstStyle/>
                     <a:p>
                       <a:pPr algn="ctr">
@@ -4366,7 +4515,7 @@
                         </a:spcAft>
                       </a:pPr>
                       <a:r>
-                        <a:rPr sz="1300" b="0">
+                        <a:rPr lang="pt-BR" sz="1300" b="0" noProof="0" dirty="0">
                           <a:solidFill>
                             <a:srgbClr val="1F2A33"/>
                           </a:solidFill>
@@ -4384,7 +4533,7 @@
                 </a:tc>
                 <a:tc>
                   <a:txBody>
-                    <a:bodyPr wrap="square"/>
+                    <a:bodyPr/>
                     <a:lstStyle/>
                     <a:p>
                       <a:pPr algn="ctr">
@@ -4393,7 +4542,7 @@
                         </a:spcAft>
                       </a:pPr>
                       <a:r>
-                        <a:rPr sz="1300" b="0">
+                        <a:rPr lang="pt-BR" sz="1300" b="0" noProof="0" dirty="0">
                           <a:solidFill>
                             <a:srgbClr val="1F2A33"/>
                           </a:solidFill>
@@ -4411,7 +4560,7 @@
                 </a:tc>
                 <a:tc>
                   <a:txBody>
-                    <a:bodyPr wrap="square"/>
+                    <a:bodyPr/>
                     <a:lstStyle/>
                     <a:p>
                       <a:pPr algn="ctr">
@@ -4420,7 +4569,7 @@
                         </a:spcAft>
                       </a:pPr>
                       <a:r>
-                        <a:rPr sz="1300" b="0">
+                        <a:rPr lang="pt-BR" sz="1300" b="0" noProof="0" dirty="0">
                           <a:solidFill>
                             <a:srgbClr val="1F2A33"/>
                           </a:solidFill>
@@ -4436,11 +4585,16 @@
                     </a:solidFill>
                   </a:tcPr>
                 </a:tc>
+                <a:extLst>
+                  <a:ext uri="{0D108BD9-81ED-4DB2-BD59-A6C34878D82A}">
+                    <a16:rowId xmlns:a16="http://schemas.microsoft.com/office/drawing/2014/main" val="10003"/>
+                  </a:ext>
+                </a:extLst>
               </a:tr>
               <a:tr h="360000">
                 <a:tc>
                   <a:txBody>
-                    <a:bodyPr wrap="square"/>
+                    <a:bodyPr/>
                     <a:lstStyle/>
                     <a:p>
                       <a:pPr algn="l">
@@ -4449,7 +4603,7 @@
                         </a:spcAft>
                       </a:pPr>
                       <a:r>
-                        <a:rPr sz="1300" b="0">
+                        <a:rPr lang="pt-BR" sz="1300" b="0" noProof="0" dirty="0">
                           <a:solidFill>
                             <a:srgbClr val="1F2A33"/>
                           </a:solidFill>
@@ -4467,7 +4621,7 @@
                 </a:tc>
                 <a:tc>
                   <a:txBody>
-                    <a:bodyPr wrap="square"/>
+                    <a:bodyPr/>
                     <a:lstStyle/>
                     <a:p>
                       <a:pPr algn="ctr">
@@ -4476,7 +4630,7 @@
                         </a:spcAft>
                       </a:pPr>
                       <a:r>
-                        <a:rPr sz="1300" b="0">
+                        <a:rPr lang="pt-BR" sz="1300" b="0" noProof="0" dirty="0">
                           <a:solidFill>
                             <a:srgbClr val="1F2A33"/>
                           </a:solidFill>
@@ -4494,7 +4648,7 @@
                 </a:tc>
                 <a:tc>
                   <a:txBody>
-                    <a:bodyPr wrap="square"/>
+                    <a:bodyPr/>
                     <a:lstStyle/>
                     <a:p>
                       <a:pPr algn="ctr">
@@ -4503,7 +4657,7 @@
                         </a:spcAft>
                       </a:pPr>
                       <a:r>
-                        <a:rPr sz="1300" b="0">
+                        <a:rPr lang="pt-BR" sz="1300" b="0" noProof="0" dirty="0">
                           <a:solidFill>
                             <a:srgbClr val="1F2A33"/>
                           </a:solidFill>
@@ -4521,7 +4675,7 @@
                 </a:tc>
                 <a:tc>
                   <a:txBody>
-                    <a:bodyPr wrap="square"/>
+                    <a:bodyPr/>
                     <a:lstStyle/>
                     <a:p>
                       <a:pPr algn="ctr">
@@ -4530,7 +4684,7 @@
                         </a:spcAft>
                       </a:pPr>
                       <a:r>
-                        <a:rPr sz="1300" b="0">
+                        <a:rPr lang="pt-BR" sz="1300" b="0" noProof="0" dirty="0">
                           <a:solidFill>
                             <a:srgbClr val="1F2A33"/>
                           </a:solidFill>
@@ -4548,7 +4702,7 @@
                 </a:tc>
                 <a:tc>
                   <a:txBody>
-                    <a:bodyPr wrap="square"/>
+                    <a:bodyPr/>
                     <a:lstStyle/>
                     <a:p>
                       <a:pPr algn="ctr">
@@ -4557,7 +4711,7 @@
                         </a:spcAft>
                       </a:pPr>
                       <a:r>
-                        <a:rPr sz="1300" b="0">
+                        <a:rPr lang="pt-BR" sz="1300" b="0" noProof="0" dirty="0">
                           <a:solidFill>
                             <a:srgbClr val="1F2A33"/>
                           </a:solidFill>
@@ -4575,7 +4729,7 @@
                 </a:tc>
                 <a:tc>
                   <a:txBody>
-                    <a:bodyPr wrap="square"/>
+                    <a:bodyPr/>
                     <a:lstStyle/>
                     <a:p>
                       <a:pPr algn="ctr">
@@ -4584,7 +4738,7 @@
                         </a:spcAft>
                       </a:pPr>
                       <a:r>
-                        <a:rPr sz="1300" b="0">
+                        <a:rPr lang="pt-BR" sz="1300" b="0" noProof="0" dirty="0">
                           <a:solidFill>
                             <a:srgbClr val="1F2A33"/>
                           </a:solidFill>
@@ -4602,7 +4756,7 @@
                 </a:tc>
                 <a:tc>
                   <a:txBody>
-                    <a:bodyPr wrap="square"/>
+                    <a:bodyPr/>
                     <a:lstStyle/>
                     <a:p>
                       <a:pPr algn="ctr">
@@ -4611,7 +4765,7 @@
                         </a:spcAft>
                       </a:pPr>
                       <a:r>
-                        <a:rPr sz="1300" b="0">
+                        <a:rPr lang="pt-BR" sz="1300" b="0" noProof="0" dirty="0">
                           <a:solidFill>
                             <a:srgbClr val="1F2A33"/>
                           </a:solidFill>
@@ -4627,11 +4781,16 @@
                     </a:solidFill>
                   </a:tcPr>
                 </a:tc>
+                <a:extLst>
+                  <a:ext uri="{0D108BD9-81ED-4DB2-BD59-A6C34878D82A}">
+                    <a16:rowId xmlns:a16="http://schemas.microsoft.com/office/drawing/2014/main" val="10004"/>
+                  </a:ext>
+                </a:extLst>
               </a:tr>
               <a:tr h="360000">
                 <a:tc>
                   <a:txBody>
-                    <a:bodyPr wrap="square"/>
+                    <a:bodyPr/>
                     <a:lstStyle/>
                     <a:p>
                       <a:pPr algn="l">
@@ -4640,7 +4799,7 @@
                         </a:spcAft>
                       </a:pPr>
                       <a:r>
-                        <a:rPr sz="1300" b="0">
+                        <a:rPr lang="pt-BR" sz="1300" b="0" noProof="0" dirty="0">
                           <a:solidFill>
                             <a:srgbClr val="1F2A33"/>
                           </a:solidFill>
@@ -4658,7 +4817,7 @@
                 </a:tc>
                 <a:tc>
                   <a:txBody>
-                    <a:bodyPr wrap="square"/>
+                    <a:bodyPr/>
                     <a:lstStyle/>
                     <a:p>
                       <a:pPr algn="ctr">
@@ -4667,7 +4826,7 @@
                         </a:spcAft>
                       </a:pPr>
                       <a:r>
-                        <a:rPr sz="1300" b="0">
+                        <a:rPr lang="pt-BR" sz="1300" b="0" noProof="0" dirty="0">
                           <a:solidFill>
                             <a:srgbClr val="1F2A33"/>
                           </a:solidFill>
@@ -4685,7 +4844,7 @@
                 </a:tc>
                 <a:tc>
                   <a:txBody>
-                    <a:bodyPr wrap="square"/>
+                    <a:bodyPr/>
                     <a:lstStyle/>
                     <a:p>
                       <a:pPr algn="ctr">
@@ -4694,7 +4853,7 @@
                         </a:spcAft>
                       </a:pPr>
                       <a:r>
-                        <a:rPr sz="1300" b="0">
+                        <a:rPr lang="pt-BR" sz="1300" b="0" noProof="0" dirty="0">
                           <a:solidFill>
                             <a:srgbClr val="1F2A33"/>
                           </a:solidFill>
@@ -4712,7 +4871,7 @@
                 </a:tc>
                 <a:tc>
                   <a:txBody>
-                    <a:bodyPr wrap="square"/>
+                    <a:bodyPr/>
                     <a:lstStyle/>
                     <a:p>
                       <a:pPr algn="ctr">
@@ -4721,7 +4880,7 @@
                         </a:spcAft>
                       </a:pPr>
                       <a:r>
-                        <a:rPr sz="1300" b="0">
+                        <a:rPr lang="pt-BR" sz="1300" b="0" noProof="0" dirty="0">
                           <a:solidFill>
                             <a:srgbClr val="1F2A33"/>
                           </a:solidFill>
@@ -4739,7 +4898,7 @@
                 </a:tc>
                 <a:tc>
                   <a:txBody>
-                    <a:bodyPr wrap="square"/>
+                    <a:bodyPr/>
                     <a:lstStyle/>
                     <a:p>
                       <a:pPr algn="ctr">
@@ -4748,7 +4907,7 @@
                         </a:spcAft>
                       </a:pPr>
                       <a:r>
-                        <a:rPr sz="1300" b="0">
+                        <a:rPr lang="pt-BR" sz="1300" b="0" noProof="0" dirty="0">
                           <a:solidFill>
                             <a:srgbClr val="1F2A33"/>
                           </a:solidFill>
@@ -4766,7 +4925,7 @@
                 </a:tc>
                 <a:tc>
                   <a:txBody>
-                    <a:bodyPr wrap="square"/>
+                    <a:bodyPr/>
                     <a:lstStyle/>
                     <a:p>
                       <a:pPr algn="ctr">
@@ -4775,7 +4934,7 @@
                         </a:spcAft>
                       </a:pPr>
                       <a:r>
-                        <a:rPr sz="1300" b="0">
+                        <a:rPr lang="pt-BR" sz="1300" b="0" noProof="0" dirty="0">
                           <a:solidFill>
                             <a:srgbClr val="1F2A33"/>
                           </a:solidFill>
@@ -4793,7 +4952,7 @@
                 </a:tc>
                 <a:tc>
                   <a:txBody>
-                    <a:bodyPr wrap="square"/>
+                    <a:bodyPr/>
                     <a:lstStyle/>
                     <a:p>
                       <a:pPr algn="ctr">
@@ -4802,7 +4961,7 @@
                         </a:spcAft>
                       </a:pPr>
                       <a:r>
-                        <a:rPr sz="1300" b="0">
+                        <a:rPr lang="pt-BR" sz="1300" b="0" noProof="0" dirty="0">
                           <a:solidFill>
                             <a:srgbClr val="1F2A33"/>
                           </a:solidFill>
@@ -4818,11 +4977,16 @@
                     </a:solidFill>
                   </a:tcPr>
                 </a:tc>
+                <a:extLst>
+                  <a:ext uri="{0D108BD9-81ED-4DB2-BD59-A6C34878D82A}">
+                    <a16:rowId xmlns:a16="http://schemas.microsoft.com/office/drawing/2014/main" val="10005"/>
+                  </a:ext>
+                </a:extLst>
               </a:tr>
               <a:tr h="360000">
                 <a:tc>
                   <a:txBody>
-                    <a:bodyPr wrap="square"/>
+                    <a:bodyPr/>
                     <a:lstStyle/>
                     <a:p>
                       <a:pPr algn="l">
@@ -4831,13 +4995,31 @@
                         </a:spcAft>
                       </a:pPr>
                       <a:r>
-                        <a:rPr sz="1300" b="0">
+                        <a:rPr lang="pt-BR" sz="1300" b="0" noProof="0" dirty="0">
                           <a:solidFill>
                             <a:srgbClr val="1F2A33"/>
                           </a:solidFill>
                           <a:latin typeface="Calibri"/>
                         </a:rPr>
-                        <a:t>Renda média (R$)</a:t>
+                        <a:t>Renda média (</a:t>
+                      </a:r>
+                      <a:r>
+                        <a:rPr lang="pt-BR" sz="1300" b="0" noProof="0" dirty="0" err="1">
+                          <a:solidFill>
+                            <a:srgbClr val="1F2A33"/>
+                          </a:solidFill>
+                          <a:latin typeface="Calibri"/>
+                        </a:rPr>
+                        <a:t>R</a:t>
+                      </a:r>
+                      <a:r>
+                        <a:rPr lang="pt-BR" sz="1300" b="0" noProof="0" dirty="0">
+                          <a:solidFill>
+                            <a:srgbClr val="1F2A33"/>
+                          </a:solidFill>
+                          <a:latin typeface="Calibri"/>
+                        </a:rPr>
+                        <a:t>$)</a:t>
                       </a:r>
                     </a:p>
                   </a:txBody>
@@ -4849,7 +5031,7 @@
                 </a:tc>
                 <a:tc>
                   <a:txBody>
-                    <a:bodyPr wrap="square"/>
+                    <a:bodyPr/>
                     <a:lstStyle/>
                     <a:p>
                       <a:pPr algn="ctr">
@@ -4858,7 +5040,7 @@
                         </a:spcAft>
                       </a:pPr>
                       <a:r>
-                        <a:rPr sz="1300" b="0">
+                        <a:rPr lang="pt-BR" sz="1300" b="0" noProof="0" dirty="0">
                           <a:solidFill>
                             <a:srgbClr val="1F2A33"/>
                           </a:solidFill>
@@ -4876,7 +5058,7 @@
                 </a:tc>
                 <a:tc>
                   <a:txBody>
-                    <a:bodyPr wrap="square"/>
+                    <a:bodyPr/>
                     <a:lstStyle/>
                     <a:p>
                       <a:pPr algn="ctr">
@@ -4885,7 +5067,7 @@
                         </a:spcAft>
                       </a:pPr>
                       <a:r>
-                        <a:rPr sz="1300" b="0">
+                        <a:rPr lang="pt-BR" sz="1300" b="0" noProof="0" dirty="0">
                           <a:solidFill>
                             <a:srgbClr val="1F2A33"/>
                           </a:solidFill>
@@ -4903,7 +5085,7 @@
                 </a:tc>
                 <a:tc>
                   <a:txBody>
-                    <a:bodyPr wrap="square"/>
+                    <a:bodyPr/>
                     <a:lstStyle/>
                     <a:p>
                       <a:pPr algn="ctr">
@@ -4912,7 +5094,7 @@
                         </a:spcAft>
                       </a:pPr>
                       <a:r>
-                        <a:rPr sz="1300" b="0">
+                        <a:rPr lang="pt-BR" sz="1300" b="0" noProof="0" dirty="0">
                           <a:solidFill>
                             <a:srgbClr val="1F2A33"/>
                           </a:solidFill>
@@ -4930,7 +5112,7 @@
                 </a:tc>
                 <a:tc>
                   <a:txBody>
-                    <a:bodyPr wrap="square"/>
+                    <a:bodyPr/>
                     <a:lstStyle/>
                     <a:p>
                       <a:pPr algn="ctr">
@@ -4939,7 +5121,7 @@
                         </a:spcAft>
                       </a:pPr>
                       <a:r>
-                        <a:rPr sz="1300" b="0">
+                        <a:rPr lang="pt-BR" sz="1300" b="0" noProof="0" dirty="0">
                           <a:solidFill>
                             <a:srgbClr val="1F2A33"/>
                           </a:solidFill>
@@ -4957,7 +5139,7 @@
                 </a:tc>
                 <a:tc>
                   <a:txBody>
-                    <a:bodyPr wrap="square"/>
+                    <a:bodyPr/>
                     <a:lstStyle/>
                     <a:p>
                       <a:pPr algn="ctr">
@@ -4966,7 +5148,7 @@
                         </a:spcAft>
                       </a:pPr>
                       <a:r>
-                        <a:rPr sz="1300" b="0">
+                        <a:rPr lang="pt-BR" sz="1300" b="0" noProof="0" dirty="0">
                           <a:solidFill>
                             <a:srgbClr val="1F2A33"/>
                           </a:solidFill>
@@ -4984,7 +5166,7 @@
                 </a:tc>
                 <a:tc>
                   <a:txBody>
-                    <a:bodyPr wrap="square"/>
+                    <a:bodyPr/>
                     <a:lstStyle/>
                     <a:p>
                       <a:pPr algn="ctr">
@@ -4993,7 +5175,7 @@
                         </a:spcAft>
                       </a:pPr>
                       <a:r>
-                        <a:rPr sz="1300" b="0">
+                        <a:rPr lang="pt-BR" sz="1300" b="0" noProof="0" dirty="0">
                           <a:solidFill>
                             <a:srgbClr val="1F2A33"/>
                           </a:solidFill>
@@ -5009,11 +5191,16 @@
                     </a:solidFill>
                   </a:tcPr>
                 </a:tc>
+                <a:extLst>
+                  <a:ext uri="{0D108BD9-81ED-4DB2-BD59-A6C34878D82A}">
+                    <a16:rowId xmlns:a16="http://schemas.microsoft.com/office/drawing/2014/main" val="10006"/>
+                  </a:ext>
+                </a:extLst>
               </a:tr>
               <a:tr h="360000">
                 <a:tc>
                   <a:txBody>
-                    <a:bodyPr wrap="square"/>
+                    <a:bodyPr/>
                     <a:lstStyle/>
                     <a:p>
                       <a:pPr algn="l">
@@ -5022,7 +5209,7 @@
                         </a:spcAft>
                       </a:pPr>
                       <a:r>
-                        <a:rPr sz="1300" b="0">
+                        <a:rPr lang="pt-BR" sz="1300" b="0" noProof="0" dirty="0">
                           <a:solidFill>
                             <a:srgbClr val="1F2A33"/>
                           </a:solidFill>
@@ -5040,7 +5227,7 @@
                 </a:tc>
                 <a:tc>
                   <a:txBody>
-                    <a:bodyPr wrap="square"/>
+                    <a:bodyPr/>
                     <a:lstStyle/>
                     <a:p>
                       <a:pPr algn="ctr">
@@ -5049,7 +5236,7 @@
                         </a:spcAft>
                       </a:pPr>
                       <a:r>
-                        <a:rPr sz="1300" b="0">
+                        <a:rPr lang="pt-BR" sz="1300" b="0" noProof="0" dirty="0">
                           <a:solidFill>
                             <a:srgbClr val="1F2A33"/>
                           </a:solidFill>
@@ -5067,7 +5254,7 @@
                 </a:tc>
                 <a:tc>
                   <a:txBody>
-                    <a:bodyPr wrap="square"/>
+                    <a:bodyPr/>
                     <a:lstStyle/>
                     <a:p>
                       <a:pPr algn="ctr">
@@ -5076,7 +5263,7 @@
                         </a:spcAft>
                       </a:pPr>
                       <a:r>
-                        <a:rPr sz="1300" b="0">
+                        <a:rPr lang="pt-BR" sz="1300" b="0" noProof="0" dirty="0">
                           <a:solidFill>
                             <a:srgbClr val="1F2A33"/>
                           </a:solidFill>
@@ -5094,7 +5281,7 @@
                 </a:tc>
                 <a:tc>
                   <a:txBody>
-                    <a:bodyPr wrap="square"/>
+                    <a:bodyPr/>
                     <a:lstStyle/>
                     <a:p>
                       <a:pPr algn="ctr">
@@ -5103,7 +5290,7 @@
                         </a:spcAft>
                       </a:pPr>
                       <a:r>
-                        <a:rPr sz="1300" b="0">
+                        <a:rPr lang="pt-BR" sz="1300" b="0" noProof="0" dirty="0">
                           <a:solidFill>
                             <a:srgbClr val="1F2A33"/>
                           </a:solidFill>
@@ -5121,7 +5308,7 @@
                 </a:tc>
                 <a:tc>
                   <a:txBody>
-                    <a:bodyPr wrap="square"/>
+                    <a:bodyPr/>
                     <a:lstStyle/>
                     <a:p>
                       <a:pPr algn="ctr">
@@ -5130,7 +5317,7 @@
                         </a:spcAft>
                       </a:pPr>
                       <a:r>
-                        <a:rPr sz="1300" b="0">
+                        <a:rPr lang="pt-BR" sz="1300" b="0" noProof="0" dirty="0">
                           <a:solidFill>
                             <a:srgbClr val="1F2A33"/>
                           </a:solidFill>
@@ -5148,7 +5335,7 @@
                 </a:tc>
                 <a:tc>
                   <a:txBody>
-                    <a:bodyPr wrap="square"/>
+                    <a:bodyPr/>
                     <a:lstStyle/>
                     <a:p>
                       <a:pPr algn="ctr">
@@ -5157,7 +5344,7 @@
                         </a:spcAft>
                       </a:pPr>
                       <a:r>
-                        <a:rPr sz="1300" b="0">
+                        <a:rPr lang="pt-BR" sz="1300" b="0" noProof="0" dirty="0">
                           <a:solidFill>
                             <a:srgbClr val="1F2A33"/>
                           </a:solidFill>
@@ -5175,7 +5362,7 @@
                 </a:tc>
                 <a:tc>
                   <a:txBody>
-                    <a:bodyPr wrap="square"/>
+                    <a:bodyPr/>
                     <a:lstStyle/>
                     <a:p>
                       <a:pPr algn="ctr">
@@ -5184,7 +5371,7 @@
                         </a:spcAft>
                       </a:pPr>
                       <a:r>
-                        <a:rPr sz="1300" b="0">
+                        <a:rPr lang="pt-BR" sz="1300" b="0" noProof="0" dirty="0">
                           <a:solidFill>
                             <a:srgbClr val="1F2A33"/>
                           </a:solidFill>
@@ -5200,11 +5387,16 @@
                     </a:solidFill>
                   </a:tcPr>
                 </a:tc>
+                <a:extLst>
+                  <a:ext uri="{0D108BD9-81ED-4DB2-BD59-A6C34878D82A}">
+                    <a16:rowId xmlns:a16="http://schemas.microsoft.com/office/drawing/2014/main" val="10007"/>
+                  </a:ext>
+                </a:extLst>
               </a:tr>
               <a:tr h="360000">
                 <a:tc>
                   <a:txBody>
-                    <a:bodyPr wrap="square"/>
+                    <a:bodyPr/>
                     <a:lstStyle/>
                     <a:p>
                       <a:pPr algn="l">
@@ -5213,7 +5405,7 @@
                         </a:spcAft>
                       </a:pPr>
                       <a:r>
-                        <a:rPr sz="1300" b="0">
+                        <a:rPr lang="pt-BR" sz="1300" b="0" noProof="0" dirty="0">
                           <a:solidFill>
                             <a:srgbClr val="1F2A33"/>
                           </a:solidFill>
@@ -5231,7 +5423,7 @@
                 </a:tc>
                 <a:tc>
                   <a:txBody>
-                    <a:bodyPr wrap="square"/>
+                    <a:bodyPr/>
                     <a:lstStyle/>
                     <a:p>
                       <a:pPr algn="ctr">
@@ -5240,7 +5432,7 @@
                         </a:spcAft>
                       </a:pPr>
                       <a:r>
-                        <a:rPr sz="1300" b="0">
+                        <a:rPr lang="pt-BR" sz="1300" b="0" noProof="0" dirty="0">
                           <a:solidFill>
                             <a:srgbClr val="1F2A33"/>
                           </a:solidFill>
@@ -5258,7 +5450,7 @@
                 </a:tc>
                 <a:tc>
                   <a:txBody>
-                    <a:bodyPr wrap="square"/>
+                    <a:bodyPr/>
                     <a:lstStyle/>
                     <a:p>
                       <a:pPr algn="ctr">
@@ -5267,7 +5459,7 @@
                         </a:spcAft>
                       </a:pPr>
                       <a:r>
-                        <a:rPr sz="1300" b="0">
+                        <a:rPr lang="pt-BR" sz="1300" b="0" noProof="0" dirty="0">
                           <a:solidFill>
                             <a:srgbClr val="1F2A33"/>
                           </a:solidFill>
@@ -5285,7 +5477,7 @@
                 </a:tc>
                 <a:tc>
                   <a:txBody>
-                    <a:bodyPr wrap="square"/>
+                    <a:bodyPr/>
                     <a:lstStyle/>
                     <a:p>
                       <a:pPr algn="ctr">
@@ -5294,7 +5486,7 @@
                         </a:spcAft>
                       </a:pPr>
                       <a:r>
-                        <a:rPr sz="1300" b="0">
+                        <a:rPr lang="pt-BR" sz="1300" b="0" noProof="0" dirty="0">
                           <a:solidFill>
                             <a:srgbClr val="1F2A33"/>
                           </a:solidFill>
@@ -5312,7 +5504,7 @@
                 </a:tc>
                 <a:tc>
                   <a:txBody>
-                    <a:bodyPr wrap="square"/>
+                    <a:bodyPr/>
                     <a:lstStyle/>
                     <a:p>
                       <a:pPr algn="ctr">
@@ -5321,7 +5513,7 @@
                         </a:spcAft>
                       </a:pPr>
                       <a:r>
-                        <a:rPr sz="1300" b="0">
+                        <a:rPr lang="pt-BR" sz="1300" b="0" noProof="0" dirty="0">
                           <a:solidFill>
                             <a:srgbClr val="1F2A33"/>
                           </a:solidFill>
@@ -5339,7 +5531,7 @@
                 </a:tc>
                 <a:tc>
                   <a:txBody>
-                    <a:bodyPr wrap="square"/>
+                    <a:bodyPr/>
                     <a:lstStyle/>
                     <a:p>
                       <a:pPr algn="ctr">
@@ -5348,7 +5540,7 @@
                         </a:spcAft>
                       </a:pPr>
                       <a:r>
-                        <a:rPr sz="1300" b="0">
+                        <a:rPr lang="pt-BR" sz="1300" b="0" noProof="0" dirty="0">
                           <a:solidFill>
                             <a:srgbClr val="1F2A33"/>
                           </a:solidFill>
@@ -5366,7 +5558,7 @@
                 </a:tc>
                 <a:tc>
                   <a:txBody>
-                    <a:bodyPr wrap="square"/>
+                    <a:bodyPr/>
                     <a:lstStyle/>
                     <a:p>
                       <a:pPr algn="ctr">
@@ -5375,7 +5567,7 @@
                         </a:spcAft>
                       </a:pPr>
                       <a:r>
-                        <a:rPr sz="1300" b="0">
+                        <a:rPr lang="pt-BR" sz="1300" b="0" noProof="0" dirty="0">
                           <a:solidFill>
                             <a:srgbClr val="1F2A33"/>
                           </a:solidFill>
@@ -5391,11 +5583,16 @@
                     </a:solidFill>
                   </a:tcPr>
                 </a:tc>
+                <a:extLst>
+                  <a:ext uri="{0D108BD9-81ED-4DB2-BD59-A6C34878D82A}">
+                    <a16:rowId xmlns:a16="http://schemas.microsoft.com/office/drawing/2014/main" val="10008"/>
+                  </a:ext>
+                </a:extLst>
               </a:tr>
               <a:tr h="360000">
                 <a:tc>
                   <a:txBody>
-                    <a:bodyPr wrap="square"/>
+                    <a:bodyPr/>
                     <a:lstStyle/>
                     <a:p>
                       <a:pPr algn="l">
@@ -5404,7 +5601,7 @@
                         </a:spcAft>
                       </a:pPr>
                       <a:r>
-                        <a:rPr sz="1300" b="0">
+                        <a:rPr lang="pt-BR" sz="1300" b="0" noProof="0" dirty="0">
                           <a:solidFill>
                             <a:srgbClr val="1F2A33"/>
                           </a:solidFill>
@@ -5422,7 +5619,7 @@
                 </a:tc>
                 <a:tc>
                   <a:txBody>
-                    <a:bodyPr wrap="square"/>
+                    <a:bodyPr/>
                     <a:lstStyle/>
                     <a:p>
                       <a:pPr algn="ctr">
@@ -5431,7 +5628,7 @@
                         </a:spcAft>
                       </a:pPr>
                       <a:r>
-                        <a:rPr sz="1300" b="0">
+                        <a:rPr lang="pt-BR" sz="1300" b="0" noProof="0" dirty="0">
                           <a:solidFill>
                             <a:srgbClr val="1F2A33"/>
                           </a:solidFill>
@@ -5449,7 +5646,7 @@
                 </a:tc>
                 <a:tc>
                   <a:txBody>
-                    <a:bodyPr wrap="square"/>
+                    <a:bodyPr/>
                     <a:lstStyle/>
                     <a:p>
                       <a:pPr algn="ctr">
@@ -5458,7 +5655,7 @@
                         </a:spcAft>
                       </a:pPr>
                       <a:r>
-                        <a:rPr sz="1300" b="0">
+                        <a:rPr lang="pt-BR" sz="1300" b="0" noProof="0" dirty="0">
                           <a:solidFill>
                             <a:srgbClr val="1F2A33"/>
                           </a:solidFill>
@@ -5476,7 +5673,7 @@
                 </a:tc>
                 <a:tc>
                   <a:txBody>
-                    <a:bodyPr wrap="square"/>
+                    <a:bodyPr/>
                     <a:lstStyle/>
                     <a:p>
                       <a:pPr algn="ctr">
@@ -5485,7 +5682,7 @@
                         </a:spcAft>
                       </a:pPr>
                       <a:r>
-                        <a:rPr sz="1300" b="0">
+                        <a:rPr lang="pt-BR" sz="1300" b="0" noProof="0" dirty="0">
                           <a:solidFill>
                             <a:srgbClr val="1F2A33"/>
                           </a:solidFill>
@@ -5503,7 +5700,7 @@
                 </a:tc>
                 <a:tc>
                   <a:txBody>
-                    <a:bodyPr wrap="square"/>
+                    <a:bodyPr/>
                     <a:lstStyle/>
                     <a:p>
                       <a:pPr algn="ctr">
@@ -5512,7 +5709,7 @@
                         </a:spcAft>
                       </a:pPr>
                       <a:r>
-                        <a:rPr sz="1300" b="0">
+                        <a:rPr lang="pt-BR" sz="1300" b="0" noProof="0" dirty="0">
                           <a:solidFill>
                             <a:srgbClr val="1F2A33"/>
                           </a:solidFill>
@@ -5530,7 +5727,7 @@
                 </a:tc>
                 <a:tc>
                   <a:txBody>
-                    <a:bodyPr wrap="square"/>
+                    <a:bodyPr/>
                     <a:lstStyle/>
                     <a:p>
                       <a:pPr algn="ctr">
@@ -5539,7 +5736,7 @@
                         </a:spcAft>
                       </a:pPr>
                       <a:r>
-                        <a:rPr sz="1300" b="0">
+                        <a:rPr lang="pt-BR" sz="1300" b="0" noProof="0" dirty="0">
                           <a:solidFill>
                             <a:srgbClr val="1F2A33"/>
                           </a:solidFill>
@@ -5557,7 +5754,7 @@
                 </a:tc>
                 <a:tc>
                   <a:txBody>
-                    <a:bodyPr wrap="square"/>
+                    <a:bodyPr/>
                     <a:lstStyle/>
                     <a:p>
                       <a:pPr algn="ctr">
@@ -5566,7 +5763,7 @@
                         </a:spcAft>
                       </a:pPr>
                       <a:r>
-                        <a:rPr sz="1300" b="0">
+                        <a:rPr lang="pt-BR" sz="1300" b="0" noProof="0" dirty="0">
                           <a:solidFill>
                             <a:srgbClr val="1F2A33"/>
                           </a:solidFill>
@@ -5582,11 +5779,16 @@
                     </a:solidFill>
                   </a:tcPr>
                 </a:tc>
+                <a:extLst>
+                  <a:ext uri="{0D108BD9-81ED-4DB2-BD59-A6C34878D82A}">
+                    <a16:rowId xmlns:a16="http://schemas.microsoft.com/office/drawing/2014/main" val="10009"/>
+                  </a:ext>
+                </a:extLst>
               </a:tr>
               <a:tr h="360000">
                 <a:tc>
                   <a:txBody>
-                    <a:bodyPr wrap="square"/>
+                    <a:bodyPr/>
                     <a:lstStyle/>
                     <a:p>
                       <a:pPr algn="l">
@@ -5595,7 +5797,7 @@
                         </a:spcAft>
                       </a:pPr>
                       <a:r>
-                        <a:rPr sz="1300" b="0">
+                        <a:rPr lang="pt-BR" sz="1300" b="0" noProof="0" dirty="0">
                           <a:solidFill>
                             <a:srgbClr val="1F2A33"/>
                           </a:solidFill>
@@ -5613,7 +5815,7 @@
                 </a:tc>
                 <a:tc>
                   <a:txBody>
-                    <a:bodyPr wrap="square"/>
+                    <a:bodyPr/>
                     <a:lstStyle/>
                     <a:p>
                       <a:pPr algn="ctr">
@@ -5622,7 +5824,7 @@
                         </a:spcAft>
                       </a:pPr>
                       <a:r>
-                        <a:rPr sz="1300" b="0">
+                        <a:rPr lang="pt-BR" sz="1300" b="0" noProof="0" dirty="0">
                           <a:solidFill>
                             <a:srgbClr val="1F2A33"/>
                           </a:solidFill>
@@ -5640,7 +5842,7 @@
                 </a:tc>
                 <a:tc>
                   <a:txBody>
-                    <a:bodyPr wrap="square"/>
+                    <a:bodyPr/>
                     <a:lstStyle/>
                     <a:p>
                       <a:pPr algn="ctr">
@@ -5649,7 +5851,7 @@
                         </a:spcAft>
                       </a:pPr>
                       <a:r>
-                        <a:rPr sz="1300" b="0">
+                        <a:rPr lang="pt-BR" sz="1300" b="0" noProof="0" dirty="0">
                           <a:solidFill>
                             <a:srgbClr val="1F2A33"/>
                           </a:solidFill>
@@ -5667,7 +5869,7 @@
                 </a:tc>
                 <a:tc>
                   <a:txBody>
-                    <a:bodyPr wrap="square"/>
+                    <a:bodyPr/>
                     <a:lstStyle/>
                     <a:p>
                       <a:pPr algn="ctr">
@@ -5676,7 +5878,7 @@
                         </a:spcAft>
                       </a:pPr>
                       <a:r>
-                        <a:rPr sz="1300" b="0">
+                        <a:rPr lang="pt-BR" sz="1300" b="0" noProof="0" dirty="0">
                           <a:solidFill>
                             <a:srgbClr val="1F2A33"/>
                           </a:solidFill>
@@ -5694,7 +5896,7 @@
                 </a:tc>
                 <a:tc>
                   <a:txBody>
-                    <a:bodyPr wrap="square"/>
+                    <a:bodyPr/>
                     <a:lstStyle/>
                     <a:p>
                       <a:pPr algn="ctr">
@@ -5703,7 +5905,7 @@
                         </a:spcAft>
                       </a:pPr>
                       <a:r>
-                        <a:rPr sz="1300" b="0">
+                        <a:rPr lang="pt-BR" sz="1300" b="0" noProof="0" dirty="0">
                           <a:solidFill>
                             <a:srgbClr val="1F2A33"/>
                           </a:solidFill>
@@ -5721,7 +5923,7 @@
                 </a:tc>
                 <a:tc>
                   <a:txBody>
-                    <a:bodyPr wrap="square"/>
+                    <a:bodyPr/>
                     <a:lstStyle/>
                     <a:p>
                       <a:pPr algn="ctr">
@@ -5730,7 +5932,7 @@
                         </a:spcAft>
                       </a:pPr>
                       <a:r>
-                        <a:rPr sz="1300" b="0">
+                        <a:rPr lang="pt-BR" sz="1300" b="0" noProof="0" dirty="0">
                           <a:solidFill>
                             <a:srgbClr val="1F2A33"/>
                           </a:solidFill>
@@ -5748,7 +5950,7 @@
                 </a:tc>
                 <a:tc>
                   <a:txBody>
-                    <a:bodyPr wrap="square"/>
+                    <a:bodyPr/>
                     <a:lstStyle/>
                     <a:p>
                       <a:pPr algn="ctr">
@@ -5757,7 +5959,7 @@
                         </a:spcAft>
                       </a:pPr>
                       <a:r>
-                        <a:rPr sz="1300" b="0">
+                        <a:rPr lang="pt-BR" sz="1300" b="0" noProof="0" dirty="0">
                           <a:solidFill>
                             <a:srgbClr val="1F2A33"/>
                           </a:solidFill>
@@ -5773,11 +5975,16 @@
                     </a:solidFill>
                   </a:tcPr>
                 </a:tc>
+                <a:extLst>
+                  <a:ext uri="{0D108BD9-81ED-4DB2-BD59-A6C34878D82A}">
+                    <a16:rowId xmlns:a16="http://schemas.microsoft.com/office/drawing/2014/main" val="10010"/>
+                  </a:ext>
+                </a:extLst>
               </a:tr>
               <a:tr h="360000">
                 <a:tc>
                   <a:txBody>
-                    <a:bodyPr wrap="square"/>
+                    <a:bodyPr/>
                     <a:lstStyle/>
                     <a:p>
                       <a:pPr algn="l">
@@ -5786,7 +5993,7 @@
                         </a:spcAft>
                       </a:pPr>
                       <a:r>
-                        <a:rPr sz="1300" b="0">
+                        <a:rPr lang="pt-BR" sz="1300" b="0" noProof="0" dirty="0">
                           <a:solidFill>
                             <a:srgbClr val="1F2A33"/>
                           </a:solidFill>
@@ -5804,7 +6011,7 @@
                 </a:tc>
                 <a:tc>
                   <a:txBody>
-                    <a:bodyPr wrap="square"/>
+                    <a:bodyPr/>
                     <a:lstStyle/>
                     <a:p>
                       <a:pPr algn="ctr">
@@ -5813,7 +6020,7 @@
                         </a:spcAft>
                       </a:pPr>
                       <a:r>
-                        <a:rPr sz="1300" b="0">
+                        <a:rPr lang="pt-BR" sz="1300" b="0" noProof="0" dirty="0">
                           <a:solidFill>
                             <a:srgbClr val="1F2A33"/>
                           </a:solidFill>
@@ -5831,7 +6038,7 @@
                 </a:tc>
                 <a:tc>
                   <a:txBody>
-                    <a:bodyPr wrap="square"/>
+                    <a:bodyPr/>
                     <a:lstStyle/>
                     <a:p>
                       <a:pPr algn="ctr">
@@ -5840,7 +6047,7 @@
                         </a:spcAft>
                       </a:pPr>
                       <a:r>
-                        <a:rPr sz="1300" b="0">
+                        <a:rPr lang="pt-BR" sz="1300" b="0" noProof="0" dirty="0">
                           <a:solidFill>
                             <a:srgbClr val="1F2A33"/>
                           </a:solidFill>
@@ -5858,7 +6065,7 @@
                 </a:tc>
                 <a:tc>
                   <a:txBody>
-                    <a:bodyPr wrap="square"/>
+                    <a:bodyPr/>
                     <a:lstStyle/>
                     <a:p>
                       <a:pPr algn="ctr">
@@ -5867,7 +6074,7 @@
                         </a:spcAft>
                       </a:pPr>
                       <a:r>
-                        <a:rPr sz="1300" b="0">
+                        <a:rPr lang="pt-BR" sz="1300" b="0" noProof="0" dirty="0">
                           <a:solidFill>
                             <a:srgbClr val="1F2A33"/>
                           </a:solidFill>
@@ -5885,7 +6092,7 @@
                 </a:tc>
                 <a:tc>
                   <a:txBody>
-                    <a:bodyPr wrap="square"/>
+                    <a:bodyPr/>
                     <a:lstStyle/>
                     <a:p>
                       <a:pPr algn="ctr">
@@ -5894,7 +6101,7 @@
                         </a:spcAft>
                       </a:pPr>
                       <a:r>
-                        <a:rPr sz="1300" b="0">
+                        <a:rPr lang="pt-BR" sz="1300" b="0" noProof="0" dirty="0">
                           <a:solidFill>
                             <a:srgbClr val="1F2A33"/>
                           </a:solidFill>
@@ -5912,7 +6119,7 @@
                 </a:tc>
                 <a:tc>
                   <a:txBody>
-                    <a:bodyPr wrap="square"/>
+                    <a:bodyPr/>
                     <a:lstStyle/>
                     <a:p>
                       <a:pPr algn="ctr">
@@ -5921,7 +6128,7 @@
                         </a:spcAft>
                       </a:pPr>
                       <a:r>
-                        <a:rPr sz="1300" b="0">
+                        <a:rPr lang="pt-BR" sz="1300" b="0" noProof="0" dirty="0">
                           <a:solidFill>
                             <a:srgbClr val="1F2A33"/>
                           </a:solidFill>
@@ -5939,7 +6146,7 @@
                 </a:tc>
                 <a:tc>
                   <a:txBody>
-                    <a:bodyPr wrap="square"/>
+                    <a:bodyPr/>
                     <a:lstStyle/>
                     <a:p>
                       <a:pPr algn="ctr">
@@ -5948,7 +6155,7 @@
                         </a:spcAft>
                       </a:pPr>
                       <a:r>
-                        <a:rPr sz="1300" b="0">
+                        <a:rPr lang="pt-BR" sz="1300" b="0" noProof="0" dirty="0">
                           <a:solidFill>
                             <a:srgbClr val="1F2A33"/>
                           </a:solidFill>
@@ -5964,11 +6171,16 @@
                     </a:solidFill>
                   </a:tcPr>
                 </a:tc>
+                <a:extLst>
+                  <a:ext uri="{0D108BD9-81ED-4DB2-BD59-A6C34878D82A}">
+                    <a16:rowId xmlns:a16="http://schemas.microsoft.com/office/drawing/2014/main" val="10011"/>
+                  </a:ext>
+                </a:extLst>
               </a:tr>
               <a:tr h="360000">
                 <a:tc>
                   <a:txBody>
-                    <a:bodyPr wrap="square"/>
+                    <a:bodyPr/>
                     <a:lstStyle/>
                     <a:p>
                       <a:pPr algn="l">
@@ -5977,7 +6189,7 @@
                         </a:spcAft>
                       </a:pPr>
                       <a:r>
-                        <a:rPr sz="1300" b="0">
+                        <a:rPr lang="pt-BR" sz="1300" b="0" noProof="0" dirty="0">
                           <a:solidFill>
                             <a:srgbClr val="1F2A33"/>
                           </a:solidFill>
@@ -5995,7 +6207,7 @@
                 </a:tc>
                 <a:tc>
                   <a:txBody>
-                    <a:bodyPr wrap="square"/>
+                    <a:bodyPr/>
                     <a:lstStyle/>
                     <a:p>
                       <a:pPr algn="ctr">
@@ -6004,7 +6216,7 @@
                         </a:spcAft>
                       </a:pPr>
                       <a:r>
-                        <a:rPr sz="1300" b="0">
+                        <a:rPr lang="pt-BR" sz="1300" b="0" noProof="0" dirty="0">
                           <a:solidFill>
                             <a:srgbClr val="1F2A33"/>
                           </a:solidFill>
@@ -6022,7 +6234,7 @@
                 </a:tc>
                 <a:tc>
                   <a:txBody>
-                    <a:bodyPr wrap="square"/>
+                    <a:bodyPr/>
                     <a:lstStyle/>
                     <a:p>
                       <a:pPr algn="ctr">
@@ -6031,7 +6243,7 @@
                         </a:spcAft>
                       </a:pPr>
                       <a:r>
-                        <a:rPr sz="1300" b="0">
+                        <a:rPr lang="pt-BR" sz="1300" b="0" noProof="0" dirty="0">
                           <a:solidFill>
                             <a:srgbClr val="1F2A33"/>
                           </a:solidFill>
@@ -6049,7 +6261,7 @@
                 </a:tc>
                 <a:tc>
                   <a:txBody>
-                    <a:bodyPr wrap="square"/>
+                    <a:bodyPr/>
                     <a:lstStyle/>
                     <a:p>
                       <a:pPr algn="ctr">
@@ -6058,7 +6270,7 @@
                         </a:spcAft>
                       </a:pPr>
                       <a:r>
-                        <a:rPr sz="1300" b="0">
+                        <a:rPr lang="pt-BR" sz="1300" b="0" noProof="0" dirty="0">
                           <a:solidFill>
                             <a:srgbClr val="1F2A33"/>
                           </a:solidFill>
@@ -6076,7 +6288,7 @@
                 </a:tc>
                 <a:tc>
                   <a:txBody>
-                    <a:bodyPr wrap="square"/>
+                    <a:bodyPr/>
                     <a:lstStyle/>
                     <a:p>
                       <a:pPr algn="ctr">
@@ -6085,7 +6297,7 @@
                         </a:spcAft>
                       </a:pPr>
                       <a:r>
-                        <a:rPr sz="1300" b="0">
+                        <a:rPr lang="pt-BR" sz="1300" b="0" noProof="0" dirty="0">
                           <a:solidFill>
                             <a:srgbClr val="1F2A33"/>
                           </a:solidFill>
@@ -6103,7 +6315,7 @@
                 </a:tc>
                 <a:tc>
                   <a:txBody>
-                    <a:bodyPr wrap="square"/>
+                    <a:bodyPr/>
                     <a:lstStyle/>
                     <a:p>
                       <a:pPr algn="ctr">
@@ -6112,7 +6324,7 @@
                         </a:spcAft>
                       </a:pPr>
                       <a:r>
-                        <a:rPr sz="1300" b="0">
+                        <a:rPr lang="pt-BR" sz="1300" b="0" noProof="0" dirty="0">
                           <a:solidFill>
                             <a:srgbClr val="1F2A33"/>
                           </a:solidFill>
@@ -6130,7 +6342,7 @@
                 </a:tc>
                 <a:tc>
                   <a:txBody>
-                    <a:bodyPr wrap="square"/>
+                    <a:bodyPr/>
                     <a:lstStyle/>
                     <a:p>
                       <a:pPr algn="ctr">
@@ -6139,7 +6351,7 @@
                         </a:spcAft>
                       </a:pPr>
                       <a:r>
-                        <a:rPr sz="1300" b="0">
+                        <a:rPr lang="pt-BR" sz="1300" b="0" noProof="0" dirty="0">
                           <a:solidFill>
                             <a:srgbClr val="1F2A33"/>
                           </a:solidFill>
@@ -6155,6 +6367,11 @@
                     </a:solidFill>
                   </a:tcPr>
                 </a:tc>
+                <a:extLst>
+                  <a:ext uri="{0D108BD9-81ED-4DB2-BD59-A6C34878D82A}">
+                    <a16:rowId xmlns:a16="http://schemas.microsoft.com/office/drawing/2014/main" val="10012"/>
+                  </a:ext>
+                </a:extLst>
               </a:tr>
             </a:tbl>
           </a:graphicData>
@@ -6195,7 +6412,7 @@
           </a:fontRef>
         </p:style>
         <p:txBody>
-          <a:bodyPr rtlCol="0" anchor="t" lIns="125999" rIns="125999" tIns="54000" bIns="54000" wrap="square"/>
+          <a:bodyPr wrap="square" lIns="125999" tIns="54000" rIns="125999" bIns="54000" rtlCol="0" anchor="t"/>
           <a:lstStyle/>
           <a:p>
             <a:pPr algn="l">
@@ -6204,13 +6421,49 @@
               </a:spcAft>
             </a:pPr>
             <a:r>
-              <a:rPr sz="1100" b="0">
+              <a:rPr lang="pt-BR" sz="1100" b="0" noProof="0" dirty="0">
                 <a:solidFill>
                   <a:srgbClr val="6B7780"/>
                 </a:solidFill>
                 <a:latin typeface="Calibri"/>
               </a:rPr>
-              <a:t>Proporções de 0 a 1, exceto razão de moradores e renda (R$). n = setores com o dado; ausentes por sigilo do IBGE. Renda sem o setor extremo.</a:t>
+              <a:t>Proporções de 0 a 1, exceto razão de moradores e renda (</a:t>
+            </a:r>
+            <a:r>
+              <a:rPr lang="pt-BR" sz="1100" b="0" noProof="0" dirty="0" err="1">
+                <a:solidFill>
+                  <a:srgbClr val="6B7780"/>
+                </a:solidFill>
+                <a:latin typeface="Calibri"/>
+              </a:rPr>
+              <a:t>R</a:t>
+            </a:r>
+            <a:r>
+              <a:rPr lang="pt-BR" sz="1100" b="0" noProof="0" dirty="0">
+                <a:solidFill>
+                  <a:srgbClr val="6B7780"/>
+                </a:solidFill>
+                <a:latin typeface="Calibri"/>
+              </a:rPr>
+              <a:t>$). </a:t>
+            </a:r>
+            <a:r>
+              <a:rPr lang="pt-BR" sz="1100" b="0" noProof="0" dirty="0" err="1">
+                <a:solidFill>
+                  <a:srgbClr val="6B7780"/>
+                </a:solidFill>
+                <a:latin typeface="Calibri"/>
+              </a:rPr>
+              <a:t>n</a:t>
+            </a:r>
+            <a:r>
+              <a:rPr lang="pt-BR" sz="1100" b="0" noProof="0" dirty="0">
+                <a:solidFill>
+                  <a:srgbClr val="6B7780"/>
+                </a:solidFill>
+                <a:latin typeface="Calibri"/>
+              </a:rPr>
+              <a:t> = setores com o dado; ausentes por sigilo do IBGE. Renda sem o setor extremo.</a:t>
             </a:r>
           </a:p>
         </p:txBody>
@@ -6224,7 +6477,7 @@
 </file>
 
 <file path=ppt/slides/slide15.xml><?xml version="1.0" encoding="utf-8"?>
-<p:sld xmlns:a="http://schemas.openxmlformats.org/drawingml/2006/main" xmlns:p="http://schemas.openxmlformats.org/presentationml/2006/main" xmlns:r="http://schemas.openxmlformats.org/officeDocument/2006/relationships">
+<p:sld xmlns:a="http://schemas.openxmlformats.org/drawingml/2006/main" xmlns:r="http://schemas.openxmlformats.org/officeDocument/2006/relationships" xmlns:p="http://schemas.openxmlformats.org/presentationml/2006/main">
   <p:cSld>
     <p:spTree>
       <p:nvGrpSpPr>
@@ -6232,7 +6485,14 @@
         <p:cNvGrpSpPr/>
         <p:nvPr/>
       </p:nvGrpSpPr>
-      <p:grpSpPr/>
+      <p:grpSpPr>
+        <a:xfrm>
+          <a:off x="0" y="0"/>
+          <a:ext cx="0" cy="0"/>
+          <a:chOff x="0" y="0"/>
+          <a:chExt cx="0" cy="0"/>
+        </a:xfrm>
+      </p:grpSpPr>
       <p:sp>
         <p:nvSpPr>
           <p:cNvPr id="2" name="Rectangle 1"/>
@@ -6268,7 +6528,7 @@
           </a:fontRef>
         </p:style>
         <p:txBody>
-          <a:bodyPr rtlCol="0" anchor="ctr" lIns="125999" rIns="125999" tIns="54000" bIns="54000" wrap="square"/>
+          <a:bodyPr wrap="square" lIns="125999" tIns="54000" rIns="125999" bIns="54000" rtlCol="0" anchor="ctr"/>
           <a:lstStyle/>
           <a:p>
             <a:pPr algn="l">
@@ -6277,7 +6537,7 @@
               </a:spcAft>
             </a:pPr>
             <a:r>
-              <a:rPr sz="2600" b="1">
+              <a:rPr lang="pt-BR" sz="2600" b="1" noProof="0" dirty="0">
                 <a:solidFill>
                   <a:srgbClr val="1F2A33"/>
                 </a:solidFill>
@@ -6294,11 +6554,17 @@
           <p:cNvGraphicFramePr>
             <a:graphicFrameLocks noGrp="1"/>
           </p:cNvGraphicFramePr>
-          <p:nvPr/>
+          <p:nvPr>
+            <p:extLst>
+              <p:ext uri="{D42A27DB-BD31-4B8C-83A1-F6EECF244321}">
+                <p14:modId xmlns:p14="http://schemas.microsoft.com/office/powerpoint/2010/main" val="3213645676"/>
+              </p:ext>
+            </p:extLst>
+          </p:nvPr>
         </p:nvGraphicFramePr>
         <p:xfrm>
           <a:off x="324000" y="1655999"/>
-          <a:ext cx="11520000" cy="3564000"/>
+          <a:ext cx="11520000" cy="3630720"/>
         </p:xfrm>
         <a:graphic>
           <a:graphicData uri="http://schemas.openxmlformats.org/drawingml/2006/table">
@@ -6307,17 +6573,53 @@
                 <a:tableStyleId>{5C22544A-7EE6-4342-B048-85BDC9FD1C3A}</a:tableStyleId>
               </a:tblPr>
               <a:tblGrid>
-                <a:gridCol w="3060000"/>
-                <a:gridCol w="1692000"/>
-                <a:gridCol w="1692000"/>
-                <a:gridCol w="1692000"/>
-                <a:gridCol w="1692000"/>
-                <a:gridCol w="1692000"/>
+                <a:gridCol w="3060000">
+                  <a:extLst>
+                    <a:ext uri="{9D8B030D-6E8A-4147-A177-3AD203B41FA5}">
+                      <a16:colId xmlns:a16="http://schemas.microsoft.com/office/drawing/2014/main" val="20000"/>
+                    </a:ext>
+                  </a:extLst>
+                </a:gridCol>
+                <a:gridCol w="1692000">
+                  <a:extLst>
+                    <a:ext uri="{9D8B030D-6E8A-4147-A177-3AD203B41FA5}">
+                      <a16:colId xmlns:a16="http://schemas.microsoft.com/office/drawing/2014/main" val="20001"/>
+                    </a:ext>
+                  </a:extLst>
+                </a:gridCol>
+                <a:gridCol w="1692000">
+                  <a:extLst>
+                    <a:ext uri="{9D8B030D-6E8A-4147-A177-3AD203B41FA5}">
+                      <a16:colId xmlns:a16="http://schemas.microsoft.com/office/drawing/2014/main" val="20002"/>
+                    </a:ext>
+                  </a:extLst>
+                </a:gridCol>
+                <a:gridCol w="1692000">
+                  <a:extLst>
+                    <a:ext uri="{9D8B030D-6E8A-4147-A177-3AD203B41FA5}">
+                      <a16:colId xmlns:a16="http://schemas.microsoft.com/office/drawing/2014/main" val="20003"/>
+                    </a:ext>
+                  </a:extLst>
+                </a:gridCol>
+                <a:gridCol w="1692000">
+                  <a:extLst>
+                    <a:ext uri="{9D8B030D-6E8A-4147-A177-3AD203B41FA5}">
+                      <a16:colId xmlns:a16="http://schemas.microsoft.com/office/drawing/2014/main" val="20004"/>
+                    </a:ext>
+                  </a:extLst>
+                </a:gridCol>
+                <a:gridCol w="1692000">
+                  <a:extLst>
+                    <a:ext uri="{9D8B030D-6E8A-4147-A177-3AD203B41FA5}">
+                      <a16:colId xmlns:a16="http://schemas.microsoft.com/office/drawing/2014/main" val="20005"/>
+                    </a:ext>
+                  </a:extLst>
+                </a:gridCol>
               </a:tblGrid>
               <a:tr h="396000">
                 <a:tc>
                   <a:txBody>
-                    <a:bodyPr wrap="square"/>
+                    <a:bodyPr/>
                     <a:lstStyle/>
                     <a:p>
                       <a:pPr algn="l">
@@ -6326,7 +6628,7 @@
                         </a:spcAft>
                       </a:pPr>
                       <a:r>
-                        <a:rPr sz="1400" b="1">
+                        <a:rPr lang="pt-BR" sz="1400" b="1" noProof="0" dirty="0">
                           <a:solidFill>
                             <a:srgbClr val="FFFFFF"/>
                           </a:solidFill>
@@ -6344,7 +6646,7 @@
                 </a:tc>
                 <a:tc>
                   <a:txBody>
-                    <a:bodyPr wrap="square"/>
+                    <a:bodyPr/>
                     <a:lstStyle/>
                     <a:p>
                       <a:pPr algn="ctr">
@@ -6353,7 +6655,7 @@
                         </a:spcAft>
                       </a:pPr>
                       <a:r>
-                        <a:rPr sz="1400" b="1">
+                        <a:rPr lang="pt-BR" sz="1400" b="1" noProof="0" dirty="0">
                           <a:solidFill>
                             <a:srgbClr val="FFFFFF"/>
                           </a:solidFill>
@@ -6371,7 +6673,7 @@
                 </a:tc>
                 <a:tc>
                   <a:txBody>
-                    <a:bodyPr wrap="square"/>
+                    <a:bodyPr/>
                     <a:lstStyle/>
                     <a:p>
                       <a:pPr algn="ctr">
@@ -6380,7 +6682,7 @@
                         </a:spcAft>
                       </a:pPr>
                       <a:r>
-                        <a:rPr sz="1400" b="1">
+                        <a:rPr lang="pt-BR" sz="1400" b="1" noProof="0" dirty="0">
                           <a:solidFill>
                             <a:srgbClr val="FFFFFF"/>
                           </a:solidFill>
@@ -6398,7 +6700,7 @@
                 </a:tc>
                 <a:tc>
                   <a:txBody>
-                    <a:bodyPr wrap="square"/>
+                    <a:bodyPr/>
                     <a:lstStyle/>
                     <a:p>
                       <a:pPr algn="ctr">
@@ -6407,7 +6709,7 @@
                         </a:spcAft>
                       </a:pPr>
                       <a:r>
-                        <a:rPr sz="1400" b="1">
+                        <a:rPr lang="pt-BR" sz="1400" b="1" noProof="0" dirty="0">
                           <a:solidFill>
                             <a:srgbClr val="FFFFFF"/>
                           </a:solidFill>
@@ -6425,7 +6727,7 @@
                 </a:tc>
                 <a:tc>
                   <a:txBody>
-                    <a:bodyPr wrap="square"/>
+                    <a:bodyPr/>
                     <a:lstStyle/>
                     <a:p>
                       <a:pPr algn="ctr">
@@ -6434,7 +6736,7 @@
                         </a:spcAft>
                       </a:pPr>
                       <a:r>
-                        <a:rPr sz="1400" b="1">
+                        <a:rPr lang="pt-BR" sz="1400" b="1" noProof="0" dirty="0">
                           <a:solidFill>
                             <a:srgbClr val="FFFFFF"/>
                           </a:solidFill>
@@ -6452,7 +6754,7 @@
                 </a:tc>
                 <a:tc>
                   <a:txBody>
-                    <a:bodyPr wrap="square"/>
+                    <a:bodyPr/>
                     <a:lstStyle/>
                     <a:p>
                       <a:pPr algn="ctr">
@@ -6461,7 +6763,7 @@
                         </a:spcAft>
                       </a:pPr>
                       <a:r>
-                        <a:rPr sz="1400" b="1">
+                        <a:rPr lang="pt-BR" sz="1400" b="1" noProof="0" dirty="0">
                           <a:solidFill>
                             <a:srgbClr val="FFFFFF"/>
                           </a:solidFill>
@@ -6477,11 +6779,16 @@
                     </a:solidFill>
                   </a:tcPr>
                 </a:tc>
+                <a:extLst>
+                  <a:ext uri="{0D108BD9-81ED-4DB2-BD59-A6C34878D82A}">
+                    <a16:rowId xmlns:a16="http://schemas.microsoft.com/office/drawing/2014/main" val="10000"/>
+                  </a:ext>
+                </a:extLst>
               </a:tr>
               <a:tr h="396000">
                 <a:tc>
                   <a:txBody>
-                    <a:bodyPr wrap="square"/>
+                    <a:bodyPr/>
                     <a:lstStyle/>
                     <a:p>
                       <a:pPr algn="l">
@@ -6490,7 +6797,7 @@
                         </a:spcAft>
                       </a:pPr>
                       <a:r>
-                        <a:rPr sz="1400" b="0">
+                        <a:rPr lang="pt-BR" sz="1400" b="0" noProof="0" dirty="0">
                           <a:solidFill>
                             <a:srgbClr val="1F2A33"/>
                           </a:solidFill>
@@ -6508,7 +6815,7 @@
                 </a:tc>
                 <a:tc>
                   <a:txBody>
-                    <a:bodyPr wrap="square"/>
+                    <a:bodyPr/>
                     <a:lstStyle/>
                     <a:p>
                       <a:pPr algn="ctr">
@@ -6517,7 +6824,7 @@
                         </a:spcAft>
                       </a:pPr>
                       <a:r>
-                        <a:rPr sz="1400" b="0">
+                        <a:rPr lang="pt-BR" sz="1400" b="0" noProof="0" dirty="0">
                           <a:solidFill>
                             <a:srgbClr val="1F2A33"/>
                           </a:solidFill>
@@ -6535,7 +6842,7 @@
                 </a:tc>
                 <a:tc>
                   <a:txBody>
-                    <a:bodyPr wrap="square"/>
+                    <a:bodyPr/>
                     <a:lstStyle/>
                     <a:p>
                       <a:pPr algn="ctr">
@@ -6544,7 +6851,7 @@
                         </a:spcAft>
                       </a:pPr>
                       <a:r>
-                        <a:rPr sz="1400" b="0">
+                        <a:rPr lang="pt-BR" sz="1400" b="0" noProof="0" dirty="0">
                           <a:solidFill>
                             <a:srgbClr val="1F2A33"/>
                           </a:solidFill>
@@ -6562,7 +6869,7 @@
                 </a:tc>
                 <a:tc>
                   <a:txBody>
-                    <a:bodyPr wrap="square"/>
+                    <a:bodyPr/>
                     <a:lstStyle/>
                     <a:p>
                       <a:pPr algn="ctr">
@@ -6571,7 +6878,7 @@
                         </a:spcAft>
                       </a:pPr>
                       <a:r>
-                        <a:rPr sz="1400" b="0">
+                        <a:rPr lang="pt-BR" sz="1400" b="0" noProof="0" dirty="0">
                           <a:solidFill>
                             <a:srgbClr val="1F2A33"/>
                           </a:solidFill>
@@ -6589,7 +6896,7 @@
                 </a:tc>
                 <a:tc>
                   <a:txBody>
-                    <a:bodyPr wrap="square"/>
+                    <a:bodyPr/>
                     <a:lstStyle/>
                     <a:p>
                       <a:pPr algn="ctr">
@@ -6598,7 +6905,7 @@
                         </a:spcAft>
                       </a:pPr>
                       <a:r>
-                        <a:rPr sz="1400" b="0">
+                        <a:rPr lang="pt-BR" sz="1400" b="0" noProof="0" dirty="0">
                           <a:solidFill>
                             <a:srgbClr val="1F2A33"/>
                           </a:solidFill>
@@ -6616,7 +6923,7 @@
                 </a:tc>
                 <a:tc>
                   <a:txBody>
-                    <a:bodyPr wrap="square"/>
+                    <a:bodyPr/>
                     <a:lstStyle/>
                     <a:p>
                       <a:pPr algn="ctr">
@@ -6625,7 +6932,7 @@
                         </a:spcAft>
                       </a:pPr>
                       <a:r>
-                        <a:rPr sz="1400" b="0">
+                        <a:rPr lang="pt-BR" sz="1400" b="0" noProof="0" dirty="0">
                           <a:solidFill>
                             <a:srgbClr val="1F2A33"/>
                           </a:solidFill>
@@ -6641,11 +6948,16 @@
                     </a:solidFill>
                   </a:tcPr>
                 </a:tc>
+                <a:extLst>
+                  <a:ext uri="{0D108BD9-81ED-4DB2-BD59-A6C34878D82A}">
+                    <a16:rowId xmlns:a16="http://schemas.microsoft.com/office/drawing/2014/main" val="10001"/>
+                  </a:ext>
+                </a:extLst>
               </a:tr>
               <a:tr h="396000">
                 <a:tc>
                   <a:txBody>
-                    <a:bodyPr wrap="square"/>
+                    <a:bodyPr/>
                     <a:lstStyle/>
                     <a:p>
                       <a:pPr algn="l">
@@ -6654,7 +6966,7 @@
                         </a:spcAft>
                       </a:pPr>
                       <a:r>
-                        <a:rPr sz="1400" b="0">
+                        <a:rPr lang="pt-BR" sz="1400" b="0" noProof="0" dirty="0">
                           <a:solidFill>
                             <a:srgbClr val="1F2A33"/>
                           </a:solidFill>
@@ -6672,7 +6984,7 @@
                 </a:tc>
                 <a:tc>
                   <a:txBody>
-                    <a:bodyPr wrap="square"/>
+                    <a:bodyPr/>
                     <a:lstStyle/>
                     <a:p>
                       <a:pPr algn="ctr">
@@ -6681,7 +6993,7 @@
                         </a:spcAft>
                       </a:pPr>
                       <a:r>
-                        <a:rPr sz="1400" b="0">
+                        <a:rPr lang="pt-BR" sz="1400" b="0" noProof="0" dirty="0">
                           <a:solidFill>
                             <a:srgbClr val="1F2A33"/>
                           </a:solidFill>
@@ -6699,7 +7011,7 @@
                 </a:tc>
                 <a:tc>
                   <a:txBody>
-                    <a:bodyPr wrap="square"/>
+                    <a:bodyPr/>
                     <a:lstStyle/>
                     <a:p>
                       <a:pPr algn="ctr">
@@ -6708,7 +7020,7 @@
                         </a:spcAft>
                       </a:pPr>
                       <a:r>
-                        <a:rPr sz="1400" b="0">
+                        <a:rPr lang="pt-BR" sz="1400" b="0" noProof="0" dirty="0">
                           <a:solidFill>
                             <a:srgbClr val="1F2A33"/>
                           </a:solidFill>
@@ -6726,7 +7038,7 @@
                 </a:tc>
                 <a:tc>
                   <a:txBody>
-                    <a:bodyPr wrap="square"/>
+                    <a:bodyPr/>
                     <a:lstStyle/>
                     <a:p>
                       <a:pPr algn="ctr">
@@ -6735,7 +7047,7 @@
                         </a:spcAft>
                       </a:pPr>
                       <a:r>
-                        <a:rPr sz="1400" b="0">
+                        <a:rPr lang="pt-BR" sz="1400" b="0" noProof="0" dirty="0">
                           <a:solidFill>
                             <a:srgbClr val="1F2A33"/>
                           </a:solidFill>
@@ -6753,7 +7065,7 @@
                 </a:tc>
                 <a:tc>
                   <a:txBody>
-                    <a:bodyPr wrap="square"/>
+                    <a:bodyPr/>
                     <a:lstStyle/>
                     <a:p>
                       <a:pPr algn="ctr">
@@ -6762,7 +7074,7 @@
                         </a:spcAft>
                       </a:pPr>
                       <a:r>
-                        <a:rPr sz="1400" b="0">
+                        <a:rPr lang="pt-BR" sz="1400" b="0" noProof="0" dirty="0">
                           <a:solidFill>
                             <a:srgbClr val="1F2A33"/>
                           </a:solidFill>
@@ -6780,7 +7092,7 @@
                 </a:tc>
                 <a:tc>
                   <a:txBody>
-                    <a:bodyPr wrap="square"/>
+                    <a:bodyPr/>
                     <a:lstStyle/>
                     <a:p>
                       <a:pPr algn="ctr">
@@ -6789,7 +7101,7 @@
                         </a:spcAft>
                       </a:pPr>
                       <a:r>
-                        <a:rPr sz="1400" b="0">
+                        <a:rPr lang="pt-BR" sz="1400" b="0" noProof="0" dirty="0">
                           <a:solidFill>
                             <a:srgbClr val="1F2A33"/>
                           </a:solidFill>
@@ -6805,11 +7117,16 @@
                     </a:solidFill>
                   </a:tcPr>
                 </a:tc>
+                <a:extLst>
+                  <a:ext uri="{0D108BD9-81ED-4DB2-BD59-A6C34878D82A}">
+                    <a16:rowId xmlns:a16="http://schemas.microsoft.com/office/drawing/2014/main" val="10002"/>
+                  </a:ext>
+                </a:extLst>
               </a:tr>
               <a:tr h="396000">
                 <a:tc>
                   <a:txBody>
-                    <a:bodyPr wrap="square"/>
+                    <a:bodyPr/>
                     <a:lstStyle/>
                     <a:p>
                       <a:pPr algn="l">
@@ -6818,7 +7135,7 @@
                         </a:spcAft>
                       </a:pPr>
                       <a:r>
-                        <a:rPr sz="1400" b="0">
+                        <a:rPr lang="pt-BR" sz="1400" b="0" noProof="0" dirty="0">
                           <a:solidFill>
                             <a:srgbClr val="1F2A33"/>
                           </a:solidFill>
@@ -6836,7 +7153,7 @@
                 </a:tc>
                 <a:tc>
                   <a:txBody>
-                    <a:bodyPr wrap="square"/>
+                    <a:bodyPr/>
                     <a:lstStyle/>
                     <a:p>
                       <a:pPr algn="ctr">
@@ -6845,7 +7162,7 @@
                         </a:spcAft>
                       </a:pPr>
                       <a:r>
-                        <a:rPr sz="1400" b="0">
+                        <a:rPr lang="pt-BR" sz="1400" b="0" noProof="0" dirty="0">
                           <a:solidFill>
                             <a:srgbClr val="1F2A33"/>
                           </a:solidFill>
@@ -6863,7 +7180,7 @@
                 </a:tc>
                 <a:tc>
                   <a:txBody>
-                    <a:bodyPr wrap="square"/>
+                    <a:bodyPr/>
                     <a:lstStyle/>
                     <a:p>
                       <a:pPr algn="ctr">
@@ -6872,7 +7189,7 @@
                         </a:spcAft>
                       </a:pPr>
                       <a:r>
-                        <a:rPr sz="1400" b="0">
+                        <a:rPr lang="pt-BR" sz="1400" b="0" noProof="0" dirty="0">
                           <a:solidFill>
                             <a:srgbClr val="1F2A33"/>
                           </a:solidFill>
@@ -6890,7 +7207,7 @@
                 </a:tc>
                 <a:tc>
                   <a:txBody>
-                    <a:bodyPr wrap="square"/>
+                    <a:bodyPr/>
                     <a:lstStyle/>
                     <a:p>
                       <a:pPr algn="ctr">
@@ -6899,7 +7216,7 @@
                         </a:spcAft>
                       </a:pPr>
                       <a:r>
-                        <a:rPr sz="1400" b="0">
+                        <a:rPr lang="pt-BR" sz="1400" b="0" noProof="0" dirty="0">
                           <a:solidFill>
                             <a:srgbClr val="1F2A33"/>
                           </a:solidFill>
@@ -6917,7 +7234,7 @@
                 </a:tc>
                 <a:tc>
                   <a:txBody>
-                    <a:bodyPr wrap="square"/>
+                    <a:bodyPr/>
                     <a:lstStyle/>
                     <a:p>
                       <a:pPr algn="ctr">
@@ -6926,7 +7243,7 @@
                         </a:spcAft>
                       </a:pPr>
                       <a:r>
-                        <a:rPr sz="1400" b="0">
+                        <a:rPr lang="pt-BR" sz="1400" b="0" noProof="0" dirty="0">
                           <a:solidFill>
                             <a:srgbClr val="1F2A33"/>
                           </a:solidFill>
@@ -6944,7 +7261,7 @@
                 </a:tc>
                 <a:tc>
                   <a:txBody>
-                    <a:bodyPr wrap="square"/>
+                    <a:bodyPr/>
                     <a:lstStyle/>
                     <a:p>
                       <a:pPr algn="ctr">
@@ -6953,7 +7270,7 @@
                         </a:spcAft>
                       </a:pPr>
                       <a:r>
-                        <a:rPr sz="1400" b="0">
+                        <a:rPr lang="pt-BR" sz="1400" b="0" noProof="0" dirty="0">
                           <a:solidFill>
                             <a:srgbClr val="1F2A33"/>
                           </a:solidFill>
@@ -6969,11 +7286,16 @@
                     </a:solidFill>
                   </a:tcPr>
                 </a:tc>
+                <a:extLst>
+                  <a:ext uri="{0D108BD9-81ED-4DB2-BD59-A6C34878D82A}">
+                    <a16:rowId xmlns:a16="http://schemas.microsoft.com/office/drawing/2014/main" val="10003"/>
+                  </a:ext>
+                </a:extLst>
               </a:tr>
               <a:tr h="396000">
                 <a:tc>
                   <a:txBody>
-                    <a:bodyPr wrap="square"/>
+                    <a:bodyPr/>
                     <a:lstStyle/>
                     <a:p>
                       <a:pPr algn="l">
@@ -6982,7 +7304,7 @@
                         </a:spcAft>
                       </a:pPr>
                       <a:r>
-                        <a:rPr sz="1400" b="0">
+                        <a:rPr lang="pt-BR" sz="1400" b="0" noProof="0" dirty="0">
                           <a:solidFill>
                             <a:srgbClr val="1F2A33"/>
                           </a:solidFill>
@@ -7000,7 +7322,7 @@
                 </a:tc>
                 <a:tc>
                   <a:txBody>
-                    <a:bodyPr wrap="square"/>
+                    <a:bodyPr/>
                     <a:lstStyle/>
                     <a:p>
                       <a:pPr algn="ctr">
@@ -7009,7 +7331,7 @@
                         </a:spcAft>
                       </a:pPr>
                       <a:r>
-                        <a:rPr sz="1400" b="0">
+                        <a:rPr lang="pt-BR" sz="1400" b="0" noProof="0" dirty="0">
                           <a:solidFill>
                             <a:srgbClr val="1F2A33"/>
                           </a:solidFill>
@@ -7027,7 +7349,7 @@
                 </a:tc>
                 <a:tc>
                   <a:txBody>
-                    <a:bodyPr wrap="square"/>
+                    <a:bodyPr/>
                     <a:lstStyle/>
                     <a:p>
                       <a:pPr algn="ctr">
@@ -7036,7 +7358,7 @@
                         </a:spcAft>
                       </a:pPr>
                       <a:r>
-                        <a:rPr sz="1400" b="0">
+                        <a:rPr lang="pt-BR" sz="1400" b="0" noProof="0" dirty="0">
                           <a:solidFill>
                             <a:srgbClr val="1F2A33"/>
                           </a:solidFill>
@@ -7054,7 +7376,7 @@
                 </a:tc>
                 <a:tc>
                   <a:txBody>
-                    <a:bodyPr wrap="square"/>
+                    <a:bodyPr/>
                     <a:lstStyle/>
                     <a:p>
                       <a:pPr algn="ctr">
@@ -7063,7 +7385,7 @@
                         </a:spcAft>
                       </a:pPr>
                       <a:r>
-                        <a:rPr sz="1400" b="0">
+                        <a:rPr lang="pt-BR" sz="1400" b="0" noProof="0" dirty="0">
                           <a:solidFill>
                             <a:srgbClr val="1F2A33"/>
                           </a:solidFill>
@@ -7081,7 +7403,7 @@
                 </a:tc>
                 <a:tc>
                   <a:txBody>
-                    <a:bodyPr wrap="square"/>
+                    <a:bodyPr/>
                     <a:lstStyle/>
                     <a:p>
                       <a:pPr algn="ctr">
@@ -7090,7 +7412,7 @@
                         </a:spcAft>
                       </a:pPr>
                       <a:r>
-                        <a:rPr sz="1400" b="0">
+                        <a:rPr lang="pt-BR" sz="1400" b="0" noProof="0" dirty="0">
                           <a:solidFill>
                             <a:srgbClr val="1F2A33"/>
                           </a:solidFill>
@@ -7108,7 +7430,7 @@
                 </a:tc>
                 <a:tc>
                   <a:txBody>
-                    <a:bodyPr wrap="square"/>
+                    <a:bodyPr/>
                     <a:lstStyle/>
                     <a:p>
                       <a:pPr algn="ctr">
@@ -7117,7 +7439,7 @@
                         </a:spcAft>
                       </a:pPr>
                       <a:r>
-                        <a:rPr sz="1400" b="0">
+                        <a:rPr lang="pt-BR" sz="1400" b="0" noProof="0" dirty="0">
                           <a:solidFill>
                             <a:srgbClr val="1F2A33"/>
                           </a:solidFill>
@@ -7133,11 +7455,16 @@
                     </a:solidFill>
                   </a:tcPr>
                 </a:tc>
+                <a:extLst>
+                  <a:ext uri="{0D108BD9-81ED-4DB2-BD59-A6C34878D82A}">
+                    <a16:rowId xmlns:a16="http://schemas.microsoft.com/office/drawing/2014/main" val="10004"/>
+                  </a:ext>
+                </a:extLst>
               </a:tr>
               <a:tr h="396000">
                 <a:tc>
                   <a:txBody>
-                    <a:bodyPr wrap="square"/>
+                    <a:bodyPr/>
                     <a:lstStyle/>
                     <a:p>
                       <a:pPr algn="l">
@@ -7146,7 +7473,7 @@
                         </a:spcAft>
                       </a:pPr>
                       <a:r>
-                        <a:rPr sz="1400" b="0">
+                        <a:rPr lang="pt-BR" sz="1400" b="0" noProof="0" dirty="0">
                           <a:solidFill>
                             <a:srgbClr val="1F2A33"/>
                           </a:solidFill>
@@ -7164,7 +7491,7 @@
                 </a:tc>
                 <a:tc>
                   <a:txBody>
-                    <a:bodyPr wrap="square"/>
+                    <a:bodyPr/>
                     <a:lstStyle/>
                     <a:p>
                       <a:pPr algn="ctr">
@@ -7173,7 +7500,7 @@
                         </a:spcAft>
                       </a:pPr>
                       <a:r>
-                        <a:rPr sz="1400" b="0">
+                        <a:rPr lang="pt-BR" sz="1400" b="0" noProof="0" dirty="0">
                           <a:solidFill>
                             <a:srgbClr val="1F2A33"/>
                           </a:solidFill>
@@ -7191,7 +7518,7 @@
                 </a:tc>
                 <a:tc>
                   <a:txBody>
-                    <a:bodyPr wrap="square"/>
+                    <a:bodyPr/>
                     <a:lstStyle/>
                     <a:p>
                       <a:pPr algn="ctr">
@@ -7200,7 +7527,7 @@
                         </a:spcAft>
                       </a:pPr>
                       <a:r>
-                        <a:rPr sz="1400" b="0">
+                        <a:rPr lang="pt-BR" sz="1400" b="0" noProof="0" dirty="0">
                           <a:solidFill>
                             <a:srgbClr val="1F2A33"/>
                           </a:solidFill>
@@ -7218,7 +7545,7 @@
                 </a:tc>
                 <a:tc>
                   <a:txBody>
-                    <a:bodyPr wrap="square"/>
+                    <a:bodyPr/>
                     <a:lstStyle/>
                     <a:p>
                       <a:pPr algn="ctr">
@@ -7227,7 +7554,7 @@
                         </a:spcAft>
                       </a:pPr>
                       <a:r>
-                        <a:rPr sz="1400" b="0">
+                        <a:rPr lang="pt-BR" sz="1400" b="0" noProof="0" dirty="0">
                           <a:solidFill>
                             <a:srgbClr val="1F2A33"/>
                           </a:solidFill>
@@ -7245,7 +7572,7 @@
                 </a:tc>
                 <a:tc>
                   <a:txBody>
-                    <a:bodyPr wrap="square"/>
+                    <a:bodyPr/>
                     <a:lstStyle/>
                     <a:p>
                       <a:pPr algn="ctr">
@@ -7254,7 +7581,7 @@
                         </a:spcAft>
                       </a:pPr>
                       <a:r>
-                        <a:rPr sz="1400" b="0">
+                        <a:rPr lang="pt-BR" sz="1400" b="0" noProof="0" dirty="0">
                           <a:solidFill>
                             <a:srgbClr val="1F2A33"/>
                           </a:solidFill>
@@ -7272,7 +7599,7 @@
                 </a:tc>
                 <a:tc>
                   <a:txBody>
-                    <a:bodyPr wrap="square"/>
+                    <a:bodyPr/>
                     <a:lstStyle/>
                     <a:p>
                       <a:pPr algn="ctr">
@@ -7281,7 +7608,7 @@
                         </a:spcAft>
                       </a:pPr>
                       <a:r>
-                        <a:rPr sz="1400" b="0">
+                        <a:rPr lang="pt-BR" sz="1400" b="0" noProof="0" dirty="0">
                           <a:solidFill>
                             <a:srgbClr val="1F2A33"/>
                           </a:solidFill>
@@ -7297,11 +7624,16 @@
                     </a:solidFill>
                   </a:tcPr>
                 </a:tc>
+                <a:extLst>
+                  <a:ext uri="{0D108BD9-81ED-4DB2-BD59-A6C34878D82A}">
+                    <a16:rowId xmlns:a16="http://schemas.microsoft.com/office/drawing/2014/main" val="10005"/>
+                  </a:ext>
+                </a:extLst>
               </a:tr>
               <a:tr h="396000">
                 <a:tc>
                   <a:txBody>
-                    <a:bodyPr wrap="square"/>
+                    <a:bodyPr/>
                     <a:lstStyle/>
                     <a:p>
                       <a:pPr algn="l">
@@ -7310,13 +7642,31 @@
                         </a:spcAft>
                       </a:pPr>
                       <a:r>
-                        <a:rPr sz="1400" b="0">
+                        <a:rPr lang="pt-BR" sz="1400" b="0" noProof="0" dirty="0">
                           <a:solidFill>
                             <a:srgbClr val="1F2A33"/>
                           </a:solidFill>
                           <a:latin typeface="Calibri"/>
                         </a:rPr>
-                        <a:t>Renda média (R$)</a:t>
+                        <a:t>Renda média (</a:t>
+                      </a:r>
+                      <a:r>
+                        <a:rPr lang="pt-BR" sz="1400" b="0" noProof="0" dirty="0" err="1">
+                          <a:solidFill>
+                            <a:srgbClr val="1F2A33"/>
+                          </a:solidFill>
+                          <a:latin typeface="Calibri"/>
+                        </a:rPr>
+                        <a:t>R</a:t>
+                      </a:r>
+                      <a:r>
+                        <a:rPr lang="pt-BR" sz="1400" b="0" noProof="0" dirty="0">
+                          <a:solidFill>
+                            <a:srgbClr val="1F2A33"/>
+                          </a:solidFill>
+                          <a:latin typeface="Calibri"/>
+                        </a:rPr>
+                        <a:t>$)</a:t>
                       </a:r>
                     </a:p>
                   </a:txBody>
@@ -7328,7 +7678,7 @@
                 </a:tc>
                 <a:tc>
                   <a:txBody>
-                    <a:bodyPr wrap="square"/>
+                    <a:bodyPr/>
                     <a:lstStyle/>
                     <a:p>
                       <a:pPr algn="ctr">
@@ -7337,7 +7687,7 @@
                         </a:spcAft>
                       </a:pPr>
                       <a:r>
-                        <a:rPr sz="1400" b="0">
+                        <a:rPr lang="pt-BR" sz="1400" b="0" noProof="0" dirty="0">
                           <a:solidFill>
                             <a:srgbClr val="1F2A33"/>
                           </a:solidFill>
@@ -7355,7 +7705,7 @@
                 </a:tc>
                 <a:tc>
                   <a:txBody>
-                    <a:bodyPr wrap="square"/>
+                    <a:bodyPr/>
                     <a:lstStyle/>
                     <a:p>
                       <a:pPr algn="ctr">
@@ -7364,7 +7714,7 @@
                         </a:spcAft>
                       </a:pPr>
                       <a:r>
-                        <a:rPr sz="1400" b="0">
+                        <a:rPr lang="pt-BR" sz="1400" b="0" noProof="0" dirty="0">
                           <a:solidFill>
                             <a:srgbClr val="1F2A33"/>
                           </a:solidFill>
@@ -7382,7 +7732,7 @@
                 </a:tc>
                 <a:tc>
                   <a:txBody>
-                    <a:bodyPr wrap="square"/>
+                    <a:bodyPr/>
                     <a:lstStyle/>
                     <a:p>
                       <a:pPr algn="ctr">
@@ -7391,7 +7741,7 @@
                         </a:spcAft>
                       </a:pPr>
                       <a:r>
-                        <a:rPr sz="1400" b="0">
+                        <a:rPr lang="pt-BR" sz="1400" b="0" noProof="0" dirty="0">
                           <a:solidFill>
                             <a:srgbClr val="1F2A33"/>
                           </a:solidFill>
@@ -7409,7 +7759,7 @@
                 </a:tc>
                 <a:tc>
                   <a:txBody>
-                    <a:bodyPr wrap="square"/>
+                    <a:bodyPr/>
                     <a:lstStyle/>
                     <a:p>
                       <a:pPr algn="ctr">
@@ -7418,7 +7768,7 @@
                         </a:spcAft>
                       </a:pPr>
                       <a:r>
-                        <a:rPr sz="1400" b="0">
+                        <a:rPr lang="pt-BR" sz="1400" b="0" noProof="0" dirty="0">
                           <a:solidFill>
                             <a:srgbClr val="1F2A33"/>
                           </a:solidFill>
@@ -7436,7 +7786,7 @@
                 </a:tc>
                 <a:tc>
                   <a:txBody>
-                    <a:bodyPr wrap="square"/>
+                    <a:bodyPr/>
                     <a:lstStyle/>
                     <a:p>
                       <a:pPr algn="ctr">
@@ -7445,7 +7795,7 @@
                         </a:spcAft>
                       </a:pPr>
                       <a:r>
-                        <a:rPr sz="1400" b="0">
+                        <a:rPr lang="pt-BR" sz="1400" b="0" noProof="0" dirty="0">
                           <a:solidFill>
                             <a:srgbClr val="1F2A33"/>
                           </a:solidFill>
@@ -7461,11 +7811,16 @@
                     </a:solidFill>
                   </a:tcPr>
                 </a:tc>
+                <a:extLst>
+                  <a:ext uri="{0D108BD9-81ED-4DB2-BD59-A6C34878D82A}">
+                    <a16:rowId xmlns:a16="http://schemas.microsoft.com/office/drawing/2014/main" val="10006"/>
+                  </a:ext>
+                </a:extLst>
               </a:tr>
               <a:tr h="396000">
                 <a:tc>
                   <a:txBody>
-                    <a:bodyPr wrap="square"/>
+                    <a:bodyPr/>
                     <a:lstStyle/>
                     <a:p>
                       <a:pPr algn="l">
@@ -7474,7 +7829,7 @@
                         </a:spcAft>
                       </a:pPr>
                       <a:r>
-                        <a:rPr sz="1400" b="0">
+                        <a:rPr lang="pt-BR" sz="1400" b="0" noProof="0" dirty="0">
                           <a:solidFill>
                             <a:srgbClr val="1F2A33"/>
                           </a:solidFill>
@@ -7492,7 +7847,7 @@
                 </a:tc>
                 <a:tc>
                   <a:txBody>
-                    <a:bodyPr wrap="square"/>
+                    <a:bodyPr/>
                     <a:lstStyle/>
                     <a:p>
                       <a:pPr algn="ctr">
@@ -7501,7 +7856,7 @@
                         </a:spcAft>
                       </a:pPr>
                       <a:r>
-                        <a:rPr sz="1400" b="0">
+                        <a:rPr lang="pt-BR" sz="1400" b="0" noProof="0" dirty="0">
                           <a:solidFill>
                             <a:srgbClr val="1F2A33"/>
                           </a:solidFill>
@@ -7519,7 +7874,7 @@
                 </a:tc>
                 <a:tc>
                   <a:txBody>
-                    <a:bodyPr wrap="square"/>
+                    <a:bodyPr/>
                     <a:lstStyle/>
                     <a:p>
                       <a:pPr algn="ctr">
@@ -7528,7 +7883,7 @@
                         </a:spcAft>
                       </a:pPr>
                       <a:r>
-                        <a:rPr sz="1400" b="0">
+                        <a:rPr lang="pt-BR" sz="1400" b="0" noProof="0" dirty="0">
                           <a:solidFill>
                             <a:srgbClr val="1F2A33"/>
                           </a:solidFill>
@@ -7546,7 +7901,7 @@
                 </a:tc>
                 <a:tc>
                   <a:txBody>
-                    <a:bodyPr wrap="square"/>
+                    <a:bodyPr/>
                     <a:lstStyle/>
                     <a:p>
                       <a:pPr algn="ctr">
@@ -7555,7 +7910,7 @@
                         </a:spcAft>
                       </a:pPr>
                       <a:r>
-                        <a:rPr sz="1400" b="0">
+                        <a:rPr lang="pt-BR" sz="1400" b="0" noProof="0" dirty="0">
                           <a:solidFill>
                             <a:srgbClr val="1F2A33"/>
                           </a:solidFill>
@@ -7573,7 +7928,7 @@
                 </a:tc>
                 <a:tc>
                   <a:txBody>
-                    <a:bodyPr wrap="square"/>
+                    <a:bodyPr/>
                     <a:lstStyle/>
                     <a:p>
                       <a:pPr algn="ctr">
@@ -7582,7 +7937,7 @@
                         </a:spcAft>
                       </a:pPr>
                       <a:r>
-                        <a:rPr sz="1400" b="0">
+                        <a:rPr lang="pt-BR" sz="1400" b="0" noProof="0" dirty="0">
                           <a:solidFill>
                             <a:srgbClr val="1F2A33"/>
                           </a:solidFill>
@@ -7600,7 +7955,7 @@
                 </a:tc>
                 <a:tc>
                   <a:txBody>
-                    <a:bodyPr wrap="square"/>
+                    <a:bodyPr/>
                     <a:lstStyle/>
                     <a:p>
                       <a:pPr algn="ctr">
@@ -7609,7 +7964,7 @@
                         </a:spcAft>
                       </a:pPr>
                       <a:r>
-                        <a:rPr sz="1400" b="0">
+                        <a:rPr lang="pt-BR" sz="1400" b="0" noProof="0" dirty="0">
                           <a:solidFill>
                             <a:srgbClr val="1F2A33"/>
                           </a:solidFill>
@@ -7625,11 +7980,16 @@
                     </a:solidFill>
                   </a:tcPr>
                 </a:tc>
+                <a:extLst>
+                  <a:ext uri="{0D108BD9-81ED-4DB2-BD59-A6C34878D82A}">
+                    <a16:rowId xmlns:a16="http://schemas.microsoft.com/office/drawing/2014/main" val="10007"/>
+                  </a:ext>
+                </a:extLst>
               </a:tr>
               <a:tr h="396000">
                 <a:tc>
                   <a:txBody>
-                    <a:bodyPr wrap="square"/>
+                    <a:bodyPr/>
                     <a:lstStyle/>
                     <a:p>
                       <a:pPr algn="l">
@@ -7638,7 +7998,7 @@
                         </a:spcAft>
                       </a:pPr>
                       <a:r>
-                        <a:rPr sz="1400" b="0">
+                        <a:rPr lang="pt-BR" sz="1400" b="0" noProof="0" dirty="0">
                           <a:solidFill>
                             <a:srgbClr val="1F2A33"/>
                           </a:solidFill>
@@ -7656,7 +8016,7 @@
                 </a:tc>
                 <a:tc>
                   <a:txBody>
-                    <a:bodyPr wrap="square"/>
+                    <a:bodyPr/>
                     <a:lstStyle/>
                     <a:p>
                       <a:pPr algn="ctr">
@@ -7665,7 +8025,7 @@
                         </a:spcAft>
                       </a:pPr>
                       <a:r>
-                        <a:rPr sz="1400" b="0">
+                        <a:rPr lang="pt-BR" sz="1400" b="0" noProof="0" dirty="0">
                           <a:solidFill>
                             <a:srgbClr val="1F2A33"/>
                           </a:solidFill>
@@ -7683,7 +8043,7 @@
                 </a:tc>
                 <a:tc>
                   <a:txBody>
-                    <a:bodyPr wrap="square"/>
+                    <a:bodyPr/>
                     <a:lstStyle/>
                     <a:p>
                       <a:pPr algn="ctr">
@@ -7692,7 +8052,7 @@
                         </a:spcAft>
                       </a:pPr>
                       <a:r>
-                        <a:rPr sz="1400" b="0">
+                        <a:rPr lang="pt-BR" sz="1400" b="0" noProof="0" dirty="0">
                           <a:solidFill>
                             <a:srgbClr val="1F2A33"/>
                           </a:solidFill>
@@ -7710,7 +8070,7 @@
                 </a:tc>
                 <a:tc>
                   <a:txBody>
-                    <a:bodyPr wrap="square"/>
+                    <a:bodyPr/>
                     <a:lstStyle/>
                     <a:p>
                       <a:pPr algn="ctr">
@@ -7719,7 +8079,7 @@
                         </a:spcAft>
                       </a:pPr>
                       <a:r>
-                        <a:rPr sz="1400" b="0">
+                        <a:rPr lang="pt-BR" sz="1400" b="0" noProof="0" dirty="0">
                           <a:solidFill>
                             <a:srgbClr val="1F2A33"/>
                           </a:solidFill>
@@ -7737,7 +8097,7 @@
                 </a:tc>
                 <a:tc>
                   <a:txBody>
-                    <a:bodyPr wrap="square"/>
+                    <a:bodyPr/>
                     <a:lstStyle/>
                     <a:p>
                       <a:pPr algn="ctr">
@@ -7746,7 +8106,7 @@
                         </a:spcAft>
                       </a:pPr>
                       <a:r>
-                        <a:rPr sz="1400" b="0">
+                        <a:rPr lang="pt-BR" sz="1400" b="0" noProof="0" dirty="0">
                           <a:solidFill>
                             <a:srgbClr val="1F2A33"/>
                           </a:solidFill>
@@ -7764,7 +8124,7 @@
                 </a:tc>
                 <a:tc>
                   <a:txBody>
-                    <a:bodyPr wrap="square"/>
+                    <a:bodyPr/>
                     <a:lstStyle/>
                     <a:p>
                       <a:pPr algn="ctr">
@@ -7773,7 +8133,7 @@
                         </a:spcAft>
                       </a:pPr>
                       <a:r>
-                        <a:rPr sz="1400" b="0">
+                        <a:rPr lang="pt-BR" sz="1400" b="0" noProof="0" dirty="0">
                           <a:solidFill>
                             <a:srgbClr val="1F2A33"/>
                           </a:solidFill>
@@ -7789,6 +8149,11 @@
                     </a:solidFill>
                   </a:tcPr>
                 </a:tc>
+                <a:extLst>
+                  <a:ext uri="{0D108BD9-81ED-4DB2-BD59-A6C34878D82A}">
+                    <a16:rowId xmlns:a16="http://schemas.microsoft.com/office/drawing/2014/main" val="10008"/>
+                  </a:ext>
+                </a:extLst>
               </a:tr>
             </a:tbl>
           </a:graphicData>
@@ -7829,7 +8194,7 @@
           </a:fontRef>
         </p:style>
         <p:txBody>
-          <a:bodyPr rtlCol="0" anchor="t" lIns="125999" rIns="125999" tIns="54000" bIns="54000" wrap="square"/>
+          <a:bodyPr wrap="square" lIns="125999" tIns="54000" rIns="125999" bIns="54000" rtlCol="0" anchor="t"/>
           <a:lstStyle/>
           <a:p>
             <a:pPr algn="l">
@@ -7838,7 +8203,7 @@
               </a:spcAft>
             </a:pPr>
             <a:r>
-              <a:rPr sz="1100" b="0">
+              <a:rPr lang="pt-BR" sz="1100" b="0" noProof="0" dirty="0">
                 <a:solidFill>
                   <a:srgbClr val="6B7780"/>
                 </a:solidFill>
@@ -7858,7 +8223,7 @@
 </file>
 
 <file path=ppt/slides/slide16.xml><?xml version="1.0" encoding="utf-8"?>
-<p:sld xmlns:a="http://schemas.openxmlformats.org/drawingml/2006/main" xmlns:p="http://schemas.openxmlformats.org/presentationml/2006/main" xmlns:r="http://schemas.openxmlformats.org/officeDocument/2006/relationships">
+<p:sld xmlns:a="http://schemas.openxmlformats.org/drawingml/2006/main" xmlns:r="http://schemas.openxmlformats.org/officeDocument/2006/relationships" xmlns:p="http://schemas.openxmlformats.org/presentationml/2006/main">
   <p:cSld>
     <p:spTree>
       <p:nvGrpSpPr>
@@ -7866,7 +8231,14 @@
         <p:cNvGrpSpPr/>
         <p:nvPr/>
       </p:nvGrpSpPr>
-      <p:grpSpPr/>
+      <p:grpSpPr>
+        <a:xfrm>
+          <a:off x="0" y="0"/>
+          <a:ext cx="0" cy="0"/>
+          <a:chOff x="0" y="0"/>
+          <a:chExt cx="0" cy="0"/>
+        </a:xfrm>
+      </p:grpSpPr>
       <p:sp>
         <p:nvSpPr>
           <p:cNvPr id="2" name="Rectangle 1"/>
@@ -7902,7 +8274,7 @@
           </a:fontRef>
         </p:style>
         <p:txBody>
-          <a:bodyPr rtlCol="0" anchor="ctr" lIns="125999" rIns="125999" tIns="54000" bIns="54000" wrap="square"/>
+          <a:bodyPr wrap="square" lIns="125999" tIns="54000" rIns="125999" bIns="54000" rtlCol="0" anchor="ctr"/>
           <a:lstStyle/>
           <a:p>
             <a:pPr algn="l">
@@ -7911,13 +8283,31 @@
               </a:spcAft>
             </a:pPr>
             <a:r>
-              <a:rPr sz="2600" b="1">
+              <a:rPr lang="pt-BR" sz="2600" b="1" noProof="0" dirty="0">
                 <a:solidFill>
                   <a:srgbClr val="1F2A33"/>
                 </a:solidFill>
                 <a:latin typeface="Calibri"/>
               </a:rPr>
-              <a:t>Reserva R5 · O setor com renda média de R$ 170.418,06</a:t>
+              <a:t>Reserva R5 · O setor com renda média de </a:t>
+            </a:r>
+            <a:r>
+              <a:rPr lang="pt-BR" sz="2600" b="1" noProof="0" dirty="0" err="1">
+                <a:solidFill>
+                  <a:srgbClr val="1F2A33"/>
+                </a:solidFill>
+                <a:latin typeface="Calibri"/>
+              </a:rPr>
+              <a:t>R</a:t>
+            </a:r>
+            <a:r>
+              <a:rPr lang="pt-BR" sz="2600" b="1" noProof="0" dirty="0">
+                <a:solidFill>
+                  <a:srgbClr val="1F2A33"/>
+                </a:solidFill>
+                <a:latin typeface="Calibri"/>
+              </a:rPr>
+              <a:t>$ 170.418,06</a:t>
             </a:r>
           </a:p>
         </p:txBody>
@@ -7959,7 +8349,7 @@
           </a:fontRef>
         </p:style>
         <p:txBody>
-          <a:bodyPr rtlCol="0" anchor="t" lIns="125999" rIns="125999" tIns="54000" bIns="54000" wrap="square"/>
+          <a:bodyPr wrap="square" lIns="125999" tIns="54000" rIns="125999" bIns="54000" rtlCol="0" anchor="t"/>
           <a:lstStyle/>
           <a:p>
             <a:pPr algn="l">
@@ -7968,7 +8358,7 @@
               </a:spcAft>
             </a:pPr>
             <a:r>
-              <a:rPr sz="1900" b="1">
+              <a:rPr lang="pt-BR" sz="1900" b="1" noProof="0" dirty="0">
                 <a:solidFill>
                   <a:srgbClr val="3B848E"/>
                 </a:solidFill>
@@ -7984,13 +8374,49 @@
               </a:spcAft>
             </a:pPr>
             <a:r>
-              <a:rPr sz="1900" b="0">
+              <a:rPr lang="pt-BR" sz="1900" b="0" noProof="0" dirty="0">
                 <a:solidFill>
                   <a:srgbClr val="1F2A33"/>
                 </a:solidFill>
                 <a:latin typeface="Calibri"/>
               </a:rPr>
-              <a:t>Renda média do responsável: R$ 170.418,06 — 55,7 vezes a mediana do município (R$ 3.060,31)</a:t>
+              <a:t>Renda média do responsável: </a:t>
+            </a:r>
+            <a:r>
+              <a:rPr lang="pt-BR" sz="1900" b="0" noProof="0" dirty="0" err="1">
+                <a:solidFill>
+                  <a:srgbClr val="1F2A33"/>
+                </a:solidFill>
+                <a:latin typeface="Calibri"/>
+              </a:rPr>
+              <a:t>R</a:t>
+            </a:r>
+            <a:r>
+              <a:rPr lang="pt-BR" sz="1900" b="0" noProof="0" dirty="0">
+                <a:solidFill>
+                  <a:srgbClr val="1F2A33"/>
+                </a:solidFill>
+                <a:latin typeface="Calibri"/>
+              </a:rPr>
+              <a:t>$ 170.418,06 — 55,7 vezes a mediana do município (</a:t>
+            </a:r>
+            <a:r>
+              <a:rPr lang="pt-BR" sz="1900" b="0" noProof="0" dirty="0" err="1">
+                <a:solidFill>
+                  <a:srgbClr val="1F2A33"/>
+                </a:solidFill>
+                <a:latin typeface="Calibri"/>
+              </a:rPr>
+              <a:t>R</a:t>
+            </a:r>
+            <a:r>
+              <a:rPr lang="pt-BR" sz="1900" b="0" noProof="0" dirty="0">
+                <a:solidFill>
+                  <a:srgbClr val="1F2A33"/>
+                </a:solidFill>
+                <a:latin typeface="Calibri"/>
+              </a:rPr>
+              <a:t>$ 3.060,31)</a:t>
             </a:r>
           </a:p>
           <a:p>
@@ -8000,7 +8426,7 @@
               </a:spcAft>
             </a:pPr>
             <a:r>
-              <a:rPr sz="1900" b="0">
+              <a:rPr lang="pt-BR" sz="1900" b="0" noProof="0" dirty="0">
                 <a:solidFill>
                   <a:srgbClr val="1F2A33"/>
                 </a:solidFill>
@@ -8016,13 +8442,31 @@
               </a:spcAft>
             </a:pPr>
             <a:r>
-              <a:rPr sz="1900" b="0">
+              <a:rPr lang="pt-BR" sz="1900" b="0" noProof="0" dirty="0">
                 <a:solidFill>
                   <a:srgbClr val="1F2A33"/>
                 </a:solidFill>
                 <a:latin typeface="Calibri"/>
               </a:rPr>
-              <a:t>O perfil do setor não combina com a renda: tratado como valor incoerente e retirado da análise descritiva. Os demais valores extremos ficaram na base (máximo restante: R$ 140.172,64).</a:t>
+              <a:t>O perfil do setor não combina com a renda: tratado como valor incoerente e retirado da análise descritiva. Os demais valores extremos ficaram na base (máximo restante: </a:t>
+            </a:r>
+            <a:r>
+              <a:rPr lang="pt-BR" sz="1900" b="0" noProof="0" dirty="0" err="1">
+                <a:solidFill>
+                  <a:srgbClr val="1F2A33"/>
+                </a:solidFill>
+                <a:latin typeface="Calibri"/>
+              </a:rPr>
+              <a:t>R</a:t>
+            </a:r>
+            <a:r>
+              <a:rPr lang="pt-BR" sz="1900" b="0" noProof="0" dirty="0">
+                <a:solidFill>
+                  <a:srgbClr val="1F2A33"/>
+                </a:solidFill>
+                <a:latin typeface="Calibri"/>
+              </a:rPr>
+              <a:t>$ 140.172,64).</a:t>
             </a:r>
           </a:p>
         </p:txBody>
@@ -8062,7 +8506,7 @@
           </a:fontRef>
         </p:style>
         <p:txBody>
-          <a:bodyPr rtlCol="0" anchor="t" lIns="125999" rIns="125999" tIns="54000" bIns="54000" wrap="square"/>
+          <a:bodyPr wrap="square" lIns="125999" tIns="54000" rIns="125999" bIns="54000" rtlCol="0" anchor="t"/>
           <a:lstStyle/>
           <a:p>
             <a:pPr algn="l">
@@ -8071,13 +8515,13 @@
               </a:spcAft>
             </a:pPr>
             <a:r>
-              <a:rPr sz="1100" b="0">
+              <a:rPr lang="pt-BR" sz="1100" b="0" noProof="0" dirty="0">
                 <a:solidFill>
                   <a:srgbClr val="6B7780"/>
                 </a:solidFill>
                 <a:latin typeface="Calibri"/>
               </a:rPr>
-              <a:t>Fonte: IBGE, Censo 2022; rastreamento de extremos de renda (banco_de_dados/eda/renda_outliers_rastreados.csv).</a:t>
+              <a:t>Fonte: IBGE, Censo 2022; rastreamento de extremos de renda.</a:t>
             </a:r>
           </a:p>
         </p:txBody>
@@ -8091,7 +8535,7 @@
 </file>
 
 <file path=ppt/slides/slide17.xml><?xml version="1.0" encoding="utf-8"?>
-<p:sld xmlns:a="http://schemas.openxmlformats.org/drawingml/2006/main" xmlns:p="http://schemas.openxmlformats.org/presentationml/2006/main" xmlns:r="http://schemas.openxmlformats.org/officeDocument/2006/relationships">
+<p:sld xmlns:a="http://schemas.openxmlformats.org/drawingml/2006/main" xmlns:r="http://schemas.openxmlformats.org/officeDocument/2006/relationships" xmlns:p="http://schemas.openxmlformats.org/presentationml/2006/main">
   <p:cSld>
     <p:spTree>
       <p:nvGrpSpPr>
@@ -8099,7 +8543,14 @@
         <p:cNvGrpSpPr/>
         <p:nvPr/>
       </p:nvGrpSpPr>
-      <p:grpSpPr/>
+      <p:grpSpPr>
+        <a:xfrm>
+          <a:off x="0" y="0"/>
+          <a:ext cx="0" cy="0"/>
+          <a:chOff x="0" y="0"/>
+          <a:chExt cx="0" cy="0"/>
+        </a:xfrm>
+      </p:grpSpPr>
       <p:sp>
         <p:nvSpPr>
           <p:cNvPr id="2" name="Rectangle 1"/>
@@ -8135,7 +8586,7 @@
           </a:fontRef>
         </p:style>
         <p:txBody>
-          <a:bodyPr rtlCol="0" anchor="ctr" lIns="125999" rIns="125999" tIns="54000" bIns="54000" wrap="square"/>
+          <a:bodyPr wrap="square" lIns="125999" tIns="54000" rIns="125999" bIns="54000" rtlCol="0" anchor="ctr"/>
           <a:lstStyle/>
           <a:p>
             <a:pPr algn="l">
@@ -8144,7 +8595,7 @@
               </a:spcAft>
             </a:pPr>
             <a:r>
-              <a:rPr sz="2600" b="1">
+              <a:rPr lang="pt-BR" sz="2600" b="1" noProof="0" dirty="0">
                 <a:solidFill>
                   <a:srgbClr val="1F2A33"/>
                 </a:solidFill>
@@ -8192,7 +8643,7 @@
           </a:fontRef>
         </p:style>
         <p:txBody>
-          <a:bodyPr rtlCol="0" anchor="t" lIns="125999" rIns="125999" tIns="54000" bIns="54000" wrap="square"/>
+          <a:bodyPr wrap="square" lIns="125999" tIns="54000" rIns="125999" bIns="54000" rtlCol="0" anchor="t"/>
           <a:lstStyle/>
           <a:p>
             <a:pPr algn="l">
@@ -8201,7 +8652,7 @@
               </a:spcAft>
             </a:pPr>
             <a:r>
-              <a:rPr sz="1900" b="1">
+              <a:rPr lang="pt-BR" sz="1900" b="1" noProof="0" dirty="0">
                 <a:solidFill>
                   <a:srgbClr val="3B848E"/>
                 </a:solidFill>
@@ -8217,7 +8668,7 @@
               </a:spcAft>
             </a:pPr>
             <a:r>
-              <a:rPr sz="1900" b="0">
+              <a:rPr lang="pt-BR" sz="1900" b="0" noProof="0" dirty="0">
                 <a:solidFill>
                   <a:srgbClr val="1F2A33"/>
                 </a:solidFill>
@@ -8233,7 +8684,7 @@
               </a:spcAft>
             </a:pPr>
             <a:r>
-              <a:rPr sz="1900" b="0">
+              <a:rPr lang="pt-BR" sz="1900" b="0" noProof="0" dirty="0">
                 <a:solidFill>
                   <a:srgbClr val="1F2A33"/>
                 </a:solidFill>
@@ -8281,7 +8732,7 @@
           </a:fontRef>
         </p:style>
         <p:txBody>
-          <a:bodyPr rtlCol="0" anchor="t" lIns="125999" rIns="125999" tIns="54000" bIns="54000" wrap="square"/>
+          <a:bodyPr wrap="square" lIns="125999" tIns="54000" rIns="125999" bIns="54000" rtlCol="0" anchor="t"/>
           <a:lstStyle/>
           <a:p>
             <a:pPr algn="l">
@@ -8290,7 +8741,7 @@
               </a:spcAft>
             </a:pPr>
             <a:r>
-              <a:rPr sz="1900" b="1">
+              <a:rPr lang="pt-BR" sz="1900" b="1" noProof="0" dirty="0">
                 <a:solidFill>
                   <a:srgbClr val="D8634E"/>
                 </a:solidFill>
@@ -8306,7 +8757,7 @@
               </a:spcAft>
             </a:pPr>
             <a:r>
-              <a:rPr sz="1900" b="0">
+              <a:rPr lang="pt-BR" sz="1900" b="0" noProof="0" dirty="0">
                 <a:solidFill>
                   <a:srgbClr val="1F2A33"/>
                 </a:solidFill>
@@ -8322,7 +8773,7 @@
               </a:spcAft>
             </a:pPr>
             <a:r>
-              <a:rPr sz="1900" b="0">
+              <a:rPr lang="pt-BR" sz="1900" b="0" noProof="0" dirty="0">
                 <a:solidFill>
                   <a:srgbClr val="1F2A33"/>
                 </a:solidFill>
@@ -8368,7 +8819,7 @@
           </a:fontRef>
         </p:style>
         <p:txBody>
-          <a:bodyPr rtlCol="0" anchor="t" lIns="125999" rIns="125999" tIns="54000" bIns="54000" wrap="square"/>
+          <a:bodyPr wrap="square" lIns="125999" tIns="54000" rIns="125999" bIns="54000" rtlCol="0" anchor="t"/>
           <a:lstStyle/>
           <a:p>
             <a:pPr algn="l">
@@ -8377,162 +8828,13 @@
               </a:spcAft>
             </a:pPr>
             <a:r>
-              <a:rPr sz="1100" b="0">
+              <a:rPr lang="pt-BR" sz="1100" b="0" noProof="0" dirty="0">
                 <a:solidFill>
                   <a:srgbClr val="6B7780"/>
                 </a:solidFill>
                 <a:latin typeface="Calibri"/>
               </a:rPr>
-              <a:t>Fonte: IBGE, Censo 2022; conferência da exclusão rural por município (banco_de_dados/eda/exclusao_rural_conferencia.csv).</a:t>
-            </a:r>
-          </a:p>
-        </p:txBody>
-      </p:sp>
-    </p:spTree>
-  </p:cSld>
-  <p:clrMapOvr>
-    <a:masterClrMapping/>
-  </p:clrMapOvr>
-</p:sld>
-</file>
-
-<file path=ppt/slides/slide18.xml><?xml version="1.0" encoding="utf-8"?>
-<p:sld xmlns:a="http://schemas.openxmlformats.org/drawingml/2006/main" xmlns:p="http://schemas.openxmlformats.org/presentationml/2006/main" xmlns:r="http://schemas.openxmlformats.org/officeDocument/2006/relationships">
-  <p:cSld>
-    <p:spTree>
-      <p:nvGrpSpPr>
-        <p:cNvPr id="1" name=""/>
-        <p:cNvGrpSpPr/>
-        <p:nvPr/>
-      </p:nvGrpSpPr>
-      <p:grpSpPr/>
-      <p:sp>
-        <p:nvSpPr>
-          <p:cNvPr id="2" name="Rectangle 1"/>
-          <p:cNvSpPr/>
-          <p:nvPr/>
-        </p:nvSpPr>
-        <p:spPr>
-          <a:xfrm>
-            <a:off x="201600" y="846000"/>
-            <a:ext cx="11807999" cy="684000"/>
-          </a:xfrm>
-          <a:prstGeom prst="rect">
-            <a:avLst/>
-          </a:prstGeom>
-          <a:noFill/>
-          <a:ln>
-            <a:noFill/>
-          </a:ln>
-          <a:effectLst/>
-        </p:spPr>
-        <p:style>
-          <a:lnRef idx="1">
-            <a:schemeClr val="accent1"/>
-          </a:lnRef>
-          <a:fillRef idx="3">
-            <a:schemeClr val="accent1"/>
-          </a:fillRef>
-          <a:effectRef idx="2">
-            <a:schemeClr val="accent1"/>
-          </a:effectRef>
-          <a:fontRef idx="minor">
-            <a:schemeClr val="lt1"/>
-          </a:fontRef>
-        </p:style>
-        <p:txBody>
-          <a:bodyPr rtlCol="0" anchor="ctr" lIns="125999" rIns="125999" tIns="54000" bIns="54000" wrap="square"/>
-          <a:lstStyle/>
-          <a:p>
-            <a:pPr algn="l">
-              <a:spcAft>
-                <a:spcPts val="0"/>
-              </a:spcAft>
-            </a:pPr>
-            <a:r>
-              <a:rPr sz="2600" b="1">
-                <a:solidFill>
-                  <a:srgbClr val="1F2A33"/>
-                </a:solidFill>
-                <a:latin typeface="Calibri"/>
-              </a:rPr>
-              <a:t>Reserva R7 · Análise fatorial</a:t>
-            </a:r>
-          </a:p>
-        </p:txBody>
-      </p:sp>
-      <p:sp>
-        <p:nvSpPr>
-          <p:cNvPr id="3" name="Rectangle 2"/>
-          <p:cNvSpPr/>
-          <p:nvPr/>
-        </p:nvSpPr>
-        <p:spPr>
-          <a:xfrm>
-            <a:off x="324000" y="1980000"/>
-            <a:ext cx="11520000" cy="2160000"/>
-          </a:xfrm>
-          <a:prstGeom prst="rect">
-            <a:avLst/>
-          </a:prstGeom>
-          <a:solidFill>
-            <a:srgbClr val="E9F4F4"/>
-          </a:solidFill>
-          <a:ln>
-            <a:noFill/>
-          </a:ln>
-          <a:effectLst/>
-        </p:spPr>
-        <p:style>
-          <a:lnRef idx="1">
-            <a:schemeClr val="accent1"/>
-          </a:lnRef>
-          <a:fillRef idx="3">
-            <a:schemeClr val="accent1"/>
-          </a:fillRef>
-          <a:effectRef idx="2">
-            <a:schemeClr val="accent1"/>
-          </a:effectRef>
-          <a:fontRef idx="minor">
-            <a:schemeClr val="lt1"/>
-          </a:fontRef>
-        </p:style>
-        <p:txBody>
-          <a:bodyPr rtlCol="0" anchor="ctr" lIns="125999" rIns="125999" tIns="54000" bIns="54000" wrap="square"/>
-          <a:lstStyle/>
-          <a:p>
-            <a:pPr algn="ctr">
-              <a:spcAft>
-                <a:spcPts val="1200"/>
-              </a:spcAft>
-            </a:pPr>
-            <a:r>
-              <a:rPr sz="2200" b="1">
-                <a:solidFill>
-                  <a:srgbClr val="1F2A33"/>
-                </a:solidFill>
-                <a:highlight>
-                  <a:srgbClr val="FFFF00"/>
-                </a:highlight>
-                <a:latin typeface="Calibri"/>
-              </a:rPr>
-              <a:t>A CONFIRMAR — só entra com autorização da Profa. Amanda.</a:t>
-            </a:r>
-          </a:p>
-          <a:p>
-            <a:pPr algn="ctr">
-              <a:spcAft>
-                <a:spcPts val="1200"/>
-              </a:spcAft>
-            </a:pPr>
-            <a:r>
-              <a:rPr sz="2200" b="0">
-                <a:solidFill>
-                  <a:srgbClr val="1F2A33"/>
-                </a:solidFill>
-                <a:latin typeface="Calibri"/>
-              </a:rPr>
-              <a:t>Se autorizado: incluir aqui os resultados combinados. Se não: tirar este slide e responder na arguição com a frase combinada.</a:t>
+              <a:t>Fonte: IBGE, Censo 2022; conferência da exclusão rural por município.</a:t>
             </a:r>
           </a:p>
         </p:txBody>
@@ -8546,7 +8848,7 @@
 </file>
 
 <file path=ppt/slides/slide2.xml><?xml version="1.0" encoding="utf-8"?>
-<p:sld xmlns:a="http://schemas.openxmlformats.org/drawingml/2006/main" xmlns:p="http://schemas.openxmlformats.org/presentationml/2006/main" xmlns:r="http://schemas.openxmlformats.org/officeDocument/2006/relationships">
+<p:sld xmlns:a="http://schemas.openxmlformats.org/drawingml/2006/main" xmlns:r="http://schemas.openxmlformats.org/officeDocument/2006/relationships" xmlns:p="http://schemas.openxmlformats.org/presentationml/2006/main">
   <p:cSld>
     <p:spTree>
       <p:nvGrpSpPr>
@@ -8554,7 +8856,14 @@
         <p:cNvGrpSpPr/>
         <p:nvPr/>
       </p:nvGrpSpPr>
-      <p:grpSpPr/>
+      <p:grpSpPr>
+        <a:xfrm>
+          <a:off x="0" y="0"/>
+          <a:ext cx="0" cy="0"/>
+          <a:chOff x="0" y="0"/>
+          <a:chExt cx="0" cy="0"/>
+        </a:xfrm>
+      </p:grpSpPr>
       <p:sp>
         <p:nvSpPr>
           <p:cNvPr id="2" name="Rectangle 1"/>
@@ -8590,7 +8899,7 @@
           </a:fontRef>
         </p:style>
         <p:txBody>
-          <a:bodyPr rtlCol="0" anchor="ctr" lIns="125999" rIns="125999" tIns="54000" bIns="54000" wrap="square"/>
+          <a:bodyPr wrap="square" lIns="125999" tIns="54000" rIns="125999" bIns="54000" rtlCol="0" anchor="ctr"/>
           <a:lstStyle/>
           <a:p>
             <a:pPr algn="l">
@@ -8599,7 +8908,7 @@
               </a:spcAft>
             </a:pPr>
             <a:r>
-              <a:rPr sz="2600" b="1">
+              <a:rPr lang="pt-BR" sz="2600" b="1" noProof="0" dirty="0">
                 <a:solidFill>
                   <a:srgbClr val="1F2A33"/>
                 </a:solidFill>
@@ -8647,7 +8956,7 @@
           </a:fontRef>
         </p:style>
         <p:txBody>
-          <a:bodyPr rtlCol="0" anchor="ctr" lIns="125999" rIns="125999" tIns="54000" bIns="54000" wrap="square"/>
+          <a:bodyPr wrap="square" lIns="125999" tIns="54000" rIns="125999" bIns="54000" rtlCol="0" anchor="ctr"/>
           <a:lstStyle/>
           <a:p>
             <a:pPr algn="ctr">
@@ -8656,7 +8965,7 @@
               </a:spcAft>
             </a:pPr>
             <a:r>
-              <a:rPr sz="2600" b="1">
+              <a:rPr lang="pt-BR" sz="2600" b="1" noProof="0" dirty="0">
                 <a:solidFill>
                   <a:srgbClr val="FFFFFF"/>
                 </a:solidFill>
@@ -8702,7 +9011,7 @@
           </a:fontRef>
         </p:style>
         <p:txBody>
-          <a:bodyPr rtlCol="0" anchor="t" lIns="125999" rIns="125999" tIns="54000" bIns="54000" wrap="square"/>
+          <a:bodyPr wrap="square" lIns="125999" tIns="54000" rIns="125999" bIns="54000" rtlCol="0" anchor="t"/>
           <a:lstStyle/>
           <a:p>
             <a:pPr algn="ctr">
@@ -8711,7 +9020,7 @@
               </a:spcAft>
             </a:pPr>
             <a:r>
-              <a:rPr sz="2000" b="1">
+              <a:rPr lang="pt-BR" sz="2000" b="1" noProof="0" dirty="0">
                 <a:solidFill>
                   <a:srgbClr val="1F2A33"/>
                 </a:solidFill>
@@ -8762,6 +9071,7 @@
           <a:lstStyle/>
           <a:p>
             <a:pPr algn="ctr"/>
+            <a:endParaRPr lang="pt-BR" noProof="0" dirty="0"/>
           </a:p>
         </p:txBody>
       </p:sp>
@@ -8805,6 +9115,7 @@
           <a:lstStyle/>
           <a:p>
             <a:pPr algn="ctr"/>
+            <a:endParaRPr lang="pt-BR" noProof="0" dirty="0"/>
           </a:p>
         </p:txBody>
       </p:sp>
@@ -8848,6 +9159,7 @@
           <a:lstStyle/>
           <a:p>
             <a:pPr algn="ctr"/>
+            <a:endParaRPr lang="pt-BR" noProof="0" dirty="0"/>
           </a:p>
         </p:txBody>
       </p:sp>
@@ -8891,6 +9203,7 @@
           <a:lstStyle/>
           <a:p>
             <a:pPr algn="ctr"/>
+            <a:endParaRPr lang="pt-BR" noProof="0" dirty="0"/>
           </a:p>
         </p:txBody>
       </p:sp>
@@ -8934,6 +9247,7 @@
           <a:lstStyle/>
           <a:p>
             <a:pPr algn="ctr"/>
+            <a:endParaRPr lang="pt-BR" noProof="0" dirty="0"/>
           </a:p>
         </p:txBody>
       </p:sp>
@@ -8977,6 +9291,7 @@
           <a:lstStyle/>
           <a:p>
             <a:pPr algn="ctr"/>
+            <a:endParaRPr lang="pt-BR" noProof="0" dirty="0"/>
           </a:p>
         </p:txBody>
       </p:sp>
@@ -9020,6 +9335,7 @@
           <a:lstStyle/>
           <a:p>
             <a:pPr algn="ctr"/>
+            <a:endParaRPr lang="pt-BR" noProof="0" dirty="0"/>
           </a:p>
         </p:txBody>
       </p:sp>
@@ -9063,6 +9379,7 @@
           <a:lstStyle/>
           <a:p>
             <a:pPr algn="ctr"/>
+            <a:endParaRPr lang="pt-BR" noProof="0" dirty="0"/>
           </a:p>
         </p:txBody>
       </p:sp>
@@ -9106,6 +9423,7 @@
           <a:lstStyle/>
           <a:p>
             <a:pPr algn="ctr"/>
+            <a:endParaRPr lang="pt-BR" noProof="0" dirty="0"/>
           </a:p>
         </p:txBody>
       </p:sp>
@@ -9149,6 +9467,7 @@
           <a:lstStyle/>
           <a:p>
             <a:pPr algn="ctr"/>
+            <a:endParaRPr lang="pt-BR" noProof="0" dirty="0"/>
           </a:p>
         </p:txBody>
       </p:sp>
@@ -9192,6 +9511,7 @@
           <a:lstStyle/>
           <a:p>
             <a:pPr algn="ctr"/>
+            <a:endParaRPr lang="pt-BR" noProof="0" dirty="0"/>
           </a:p>
         </p:txBody>
       </p:sp>
@@ -9235,6 +9555,7 @@
           <a:lstStyle/>
           <a:p>
             <a:pPr algn="ctr"/>
+            <a:endParaRPr lang="pt-BR" noProof="0" dirty="0"/>
           </a:p>
         </p:txBody>
       </p:sp>
@@ -9278,6 +9599,7 @@
           <a:lstStyle/>
           <a:p>
             <a:pPr algn="ctr"/>
+            <a:endParaRPr lang="pt-BR" noProof="0" dirty="0"/>
           </a:p>
         </p:txBody>
       </p:sp>
@@ -9321,6 +9643,7 @@
           <a:lstStyle/>
           <a:p>
             <a:pPr algn="ctr"/>
+            <a:endParaRPr lang="pt-BR" noProof="0" dirty="0"/>
           </a:p>
         </p:txBody>
       </p:sp>
@@ -9364,6 +9687,7 @@
           <a:lstStyle/>
           <a:p>
             <a:pPr algn="ctr"/>
+            <a:endParaRPr lang="pt-BR" noProof="0" dirty="0"/>
           </a:p>
         </p:txBody>
       </p:sp>
@@ -9407,6 +9731,7 @@
           <a:lstStyle/>
           <a:p>
             <a:pPr algn="ctr"/>
+            <a:endParaRPr lang="pt-BR" noProof="0" dirty="0"/>
           </a:p>
         </p:txBody>
       </p:sp>
@@ -9450,6 +9775,7 @@
           <a:lstStyle/>
           <a:p>
             <a:pPr algn="ctr"/>
+            <a:endParaRPr lang="pt-BR" noProof="0" dirty="0"/>
           </a:p>
         </p:txBody>
       </p:sp>
@@ -9493,6 +9819,7 @@
           <a:lstStyle/>
           <a:p>
             <a:pPr algn="ctr"/>
+            <a:endParaRPr lang="pt-BR" noProof="0" dirty="0"/>
           </a:p>
         </p:txBody>
       </p:sp>
@@ -9536,6 +9863,7 @@
           <a:lstStyle/>
           <a:p>
             <a:pPr algn="ctr"/>
+            <a:endParaRPr lang="pt-BR" noProof="0" dirty="0"/>
           </a:p>
         </p:txBody>
       </p:sp>
@@ -9579,6 +9907,7 @@
           <a:lstStyle/>
           <a:p>
             <a:pPr algn="ctr"/>
+            <a:endParaRPr lang="pt-BR" noProof="0" dirty="0"/>
           </a:p>
         </p:txBody>
       </p:sp>
@@ -9622,6 +9951,7 @@
           <a:lstStyle/>
           <a:p>
             <a:pPr algn="ctr"/>
+            <a:endParaRPr lang="pt-BR" noProof="0" dirty="0"/>
           </a:p>
         </p:txBody>
       </p:sp>
@@ -9665,6 +9995,7 @@
           <a:lstStyle/>
           <a:p>
             <a:pPr algn="ctr"/>
+            <a:endParaRPr lang="pt-BR" noProof="0" dirty="0"/>
           </a:p>
         </p:txBody>
       </p:sp>
@@ -9708,6 +10039,7 @@
           <a:lstStyle/>
           <a:p>
             <a:pPr algn="ctr"/>
+            <a:endParaRPr lang="pt-BR" noProof="0" dirty="0"/>
           </a:p>
         </p:txBody>
       </p:sp>
@@ -9751,6 +10083,7 @@
           <a:lstStyle/>
           <a:p>
             <a:pPr algn="ctr"/>
+            <a:endParaRPr lang="pt-BR" noProof="0" dirty="0"/>
           </a:p>
         </p:txBody>
       </p:sp>
@@ -9794,6 +10127,7 @@
           <a:lstStyle/>
           <a:p>
             <a:pPr algn="ctr"/>
+            <a:endParaRPr lang="pt-BR" noProof="0" dirty="0"/>
           </a:p>
         </p:txBody>
       </p:sp>
@@ -9837,6 +10171,7 @@
           <a:lstStyle/>
           <a:p>
             <a:pPr algn="ctr"/>
+            <a:endParaRPr lang="pt-BR" noProof="0" dirty="0"/>
           </a:p>
         </p:txBody>
       </p:sp>
@@ -9880,6 +10215,7 @@
           <a:lstStyle/>
           <a:p>
             <a:pPr algn="ctr"/>
+            <a:endParaRPr lang="pt-BR" noProof="0" dirty="0"/>
           </a:p>
         </p:txBody>
       </p:sp>
@@ -9923,6 +10259,7 @@
           <a:lstStyle/>
           <a:p>
             <a:pPr algn="ctr"/>
+            <a:endParaRPr lang="pt-BR" noProof="0" dirty="0"/>
           </a:p>
         </p:txBody>
       </p:sp>
@@ -9966,6 +10303,7 @@
           <a:lstStyle/>
           <a:p>
             <a:pPr algn="ctr"/>
+            <a:endParaRPr lang="pt-BR" noProof="0" dirty="0"/>
           </a:p>
         </p:txBody>
       </p:sp>
@@ -10009,6 +10347,7 @@
           <a:lstStyle/>
           <a:p>
             <a:pPr algn="ctr"/>
+            <a:endParaRPr lang="pt-BR" noProof="0" dirty="0"/>
           </a:p>
         </p:txBody>
       </p:sp>
@@ -10052,6 +10391,7 @@
           <a:lstStyle/>
           <a:p>
             <a:pPr algn="ctr"/>
+            <a:endParaRPr lang="pt-BR" noProof="0" dirty="0"/>
           </a:p>
         </p:txBody>
       </p:sp>
@@ -10095,6 +10435,7 @@
           <a:lstStyle/>
           <a:p>
             <a:pPr algn="ctr"/>
+            <a:endParaRPr lang="pt-BR" noProof="0" dirty="0"/>
           </a:p>
         </p:txBody>
       </p:sp>
@@ -10138,6 +10479,7 @@
           <a:lstStyle/>
           <a:p>
             <a:pPr algn="ctr"/>
+            <a:endParaRPr lang="pt-BR" noProof="0" dirty="0"/>
           </a:p>
         </p:txBody>
       </p:sp>
@@ -10181,6 +10523,7 @@
           <a:lstStyle/>
           <a:p>
             <a:pPr algn="ctr"/>
+            <a:endParaRPr lang="pt-BR" noProof="0" dirty="0"/>
           </a:p>
         </p:txBody>
       </p:sp>
@@ -10224,6 +10567,7 @@
           <a:lstStyle/>
           <a:p>
             <a:pPr algn="ctr"/>
+            <a:endParaRPr lang="pt-BR" noProof="0" dirty="0"/>
           </a:p>
         </p:txBody>
       </p:sp>
@@ -10267,6 +10611,7 @@
           <a:lstStyle/>
           <a:p>
             <a:pPr algn="ctr"/>
+            <a:endParaRPr lang="pt-BR" noProof="0" dirty="0"/>
           </a:p>
         </p:txBody>
       </p:sp>
@@ -10310,6 +10655,7 @@
           <a:lstStyle/>
           <a:p>
             <a:pPr algn="ctr"/>
+            <a:endParaRPr lang="pt-BR" noProof="0" dirty="0"/>
           </a:p>
         </p:txBody>
       </p:sp>
@@ -10353,6 +10699,7 @@
           <a:lstStyle/>
           <a:p>
             <a:pPr algn="ctr"/>
+            <a:endParaRPr lang="pt-BR" noProof="0" dirty="0"/>
           </a:p>
         </p:txBody>
       </p:sp>
@@ -10396,6 +10743,7 @@
           <a:lstStyle/>
           <a:p>
             <a:pPr algn="ctr"/>
+            <a:endParaRPr lang="pt-BR" noProof="0" dirty="0"/>
           </a:p>
         </p:txBody>
       </p:sp>
@@ -10439,6 +10787,7 @@
           <a:lstStyle/>
           <a:p>
             <a:pPr algn="ctr"/>
+            <a:endParaRPr lang="pt-BR" noProof="0" dirty="0"/>
           </a:p>
         </p:txBody>
       </p:sp>
@@ -10482,6 +10831,7 @@
           <a:lstStyle/>
           <a:p>
             <a:pPr algn="ctr"/>
+            <a:endParaRPr lang="pt-BR" noProof="0" dirty="0"/>
           </a:p>
         </p:txBody>
       </p:sp>
@@ -10525,6 +10875,7 @@
           <a:lstStyle/>
           <a:p>
             <a:pPr algn="ctr"/>
+            <a:endParaRPr lang="pt-BR" noProof="0" dirty="0"/>
           </a:p>
         </p:txBody>
       </p:sp>
@@ -10568,6 +10919,7 @@
           <a:lstStyle/>
           <a:p>
             <a:pPr algn="ctr"/>
+            <a:endParaRPr lang="pt-BR" noProof="0" dirty="0"/>
           </a:p>
         </p:txBody>
       </p:sp>
@@ -10611,6 +10963,7 @@
           <a:lstStyle/>
           <a:p>
             <a:pPr algn="ctr"/>
+            <a:endParaRPr lang="pt-BR" noProof="0" dirty="0"/>
           </a:p>
         </p:txBody>
       </p:sp>
@@ -10654,6 +11007,7 @@
           <a:lstStyle/>
           <a:p>
             <a:pPr algn="ctr"/>
+            <a:endParaRPr lang="pt-BR" noProof="0" dirty="0"/>
           </a:p>
         </p:txBody>
       </p:sp>
@@ -10697,6 +11051,7 @@
           <a:lstStyle/>
           <a:p>
             <a:pPr algn="ctr"/>
+            <a:endParaRPr lang="pt-BR" noProof="0" dirty="0"/>
           </a:p>
         </p:txBody>
       </p:sp>
@@ -10740,6 +11095,7 @@
           <a:lstStyle/>
           <a:p>
             <a:pPr algn="ctr"/>
+            <a:endParaRPr lang="pt-BR" noProof="0" dirty="0"/>
           </a:p>
         </p:txBody>
       </p:sp>
@@ -10783,6 +11139,7 @@
           <a:lstStyle/>
           <a:p>
             <a:pPr algn="ctr"/>
+            <a:endParaRPr lang="pt-BR" noProof="0" dirty="0"/>
           </a:p>
         </p:txBody>
       </p:sp>
@@ -10826,6 +11183,7 @@
           <a:lstStyle/>
           <a:p>
             <a:pPr algn="ctr"/>
+            <a:endParaRPr lang="pt-BR" noProof="0" dirty="0"/>
           </a:p>
         </p:txBody>
       </p:sp>
@@ -10869,6 +11227,7 @@
           <a:lstStyle/>
           <a:p>
             <a:pPr algn="ctr"/>
+            <a:endParaRPr lang="pt-BR" noProof="0" dirty="0"/>
           </a:p>
         </p:txBody>
       </p:sp>
@@ -10912,6 +11271,7 @@
           <a:lstStyle/>
           <a:p>
             <a:pPr algn="ctr"/>
+            <a:endParaRPr lang="pt-BR" noProof="0" dirty="0"/>
           </a:p>
         </p:txBody>
       </p:sp>
@@ -10955,6 +11315,7 @@
           <a:lstStyle/>
           <a:p>
             <a:pPr algn="ctr"/>
+            <a:endParaRPr lang="pt-BR" noProof="0" dirty="0"/>
           </a:p>
         </p:txBody>
       </p:sp>
@@ -10998,6 +11359,7 @@
           <a:lstStyle/>
           <a:p>
             <a:pPr algn="ctr"/>
+            <a:endParaRPr lang="pt-BR" noProof="0" dirty="0"/>
           </a:p>
         </p:txBody>
       </p:sp>
@@ -11041,6 +11403,7 @@
           <a:lstStyle/>
           <a:p>
             <a:pPr algn="ctr"/>
+            <a:endParaRPr lang="pt-BR" noProof="0" dirty="0"/>
           </a:p>
         </p:txBody>
       </p:sp>
@@ -11084,6 +11447,7 @@
           <a:lstStyle/>
           <a:p>
             <a:pPr algn="ctr"/>
+            <a:endParaRPr lang="pt-BR" noProof="0" dirty="0"/>
           </a:p>
         </p:txBody>
       </p:sp>
@@ -11127,6 +11491,7 @@
           <a:lstStyle/>
           <a:p>
             <a:pPr algn="ctr"/>
+            <a:endParaRPr lang="pt-BR" noProof="0" dirty="0"/>
           </a:p>
         </p:txBody>
       </p:sp>
@@ -11170,6 +11535,7 @@
           <a:lstStyle/>
           <a:p>
             <a:pPr algn="ctr"/>
+            <a:endParaRPr lang="pt-BR" noProof="0" dirty="0"/>
           </a:p>
         </p:txBody>
       </p:sp>
@@ -11213,6 +11579,7 @@
           <a:lstStyle/>
           <a:p>
             <a:pPr algn="ctr"/>
+            <a:endParaRPr lang="pt-BR" noProof="0" dirty="0"/>
           </a:p>
         </p:txBody>
       </p:sp>
@@ -11256,6 +11623,7 @@
           <a:lstStyle/>
           <a:p>
             <a:pPr algn="ctr"/>
+            <a:endParaRPr lang="pt-BR" noProof="0" dirty="0"/>
           </a:p>
         </p:txBody>
       </p:sp>
@@ -11299,6 +11667,7 @@
           <a:lstStyle/>
           <a:p>
             <a:pPr algn="ctr"/>
+            <a:endParaRPr lang="pt-BR" noProof="0" dirty="0"/>
           </a:p>
         </p:txBody>
       </p:sp>
@@ -11342,6 +11711,7 @@
           <a:lstStyle/>
           <a:p>
             <a:pPr algn="ctr"/>
+            <a:endParaRPr lang="pt-BR" noProof="0" dirty="0"/>
           </a:p>
         </p:txBody>
       </p:sp>
@@ -11385,6 +11755,7 @@
           <a:lstStyle/>
           <a:p>
             <a:pPr algn="ctr"/>
+            <a:endParaRPr lang="pt-BR" noProof="0" dirty="0"/>
           </a:p>
         </p:txBody>
       </p:sp>
@@ -11428,6 +11799,7 @@
           <a:lstStyle/>
           <a:p>
             <a:pPr algn="ctr"/>
+            <a:endParaRPr lang="pt-BR" noProof="0" dirty="0"/>
           </a:p>
         </p:txBody>
       </p:sp>
@@ -11471,6 +11843,7 @@
           <a:lstStyle/>
           <a:p>
             <a:pPr algn="ctr"/>
+            <a:endParaRPr lang="pt-BR" noProof="0" dirty="0"/>
           </a:p>
         </p:txBody>
       </p:sp>
@@ -11514,6 +11887,7 @@
           <a:lstStyle/>
           <a:p>
             <a:pPr algn="ctr"/>
+            <a:endParaRPr lang="pt-BR" noProof="0" dirty="0"/>
           </a:p>
         </p:txBody>
       </p:sp>
@@ -11557,6 +11931,7 @@
           <a:lstStyle/>
           <a:p>
             <a:pPr algn="ctr"/>
+            <a:endParaRPr lang="pt-BR" noProof="0" dirty="0"/>
           </a:p>
         </p:txBody>
       </p:sp>
@@ -11600,6 +11975,7 @@
           <a:lstStyle/>
           <a:p>
             <a:pPr algn="ctr"/>
+            <a:endParaRPr lang="pt-BR" noProof="0" dirty="0"/>
           </a:p>
         </p:txBody>
       </p:sp>
@@ -11643,6 +12019,7 @@
           <a:lstStyle/>
           <a:p>
             <a:pPr algn="ctr"/>
+            <a:endParaRPr lang="pt-BR" noProof="0" dirty="0"/>
           </a:p>
         </p:txBody>
       </p:sp>
@@ -11686,6 +12063,7 @@
           <a:lstStyle/>
           <a:p>
             <a:pPr algn="ctr"/>
+            <a:endParaRPr lang="pt-BR" noProof="0" dirty="0"/>
           </a:p>
         </p:txBody>
       </p:sp>
@@ -11729,6 +12107,7 @@
           <a:lstStyle/>
           <a:p>
             <a:pPr algn="ctr"/>
+            <a:endParaRPr lang="pt-BR" noProof="0" dirty="0"/>
           </a:p>
         </p:txBody>
       </p:sp>
@@ -11772,6 +12151,7 @@
           <a:lstStyle/>
           <a:p>
             <a:pPr algn="ctr"/>
+            <a:endParaRPr lang="pt-BR" noProof="0" dirty="0"/>
           </a:p>
         </p:txBody>
       </p:sp>
@@ -11815,6 +12195,7 @@
           <a:lstStyle/>
           <a:p>
             <a:pPr algn="ctr"/>
+            <a:endParaRPr lang="pt-BR" noProof="0" dirty="0"/>
           </a:p>
         </p:txBody>
       </p:sp>
@@ -11858,6 +12239,7 @@
           <a:lstStyle/>
           <a:p>
             <a:pPr algn="ctr"/>
+            <a:endParaRPr lang="pt-BR" noProof="0" dirty="0"/>
           </a:p>
         </p:txBody>
       </p:sp>
@@ -11901,6 +12283,7 @@
           <a:lstStyle/>
           <a:p>
             <a:pPr algn="ctr"/>
+            <a:endParaRPr lang="pt-BR" noProof="0" dirty="0"/>
           </a:p>
         </p:txBody>
       </p:sp>
@@ -11944,6 +12327,7 @@
           <a:lstStyle/>
           <a:p>
             <a:pPr algn="ctr"/>
+            <a:endParaRPr lang="pt-BR" noProof="0" dirty="0"/>
           </a:p>
         </p:txBody>
       </p:sp>
@@ -11987,6 +12371,7 @@
           <a:lstStyle/>
           <a:p>
             <a:pPr algn="ctr"/>
+            <a:endParaRPr lang="pt-BR" noProof="0" dirty="0"/>
           </a:p>
         </p:txBody>
       </p:sp>
@@ -12030,6 +12415,7 @@
           <a:lstStyle/>
           <a:p>
             <a:pPr algn="ctr"/>
+            <a:endParaRPr lang="pt-BR" noProof="0" dirty="0"/>
           </a:p>
         </p:txBody>
       </p:sp>
@@ -12073,6 +12459,7 @@
           <a:lstStyle/>
           <a:p>
             <a:pPr algn="ctr"/>
+            <a:endParaRPr lang="pt-BR" noProof="0" dirty="0"/>
           </a:p>
         </p:txBody>
       </p:sp>
@@ -12116,6 +12503,7 @@
           <a:lstStyle/>
           <a:p>
             <a:pPr algn="ctr"/>
+            <a:endParaRPr lang="pt-BR" noProof="0" dirty="0"/>
           </a:p>
         </p:txBody>
       </p:sp>
@@ -12159,6 +12547,7 @@
           <a:lstStyle/>
           <a:p>
             <a:pPr algn="ctr"/>
+            <a:endParaRPr lang="pt-BR" noProof="0" dirty="0"/>
           </a:p>
         </p:txBody>
       </p:sp>
@@ -12202,6 +12591,7 @@
           <a:lstStyle/>
           <a:p>
             <a:pPr algn="ctr"/>
+            <a:endParaRPr lang="pt-BR" noProof="0" dirty="0"/>
           </a:p>
         </p:txBody>
       </p:sp>
@@ -12245,6 +12635,7 @@
           <a:lstStyle/>
           <a:p>
             <a:pPr algn="ctr"/>
+            <a:endParaRPr lang="pt-BR" noProof="0" dirty="0"/>
           </a:p>
         </p:txBody>
       </p:sp>
@@ -12288,6 +12679,7 @@
           <a:lstStyle/>
           <a:p>
             <a:pPr algn="ctr"/>
+            <a:endParaRPr lang="pt-BR" noProof="0" dirty="0"/>
           </a:p>
         </p:txBody>
       </p:sp>
@@ -12331,6 +12723,7 @@
           <a:lstStyle/>
           <a:p>
             <a:pPr algn="ctr"/>
+            <a:endParaRPr lang="pt-BR" noProof="0" dirty="0"/>
           </a:p>
         </p:txBody>
       </p:sp>
@@ -12374,6 +12767,7 @@
           <a:lstStyle/>
           <a:p>
             <a:pPr algn="ctr"/>
+            <a:endParaRPr lang="pt-BR" noProof="0" dirty="0"/>
           </a:p>
         </p:txBody>
       </p:sp>
@@ -12417,6 +12811,7 @@
           <a:lstStyle/>
           <a:p>
             <a:pPr algn="ctr"/>
+            <a:endParaRPr lang="pt-BR" noProof="0" dirty="0"/>
           </a:p>
         </p:txBody>
       </p:sp>
@@ -12460,6 +12855,7 @@
           <a:lstStyle/>
           <a:p>
             <a:pPr algn="ctr"/>
+            <a:endParaRPr lang="pt-BR" noProof="0" dirty="0"/>
           </a:p>
         </p:txBody>
       </p:sp>
@@ -12503,6 +12899,7 @@
           <a:lstStyle/>
           <a:p>
             <a:pPr algn="ctr"/>
+            <a:endParaRPr lang="pt-BR" noProof="0" dirty="0"/>
           </a:p>
         </p:txBody>
       </p:sp>
@@ -12546,6 +12943,7 @@
           <a:lstStyle/>
           <a:p>
             <a:pPr algn="ctr"/>
+            <a:endParaRPr lang="pt-BR" noProof="0" dirty="0"/>
           </a:p>
         </p:txBody>
       </p:sp>
@@ -12589,6 +12987,7 @@
           <a:lstStyle/>
           <a:p>
             <a:pPr algn="ctr"/>
+            <a:endParaRPr lang="pt-BR" noProof="0" dirty="0"/>
           </a:p>
         </p:txBody>
       </p:sp>
@@ -12632,6 +13031,7 @@
           <a:lstStyle/>
           <a:p>
             <a:pPr algn="ctr"/>
+            <a:endParaRPr lang="pt-BR" noProof="0" dirty="0"/>
           </a:p>
         </p:txBody>
       </p:sp>
@@ -12675,6 +13075,7 @@
           <a:lstStyle/>
           <a:p>
             <a:pPr algn="ctr"/>
+            <a:endParaRPr lang="pt-BR" noProof="0" dirty="0"/>
           </a:p>
         </p:txBody>
       </p:sp>
@@ -12718,6 +13119,7 @@
           <a:lstStyle/>
           <a:p>
             <a:pPr algn="ctr"/>
+            <a:endParaRPr lang="pt-BR" noProof="0" dirty="0"/>
           </a:p>
         </p:txBody>
       </p:sp>
@@ -12761,6 +13163,7 @@
           <a:lstStyle/>
           <a:p>
             <a:pPr algn="ctr"/>
+            <a:endParaRPr lang="pt-BR" noProof="0" dirty="0"/>
           </a:p>
         </p:txBody>
       </p:sp>
@@ -12804,6 +13207,7 @@
           <a:lstStyle/>
           <a:p>
             <a:pPr algn="ctr"/>
+            <a:endParaRPr lang="pt-BR" noProof="0" dirty="0"/>
           </a:p>
         </p:txBody>
       </p:sp>
@@ -12847,6 +13251,7 @@
           <a:lstStyle/>
           <a:p>
             <a:pPr algn="ctr"/>
+            <a:endParaRPr lang="pt-BR" noProof="0" dirty="0"/>
           </a:p>
         </p:txBody>
       </p:sp>
@@ -12890,6 +13295,7 @@
           <a:lstStyle/>
           <a:p>
             <a:pPr algn="ctr"/>
+            <a:endParaRPr lang="pt-BR" noProof="0" dirty="0"/>
           </a:p>
         </p:txBody>
       </p:sp>
@@ -12933,6 +13339,7 @@
           <a:lstStyle/>
           <a:p>
             <a:pPr algn="ctr"/>
+            <a:endParaRPr lang="pt-BR" noProof="0" dirty="0"/>
           </a:p>
         </p:txBody>
       </p:sp>
@@ -12976,6 +13383,7 @@
           <a:lstStyle/>
           <a:p>
             <a:pPr algn="ctr"/>
+            <a:endParaRPr lang="pt-BR" noProof="0" dirty="0"/>
           </a:p>
         </p:txBody>
       </p:sp>
@@ -13019,6 +13427,7 @@
           <a:lstStyle/>
           <a:p>
             <a:pPr algn="ctr"/>
+            <a:endParaRPr lang="pt-BR" noProof="0" dirty="0"/>
           </a:p>
         </p:txBody>
       </p:sp>
@@ -13062,6 +13471,7 @@
           <a:lstStyle/>
           <a:p>
             <a:pPr algn="ctr"/>
+            <a:endParaRPr lang="pt-BR" noProof="0" dirty="0"/>
           </a:p>
         </p:txBody>
       </p:sp>
@@ -13100,7 +13510,7 @@
           </a:fontRef>
         </p:style>
         <p:txBody>
-          <a:bodyPr rtlCol="0" anchor="t" lIns="125999" rIns="125999" tIns="54000" bIns="54000" wrap="square"/>
+          <a:bodyPr wrap="square" lIns="125999" tIns="54000" rIns="125999" bIns="54000" rtlCol="0" anchor="t"/>
           <a:lstStyle/>
           <a:p>
             <a:pPr algn="ctr">
@@ -13109,7 +13519,7 @@
               </a:spcAft>
             </a:pPr>
             <a:r>
-              <a:rPr sz="2000" b="1">
+              <a:rPr lang="pt-BR" sz="2000" b="1" noProof="0" dirty="0">
                 <a:solidFill>
                   <a:srgbClr val="1F2A33"/>
                 </a:solidFill>
@@ -13155,7 +13565,7 @@
           </a:fontRef>
         </p:style>
         <p:txBody>
-          <a:bodyPr rtlCol="0" anchor="t" lIns="125999" rIns="125999" tIns="54000" bIns="54000" wrap="square"/>
+          <a:bodyPr wrap="square" lIns="125999" tIns="54000" rIns="125999" bIns="54000" rtlCol="0" anchor="t"/>
           <a:lstStyle/>
           <a:p>
             <a:pPr algn="ctr">
@@ -13164,7 +13574,7 @@
               </a:spcAft>
             </a:pPr>
             <a:r>
-              <a:rPr sz="1200" b="0">
+              <a:rPr lang="pt-BR" sz="1200" b="0" noProof="0" dirty="0">
                 <a:solidFill>
                   <a:srgbClr val="6B7780"/>
                 </a:solidFill>
@@ -13212,7 +13622,7 @@
           </a:fontRef>
         </p:style>
         <p:txBody>
-          <a:bodyPr rtlCol="0" anchor="ctr" lIns="125999" rIns="125999" tIns="54000" bIns="54000" wrap="square"/>
+          <a:bodyPr wrap="square" lIns="125999" tIns="54000" rIns="125999" bIns="54000" rtlCol="0" anchor="ctr"/>
           <a:lstStyle/>
           <a:p>
             <a:pPr algn="l">
@@ -13221,7 +13631,7 @@
               </a:spcAft>
             </a:pPr>
             <a:r>
-              <a:rPr sz="1900" b="1">
+              <a:rPr lang="pt-BR" sz="1900" b="1" noProof="0" dirty="0">
                 <a:solidFill>
                   <a:srgbClr val="3B848E"/>
                 </a:solidFill>
@@ -13237,7 +13647,7 @@
               </a:spcAft>
             </a:pPr>
             <a:r>
-              <a:rPr sz="1700" b="0">
+              <a:rPr lang="pt-BR" sz="1700" b="0" noProof="0" dirty="0">
                 <a:solidFill>
                   <a:srgbClr val="1F2A33"/>
                 </a:solidFill>
@@ -13253,7 +13663,7 @@
               </a:spcAft>
             </a:pPr>
             <a:r>
-              <a:rPr sz="1900" b="1">
+              <a:rPr lang="pt-BR" sz="1900" b="1" noProof="0" dirty="0">
                 <a:solidFill>
                   <a:srgbClr val="3B848E"/>
                 </a:solidFill>
@@ -13269,7 +13679,7 @@
               </a:spcAft>
             </a:pPr>
             <a:r>
-              <a:rPr sz="1700" b="0">
+              <a:rPr lang="pt-BR" sz="1700" b="0" noProof="0" dirty="0">
                 <a:solidFill>
                   <a:srgbClr val="1F2A33"/>
                 </a:solidFill>
@@ -13285,7 +13695,7 @@
               </a:spcAft>
             </a:pPr>
             <a:r>
-              <a:rPr sz="1900" b="1">
+              <a:rPr lang="pt-BR" sz="1900" b="1" noProof="0" dirty="0">
                 <a:solidFill>
                   <a:srgbClr val="3B848E"/>
                 </a:solidFill>
@@ -13301,7 +13711,7 @@
               </a:spcAft>
             </a:pPr>
             <a:r>
-              <a:rPr sz="1700" b="0">
+              <a:rPr lang="pt-BR" sz="1700" b="0" noProof="0" dirty="0">
                 <a:solidFill>
                   <a:srgbClr val="1F2A33"/>
                 </a:solidFill>
@@ -13317,7 +13727,7 @@
               </a:spcAft>
             </a:pPr>
             <a:r>
-              <a:rPr sz="1900" b="1">
+              <a:rPr lang="pt-BR" sz="1900" b="1" noProof="0" dirty="0">
                 <a:solidFill>
                   <a:srgbClr val="3B848E"/>
                 </a:solidFill>
@@ -13333,7 +13743,7 @@
               </a:spcAft>
             </a:pPr>
             <a:r>
-              <a:rPr sz="1700" b="0">
+              <a:rPr lang="pt-BR" sz="1700" b="0" noProof="0" dirty="0">
                 <a:solidFill>
                   <a:srgbClr val="1F2A33"/>
                 </a:solidFill>
@@ -13353,7 +13763,7 @@
 </file>
 
 <file path=ppt/slides/slide3.xml><?xml version="1.0" encoding="utf-8"?>
-<p:sld xmlns:a="http://schemas.openxmlformats.org/drawingml/2006/main" xmlns:p="http://schemas.openxmlformats.org/presentationml/2006/main" xmlns:r="http://schemas.openxmlformats.org/officeDocument/2006/relationships">
+<p:sld xmlns:a="http://schemas.openxmlformats.org/drawingml/2006/main" xmlns:r="http://schemas.openxmlformats.org/officeDocument/2006/relationships" xmlns:p="http://schemas.openxmlformats.org/presentationml/2006/main">
   <p:cSld>
     <p:spTree>
       <p:nvGrpSpPr>
@@ -13361,7 +13771,14 @@
         <p:cNvGrpSpPr/>
         <p:nvPr/>
       </p:nvGrpSpPr>
-      <p:grpSpPr/>
+      <p:grpSpPr>
+        <a:xfrm>
+          <a:off x="0" y="0"/>
+          <a:ext cx="0" cy="0"/>
+          <a:chOff x="0" y="0"/>
+          <a:chExt cx="0" cy="0"/>
+        </a:xfrm>
+      </p:grpSpPr>
       <p:sp>
         <p:nvSpPr>
           <p:cNvPr id="2" name="Rectangle 1"/>
@@ -13397,7 +13814,7 @@
           </a:fontRef>
         </p:style>
         <p:txBody>
-          <a:bodyPr rtlCol="0" anchor="ctr" lIns="125999" rIns="125999" tIns="54000" bIns="54000" wrap="square"/>
+          <a:bodyPr wrap="square" lIns="125999" tIns="54000" rIns="125999" bIns="54000" rtlCol="0" anchor="ctr"/>
           <a:lstStyle/>
           <a:p>
             <a:pPr algn="l">
@@ -13406,7 +13823,7 @@
               </a:spcAft>
             </a:pPr>
             <a:r>
-              <a:rPr sz="2600" b="1">
+              <a:rPr lang="pt-BR" sz="2600" b="1" noProof="0" dirty="0">
                 <a:solidFill>
                   <a:srgbClr val="1F2A33"/>
                 </a:solidFill>
@@ -13454,7 +13871,7 @@
           </a:fontRef>
         </p:style>
         <p:txBody>
-          <a:bodyPr rtlCol="0" anchor="t" lIns="125999" rIns="125999" tIns="54000" bIns="54000" wrap="square"/>
+          <a:bodyPr wrap="square" lIns="125999" tIns="54000" rIns="125999" bIns="54000" rtlCol="0" anchor="t"/>
           <a:lstStyle/>
           <a:p>
             <a:pPr algn="l">
@@ -13463,7 +13880,7 @@
               </a:spcAft>
             </a:pPr>
             <a:r>
-              <a:rPr sz="1900" b="1">
+              <a:rPr lang="pt-BR" sz="1900" b="1" noProof="0" dirty="0">
                 <a:solidFill>
                   <a:srgbClr val="3B848E"/>
                 </a:solidFill>
@@ -13479,19 +13896,7 @@
               </a:spcAft>
             </a:pPr>
             <a:r>
-              <a:rPr sz="2000" b="1">
-                <a:solidFill>
-                  <a:srgbClr val="1F2A33"/>
-                </a:solidFill>
-                <a:highlight>
-                  <a:srgbClr val="FFFF00"/>
-                </a:highlight>
-                <a:latin typeface="Calibri"/>
-              </a:rPr>
-              <a:t>A CONFIRMAR — texto literal da Profa. Amanda. Provisório (relatório): </a:t>
-            </a:r>
-            <a:r>
-              <a:rPr sz="2000" b="0">
+              <a:rPr lang="pt-BR" sz="2000" b="0" noProof="0" dirty="0">
                 <a:solidFill>
                   <a:srgbClr val="1F2A33"/>
                 </a:solidFill>
@@ -13539,7 +13944,7 @@
           </a:fontRef>
         </p:style>
         <p:txBody>
-          <a:bodyPr rtlCol="0" anchor="t" lIns="125999" rIns="125999" tIns="54000" bIns="54000" wrap="square"/>
+          <a:bodyPr wrap="square" lIns="125999" tIns="54000" rIns="125999" bIns="54000" rtlCol="0" anchor="t"/>
           <a:lstStyle/>
           <a:p>
             <a:pPr algn="l">
@@ -13548,7 +13953,7 @@
               </a:spcAft>
             </a:pPr>
             <a:r>
-              <a:rPr sz="1900" b="1">
+              <a:rPr lang="pt-BR" sz="1900" b="1" noProof="0" dirty="0">
                 <a:solidFill>
                   <a:srgbClr val="3B848E"/>
                 </a:solidFill>
@@ -13564,7 +13969,7 @@
               </a:spcAft>
             </a:pPr>
             <a:r>
-              <a:rPr sz="2400" b="1">
+              <a:rPr lang="pt-BR" sz="2400" b="1" noProof="0" dirty="0">
                 <a:solidFill>
                   <a:srgbClr val="1F2A33"/>
                 </a:solidFill>
@@ -13612,7 +14017,7 @@
           </a:fontRef>
         </p:style>
         <p:txBody>
-          <a:bodyPr rtlCol="0" anchor="ctr" lIns="125999" rIns="125999" tIns="54000" bIns="54000" wrap="square"/>
+          <a:bodyPr wrap="square" lIns="125999" tIns="54000" rIns="125999" bIns="54000" rtlCol="0" anchor="ctr"/>
           <a:lstStyle/>
           <a:p>
             <a:pPr algn="ctr">
@@ -13621,7 +14026,7 @@
               </a:spcAft>
             </a:pPr>
             <a:r>
-              <a:rPr sz="1600" b="1">
+              <a:rPr lang="pt-BR" sz="1600" b="1" noProof="0" dirty="0">
                 <a:solidFill>
                   <a:srgbClr val="FFFFFF"/>
                 </a:solidFill>
@@ -13669,7 +14074,7 @@
           </a:fontRef>
         </p:style>
         <p:txBody>
-          <a:bodyPr rtlCol="0" anchor="t" lIns="125999" rIns="125999" tIns="54000" bIns="54000" wrap="square"/>
+          <a:bodyPr wrap="square" lIns="125999" tIns="54000" rIns="125999" bIns="54000" rtlCol="0" anchor="t"/>
           <a:lstStyle/>
           <a:p>
             <a:pPr algn="l">
@@ -13678,7 +14083,7 @@
               </a:spcAft>
             </a:pPr>
             <a:r>
-              <a:rPr sz="1900" b="1">
+              <a:rPr lang="pt-BR" sz="1900" b="1" noProof="0" dirty="0">
                 <a:solidFill>
                   <a:srgbClr val="3B848E"/>
                 </a:solidFill>
@@ -13694,7 +14099,7 @@
               </a:spcAft>
             </a:pPr>
             <a:r>
-              <a:rPr sz="2400" b="1">
+              <a:rPr lang="pt-BR" sz="2400" b="1" noProof="0" dirty="0">
                 <a:solidFill>
                   <a:srgbClr val="1F2A33"/>
                 </a:solidFill>
@@ -13742,7 +14147,7 @@
           </a:fontRef>
         </p:style>
         <p:txBody>
-          <a:bodyPr rtlCol="0" anchor="ctr" lIns="125999" rIns="125999" tIns="54000" bIns="54000" wrap="square"/>
+          <a:bodyPr wrap="square" lIns="125999" tIns="54000" rIns="125999" bIns="54000" rtlCol="0" anchor="ctr"/>
           <a:lstStyle/>
           <a:p>
             <a:pPr algn="ctr">
@@ -13751,7 +14156,7 @@
               </a:spcAft>
             </a:pPr>
             <a:r>
-              <a:rPr sz="1600" b="1">
+              <a:rPr lang="pt-BR" sz="1600" b="1" noProof="0" dirty="0">
                 <a:solidFill>
                   <a:srgbClr val="FFFFFF"/>
                 </a:solidFill>
@@ -13799,7 +14204,7 @@
           </a:fontRef>
         </p:style>
         <p:txBody>
-          <a:bodyPr rtlCol="0" anchor="ctr" lIns="125999" rIns="125999" tIns="54000" bIns="54000" wrap="square"/>
+          <a:bodyPr wrap="square" lIns="125999" tIns="54000" rIns="125999" bIns="54000" rtlCol="0" anchor="ctr"/>
           <a:lstStyle/>
           <a:p>
             <a:pPr algn="ctr">
@@ -13808,7 +14213,7 @@
               </a:spcAft>
             </a:pPr>
             <a:r>
-              <a:rPr sz="2100" b="1">
+              <a:rPr lang="pt-BR" sz="2100" b="1" noProof="0" dirty="0">
                 <a:solidFill>
                   <a:srgbClr val="3B848E"/>
                 </a:solidFill>
@@ -13817,13 +14222,31 @@
               <a:t>Hoje: </a:t>
             </a:r>
             <a:r>
-              <a:rPr sz="2100" b="0">
+              <a:rPr lang="pt-BR" sz="2100" b="0" noProof="0" dirty="0">
                 <a:solidFill>
                   <a:srgbClr val="1F2A33"/>
                 </a:solidFill>
                 <a:latin typeface="Calibri"/>
               </a:rPr>
-              <a:t>a etapa que vem antes do índice — o que o Censo 2022 me obrigou a decidir, e como cada decisão muda o resultado</a:t>
+              <a:t>a etapa que vem antes do índice — o que o Censo 2022 me </a:t>
+            </a:r>
+            <a:r>
+              <a:rPr lang="pt-BR" sz="2100" noProof="0" dirty="0">
+                <a:solidFill>
+                  <a:srgbClr val="1F2A33"/>
+                </a:solidFill>
+                <a:latin typeface="Calibri"/>
+              </a:rPr>
+              <a:t>fez</a:t>
+            </a:r>
+            <a:r>
+              <a:rPr lang="pt-BR" sz="2100" b="0" noProof="0" dirty="0">
+                <a:solidFill>
+                  <a:srgbClr val="1F2A33"/>
+                </a:solidFill>
+                <a:latin typeface="Calibri"/>
+              </a:rPr>
+              <a:t> a decidir, e como cada decisão muda o resultado</a:t>
             </a:r>
           </a:p>
         </p:txBody>
@@ -13837,7 +14260,7 @@
 </file>
 
 <file path=ppt/slides/slide4.xml><?xml version="1.0" encoding="utf-8"?>
-<p:sld xmlns:a="http://schemas.openxmlformats.org/drawingml/2006/main" xmlns:p="http://schemas.openxmlformats.org/presentationml/2006/main" xmlns:r="http://schemas.openxmlformats.org/officeDocument/2006/relationships">
+<p:sld xmlns:a="http://schemas.openxmlformats.org/drawingml/2006/main" xmlns:r="http://schemas.openxmlformats.org/officeDocument/2006/relationships" xmlns:p="http://schemas.openxmlformats.org/presentationml/2006/main">
   <p:cSld>
     <p:spTree>
       <p:nvGrpSpPr>
@@ -13845,7 +14268,14 @@
         <p:cNvGrpSpPr/>
         <p:nvPr/>
       </p:nvGrpSpPr>
-      <p:grpSpPr/>
+      <p:grpSpPr>
+        <a:xfrm>
+          <a:off x="0" y="0"/>
+          <a:ext cx="0" cy="0"/>
+          <a:chOff x="0" y="0"/>
+          <a:chExt cx="0" cy="0"/>
+        </a:xfrm>
+      </p:grpSpPr>
       <p:sp>
         <p:nvSpPr>
           <p:cNvPr id="2" name="Rectangle 1"/>
@@ -13881,7 +14311,7 @@
           </a:fontRef>
         </p:style>
         <p:txBody>
-          <a:bodyPr rtlCol="0" anchor="t" lIns="125999" rIns="125999" tIns="54000" bIns="54000" wrap="square"/>
+          <a:bodyPr wrap="square" lIns="125999" tIns="54000" rIns="125999" bIns="54000" rtlCol="0" anchor="t"/>
           <a:lstStyle/>
           <a:p>
             <a:pPr algn="l">
@@ -13890,7 +14320,7 @@
               </a:spcAft>
             </a:pPr>
             <a:r>
-              <a:rPr sz="1300" b="1">
+              <a:rPr lang="pt-BR" sz="1300" b="1" noProof="0" dirty="0">
                 <a:solidFill>
                   <a:srgbClr val="3B848E"/>
                 </a:solidFill>
@@ -13936,7 +14366,7 @@
           </a:fontRef>
         </p:style>
         <p:txBody>
-          <a:bodyPr rtlCol="0" anchor="ctr" lIns="125999" rIns="125999" tIns="54000" bIns="54000" wrap="square"/>
+          <a:bodyPr wrap="square" lIns="125999" tIns="54000" rIns="125999" bIns="54000" rtlCol="0" anchor="ctr"/>
           <a:lstStyle/>
           <a:p>
             <a:pPr algn="l">
@@ -13945,7 +14375,7 @@
               </a:spcAft>
             </a:pPr>
             <a:r>
-              <a:rPr sz="2600" b="1">
+              <a:rPr lang="pt-BR" sz="2600" b="1" noProof="0" dirty="0">
                 <a:solidFill>
                   <a:srgbClr val="1F2A33"/>
                 </a:solidFill>
@@ -13993,7 +14423,7 @@
           </a:fontRef>
         </p:style>
         <p:txBody>
-          <a:bodyPr rtlCol="0" anchor="ctr" lIns="125999" rIns="125999" tIns="54000" bIns="54000" wrap="square"/>
+          <a:bodyPr wrap="square" lIns="125999" tIns="54000" rIns="125999" bIns="54000" rtlCol="0" anchor="ctr"/>
           <a:lstStyle/>
           <a:p>
             <a:pPr algn="ctr">
@@ -14002,7 +14432,7 @@
               </a:spcAft>
             </a:pPr>
             <a:r>
-              <a:rPr sz="2000" b="1">
+              <a:rPr lang="pt-BR" sz="2000" b="1" noProof="0" dirty="0">
                 <a:solidFill>
                   <a:srgbClr val="FFFFFF"/>
                 </a:solidFill>
@@ -14050,7 +14480,7 @@
           </a:fontRef>
         </p:style>
         <p:txBody>
-          <a:bodyPr rtlCol="0" anchor="t" lIns="125999" rIns="125999" tIns="54000" bIns="54000" wrap="square"/>
+          <a:bodyPr wrap="square" lIns="125999" tIns="54000" rIns="125999" bIns="54000" rtlCol="0" anchor="t"/>
           <a:lstStyle/>
           <a:p>
             <a:pPr algn="l">
@@ -14059,7 +14489,7 @@
               </a:spcAft>
             </a:pPr>
             <a:r>
-              <a:rPr sz="2000" b="0">
+              <a:rPr lang="pt-BR" sz="2000" b="0" noProof="0" dirty="0">
                 <a:solidFill>
                   <a:srgbClr val="1F2A33"/>
                 </a:solidFill>
@@ -14075,7 +14505,7 @@
               </a:spcAft>
             </a:pPr>
             <a:r>
-              <a:rPr sz="2000" b="0">
+              <a:rPr lang="pt-BR" sz="2000" b="0" noProof="0" dirty="0">
                 <a:solidFill>
                   <a:srgbClr val="1F2A33"/>
                 </a:solidFill>
@@ -14091,7 +14521,7 @@
               </a:spcAft>
             </a:pPr>
             <a:r>
-              <a:rPr sz="2000" b="0">
+              <a:rPr lang="pt-BR" sz="2000" b="0" noProof="0" dirty="0">
                 <a:solidFill>
                   <a:srgbClr val="1F2A33"/>
                 </a:solidFill>
@@ -14139,7 +14569,7 @@
           </a:fontRef>
         </p:style>
         <p:txBody>
-          <a:bodyPr rtlCol="0" anchor="ctr" lIns="125999" rIns="125999" tIns="54000" bIns="54000" wrap="square"/>
+          <a:bodyPr wrap="square" lIns="125999" tIns="54000" rIns="125999" bIns="54000" rtlCol="0" anchor="ctr"/>
           <a:lstStyle/>
           <a:p>
             <a:pPr algn="ctr">
@@ -14148,7 +14578,7 @@
               </a:spcAft>
             </a:pPr>
             <a:r>
-              <a:rPr sz="2000" b="1">
+              <a:rPr lang="pt-BR" sz="2000" b="1" noProof="0" dirty="0">
                 <a:solidFill>
                   <a:srgbClr val="FFFFFF"/>
                 </a:solidFill>
@@ -14196,7 +14626,7 @@
           </a:fontRef>
         </p:style>
         <p:txBody>
-          <a:bodyPr rtlCol="0" anchor="t" lIns="125999" rIns="125999" tIns="54000" bIns="54000" wrap="square"/>
+          <a:bodyPr wrap="square" lIns="125999" tIns="54000" rIns="125999" bIns="54000" rtlCol="0" anchor="t"/>
           <a:lstStyle/>
           <a:p>
             <a:pPr algn="l">
@@ -14205,7 +14635,7 @@
               </a:spcAft>
             </a:pPr>
             <a:r>
-              <a:rPr sz="2000" b="0">
+              <a:rPr lang="pt-BR" sz="2000" b="0" noProof="0" dirty="0">
                 <a:solidFill>
                   <a:srgbClr val="1F2A33"/>
                 </a:solidFill>
@@ -14221,7 +14651,7 @@
               </a:spcAft>
             </a:pPr>
             <a:r>
-              <a:rPr sz="2000" b="0">
+              <a:rPr lang="pt-BR" sz="2000" b="0" noProof="0" dirty="0">
                 <a:solidFill>
                   <a:srgbClr val="1F2A33"/>
                 </a:solidFill>
@@ -14237,7 +14667,7 @@
               </a:spcAft>
             </a:pPr>
             <a:r>
-              <a:rPr sz="2000" b="0">
+              <a:rPr lang="pt-BR" sz="2000" b="0" noProof="0" dirty="0">
                 <a:solidFill>
                   <a:srgbClr val="1F2A33"/>
                 </a:solidFill>
@@ -14253,7 +14683,7 @@
               </a:spcAft>
             </a:pPr>
             <a:r>
-              <a:rPr sz="2000" b="0">
+              <a:rPr lang="pt-BR" sz="2000" b="0" noProof="0" dirty="0">
                 <a:solidFill>
                   <a:srgbClr val="1F2A33"/>
                 </a:solidFill>
@@ -14299,7 +14729,7 @@
           </a:fontRef>
         </p:style>
         <p:txBody>
-          <a:bodyPr rtlCol="0" anchor="t" lIns="125999" rIns="125999" tIns="54000" bIns="54000" wrap="square"/>
+          <a:bodyPr wrap="square" lIns="125999" tIns="54000" rIns="125999" bIns="54000" rtlCol="0" anchor="t"/>
           <a:lstStyle/>
           <a:p>
             <a:pPr algn="l">
@@ -14308,7 +14738,7 @@
               </a:spcAft>
             </a:pPr>
             <a:r>
-              <a:rPr sz="1600" b="0">
+              <a:rPr lang="pt-BR" sz="1600" b="0" noProof="0" dirty="0">
                 <a:solidFill>
                   <a:srgbClr val="6B7780"/>
                 </a:solidFill>
@@ -14356,7 +14786,7 @@
           </a:fontRef>
         </p:style>
         <p:txBody>
-          <a:bodyPr rtlCol="0" anchor="ctr" lIns="125999" rIns="125999" tIns="54000" bIns="54000" wrap="square"/>
+          <a:bodyPr wrap="square" lIns="125999" tIns="54000" rIns="125999" bIns="54000" rtlCol="0" anchor="ctr"/>
           <a:lstStyle/>
           <a:p>
             <a:pPr algn="ctr">
@@ -14365,7 +14795,7 @@
               </a:spcAft>
             </a:pPr>
             <a:r>
-              <a:rPr sz="2200" b="1">
+              <a:rPr lang="pt-BR" sz="2200" b="1" noProof="0" dirty="0">
                 <a:solidFill>
                   <a:srgbClr val="1F2A33"/>
                 </a:solidFill>
@@ -14381,7 +14811,7 @@
               </a:spcAft>
             </a:pPr>
             <a:r>
-              <a:rPr sz="1700" b="0">
+              <a:rPr lang="pt-BR" sz="1700" b="0" noProof="0" dirty="0">
                 <a:solidFill>
                   <a:srgbClr val="1F2A33"/>
                 </a:solidFill>
@@ -14427,7 +14857,7 @@
           </a:fontRef>
         </p:style>
         <p:txBody>
-          <a:bodyPr rtlCol="0" anchor="ctr" lIns="125999" rIns="125999" tIns="54000" bIns="54000" wrap="square"/>
+          <a:bodyPr wrap="square" lIns="125999" tIns="54000" rIns="125999" bIns="54000" rtlCol="0" anchor="ctr"/>
           <a:lstStyle/>
           <a:p>
             <a:pPr algn="ctr">
@@ -14436,7 +14866,7 @@
               </a:spcAft>
             </a:pPr>
             <a:r>
-              <a:rPr sz="1600" b="0">
+              <a:rPr lang="pt-BR" sz="1600" b="0" noProof="0" dirty="0">
                 <a:solidFill>
                   <a:srgbClr val="6B7780"/>
                 </a:solidFill>
@@ -14484,7 +14914,7 @@
           </a:fontRef>
         </p:style>
         <p:txBody>
-          <a:bodyPr rtlCol="0" anchor="ctr" lIns="125999" rIns="125999" tIns="54000" bIns="54000" wrap="square"/>
+          <a:bodyPr wrap="square" lIns="125999" tIns="54000" rIns="125999" bIns="54000" rtlCol="0" anchor="ctr"/>
           <a:lstStyle/>
           <a:p>
             <a:pPr algn="ctr">
@@ -14493,7 +14923,7 @@
               </a:spcAft>
             </a:pPr>
             <a:r>
-              <a:rPr sz="2200" b="1">
+              <a:rPr lang="pt-BR" sz="2200" b="1" noProof="0" dirty="0">
                 <a:solidFill>
                   <a:srgbClr val="1F2A33"/>
                 </a:solidFill>
@@ -14539,7 +14969,7 @@
           </a:fontRef>
         </p:style>
         <p:txBody>
-          <a:bodyPr rtlCol="0" anchor="ctr" lIns="125999" rIns="125999" tIns="54000" bIns="54000" wrap="square"/>
+          <a:bodyPr wrap="square" lIns="125999" tIns="54000" rIns="125999" bIns="54000" rtlCol="0" anchor="ctr"/>
           <a:lstStyle/>
           <a:p>
             <a:pPr algn="ctr">
@@ -14548,7 +14978,7 @@
               </a:spcAft>
             </a:pPr>
             <a:r>
-              <a:rPr sz="1600" b="0">
+              <a:rPr lang="pt-BR" sz="1600" b="0" noProof="0" dirty="0">
                 <a:solidFill>
                   <a:srgbClr val="6B7780"/>
                 </a:solidFill>
@@ -14596,7 +15026,7 @@
           </a:fontRef>
         </p:style>
         <p:txBody>
-          <a:bodyPr rtlCol="0" anchor="ctr" lIns="125999" rIns="125999" tIns="54000" bIns="54000" wrap="square"/>
+          <a:bodyPr wrap="square" lIns="125999" tIns="54000" rIns="125999" bIns="54000" rtlCol="0" anchor="ctr"/>
           <a:lstStyle/>
           <a:p>
             <a:pPr algn="ctr">
@@ -14605,7 +15035,7 @@
               </a:spcAft>
             </a:pPr>
             <a:r>
-              <a:rPr sz="2200" b="1">
+              <a:rPr lang="pt-BR" sz="2200" b="1" noProof="0" dirty="0">
                 <a:solidFill>
                   <a:srgbClr val="FFFFFF"/>
                 </a:solidFill>
@@ -14621,7 +15051,7 @@
               </a:spcAft>
             </a:pPr>
             <a:r>
-              <a:rPr sz="1700" b="0">
+              <a:rPr lang="pt-BR" sz="1700" b="0" noProof="0" dirty="0">
                 <a:solidFill>
                   <a:srgbClr val="FFFFFF"/>
                 </a:solidFill>
@@ -14667,7 +15097,7 @@
           </a:fontRef>
         </p:style>
         <p:txBody>
-          <a:bodyPr rtlCol="0" anchor="t" lIns="125999" rIns="125999" tIns="54000" bIns="54000" wrap="square"/>
+          <a:bodyPr wrap="square" lIns="125999" tIns="54000" rIns="125999" bIns="54000" rtlCol="0" anchor="t"/>
           <a:lstStyle/>
           <a:p>
             <a:pPr algn="ctr">
@@ -14676,7 +15106,7 @@
               </a:spcAft>
             </a:pPr>
             <a:r>
-              <a:rPr sz="1600" b="1">
+              <a:rPr lang="pt-BR" sz="1600" b="1" noProof="0" dirty="0">
                 <a:solidFill>
                   <a:srgbClr val="D8634E"/>
                 </a:solidFill>
@@ -14722,7 +15152,7 @@
           </a:fontRef>
         </p:style>
         <p:txBody>
-          <a:bodyPr rtlCol="0" anchor="t" lIns="125999" rIns="125999" tIns="54000" bIns="54000" wrap="square"/>
+          <a:bodyPr wrap="square" lIns="125999" tIns="54000" rIns="125999" bIns="54000" rtlCol="0" anchor="t"/>
           <a:lstStyle/>
           <a:p>
             <a:pPr algn="l">
@@ -14731,7 +15161,7 @@
               </a:spcAft>
             </a:pPr>
             <a:r>
-              <a:rPr sz="1100" b="0">
+              <a:rPr lang="pt-BR" sz="1100" b="0" noProof="0" dirty="0">
                 <a:solidFill>
                   <a:srgbClr val="6B7780"/>
                 </a:solidFill>
@@ -14751,7 +15181,7 @@
 </file>
 
 <file path=ppt/slides/slide5.xml><?xml version="1.0" encoding="utf-8"?>
-<p:sld xmlns:a="http://schemas.openxmlformats.org/drawingml/2006/main" xmlns:p="http://schemas.openxmlformats.org/presentationml/2006/main" xmlns:r="http://schemas.openxmlformats.org/officeDocument/2006/relationships">
+<p:sld xmlns:a="http://schemas.openxmlformats.org/drawingml/2006/main" xmlns:r="http://schemas.openxmlformats.org/officeDocument/2006/relationships" xmlns:p="http://schemas.openxmlformats.org/presentationml/2006/main">
   <p:cSld>
     <p:spTree>
       <p:nvGrpSpPr>
@@ -14759,7 +15189,14 @@
         <p:cNvGrpSpPr/>
         <p:nvPr/>
       </p:nvGrpSpPr>
-      <p:grpSpPr/>
+      <p:grpSpPr>
+        <a:xfrm>
+          <a:off x="0" y="0"/>
+          <a:ext cx="0" cy="0"/>
+          <a:chOff x="0" y="0"/>
+          <a:chExt cx="0" cy="0"/>
+        </a:xfrm>
+      </p:grpSpPr>
       <p:sp>
         <p:nvSpPr>
           <p:cNvPr id="2" name="Rectangle 1"/>
@@ -14795,7 +15232,7 @@
           </a:fontRef>
         </p:style>
         <p:txBody>
-          <a:bodyPr rtlCol="0" anchor="t" lIns="125999" rIns="125999" tIns="54000" bIns="54000" wrap="square"/>
+          <a:bodyPr wrap="square" lIns="125999" tIns="54000" rIns="125999" bIns="54000" rtlCol="0" anchor="t"/>
           <a:lstStyle/>
           <a:p>
             <a:pPr algn="l">
@@ -14804,7 +15241,7 @@
               </a:spcAft>
             </a:pPr>
             <a:r>
-              <a:rPr sz="1300" b="1">
+              <a:rPr lang="pt-BR" sz="1300" b="1" noProof="0" dirty="0">
                 <a:solidFill>
                   <a:srgbClr val="3B848E"/>
                 </a:solidFill>
@@ -14850,7 +15287,7 @@
           </a:fontRef>
         </p:style>
         <p:txBody>
-          <a:bodyPr rtlCol="0" anchor="ctr" lIns="125999" rIns="125999" tIns="54000" bIns="54000" wrap="square"/>
+          <a:bodyPr wrap="square" lIns="125999" tIns="54000" rIns="125999" bIns="54000" rtlCol="0" anchor="ctr"/>
           <a:lstStyle/>
           <a:p>
             <a:pPr algn="l">
@@ -14859,7 +15296,7 @@
               </a:spcAft>
             </a:pPr>
             <a:r>
-              <a:rPr sz="2600" b="1">
+              <a:rPr lang="pt-BR" sz="2600" b="1" noProof="0" dirty="0">
                 <a:solidFill>
                   <a:srgbClr val="1F2A33"/>
                 </a:solidFill>
@@ -14907,7 +15344,7 @@
           </a:fontRef>
         </p:style>
         <p:txBody>
-          <a:bodyPr rtlCol="0" anchor="ctr" lIns="125999" rIns="125999" tIns="54000" bIns="54000" wrap="square"/>
+          <a:bodyPr wrap="square" lIns="125999" tIns="54000" rIns="125999" bIns="54000" rtlCol="0" anchor="ctr"/>
           <a:lstStyle/>
           <a:p>
             <a:pPr algn="ctr">
@@ -14916,7 +15353,7 @@
               </a:spcAft>
             </a:pPr>
             <a:r>
-              <a:rPr sz="4800" b="1">
+              <a:rPr lang="pt-BR" sz="4800" b="1" noProof="0" dirty="0">
                 <a:solidFill>
                   <a:srgbClr val="3B848E"/>
                 </a:solidFill>
@@ -14932,7 +15369,7 @@
               </a:spcAft>
             </a:pPr>
             <a:r>
-              <a:rPr sz="2000" b="0">
+              <a:rPr lang="pt-BR" sz="2000" b="0" noProof="0" dirty="0">
                 <a:solidFill>
                   <a:srgbClr val="1F2A33"/>
                 </a:solidFill>
@@ -14980,7 +15417,7 @@
           </a:fontRef>
         </p:style>
         <p:txBody>
-          <a:bodyPr rtlCol="0" anchor="ctr" lIns="125999" rIns="125999" tIns="54000" bIns="54000" wrap="square"/>
+          <a:bodyPr wrap="square" lIns="125999" tIns="54000" rIns="125999" bIns="54000" rtlCol="0" anchor="ctr"/>
           <a:lstStyle/>
           <a:p>
             <a:pPr algn="ctr">
@@ -14989,7 +15426,7 @@
               </a:spcAft>
             </a:pPr>
             <a:r>
-              <a:rPr sz="4800" b="1">
+              <a:rPr lang="pt-BR" sz="4800" b="1" noProof="0" dirty="0">
                 <a:solidFill>
                   <a:srgbClr val="3B848E"/>
                 </a:solidFill>
@@ -15005,7 +15442,7 @@
               </a:spcAft>
             </a:pPr>
             <a:r>
-              <a:rPr sz="2000" b="0">
+              <a:rPr lang="pt-BR" sz="2000" b="0" noProof="0" dirty="0">
                 <a:solidFill>
                   <a:srgbClr val="1F2A33"/>
                 </a:solidFill>
@@ -15053,7 +15490,7 @@
           </a:fontRef>
         </p:style>
         <p:txBody>
-          <a:bodyPr rtlCol="0" anchor="t" lIns="125999" rIns="125999" tIns="54000" bIns="54000" wrap="square"/>
+          <a:bodyPr wrap="square" lIns="125999" tIns="54000" rIns="125999" bIns="54000" rtlCol="0" anchor="t"/>
           <a:lstStyle/>
           <a:p>
             <a:pPr algn="l">
@@ -15062,7 +15499,7 @@
               </a:spcAft>
             </a:pPr>
             <a:r>
-              <a:rPr sz="2000" b="1">
+              <a:rPr lang="pt-BR" sz="2000" b="1" noProof="0" dirty="0">
                 <a:solidFill>
                   <a:srgbClr val="D8634E"/>
                 </a:solidFill>
@@ -15078,7 +15515,7 @@
               </a:spcAft>
             </a:pPr>
             <a:r>
-              <a:rPr sz="2000" b="0">
+              <a:rPr lang="pt-BR" sz="2000" b="0" noProof="0" dirty="0">
                 <a:solidFill>
                   <a:srgbClr val="1F2A33"/>
                 </a:solidFill>
@@ -15087,16 +15524,25 @@
               <a:t>Um setor de favela em Belo Horizonte com renda média de </a:t>
             </a:r>
             <a:r>
-              <a:rPr sz="2000" b="1">
+              <a:rPr lang="pt-BR" sz="2000" b="1" noProof="0" dirty="0" err="1">
                 <a:solidFill>
                   <a:srgbClr val="1F2A33"/>
                 </a:solidFill>
                 <a:latin typeface="Calibri"/>
               </a:rPr>
-              <a:t>R$ 170.418,06</a:t>
-            </a:r>
-            <a:r>
-              <a:rPr sz="2000" b="0">
+              <a:t>R</a:t>
+            </a:r>
+            <a:r>
+              <a:rPr lang="pt-BR" sz="2000" b="1" noProof="0" dirty="0">
+                <a:solidFill>
+                  <a:srgbClr val="1F2A33"/>
+                </a:solidFill>
+                <a:latin typeface="Calibri"/>
+              </a:rPr>
+              <a:t>$ 170.418,06</a:t>
+            </a:r>
+            <a:r>
+              <a:rPr lang="pt-BR" sz="2000" b="0" noProof="0" dirty="0">
                 <a:solidFill>
                   <a:srgbClr val="1F2A33"/>
                 </a:solidFill>
@@ -15142,7 +15588,7 @@
           </a:fontRef>
         </p:style>
         <p:txBody>
-          <a:bodyPr rtlCol="0" anchor="t" lIns="125999" rIns="125999" tIns="54000" bIns="54000" wrap="square"/>
+          <a:bodyPr wrap="square" lIns="125999" tIns="54000" rIns="125999" bIns="54000" rtlCol="0" anchor="t"/>
           <a:lstStyle/>
           <a:p>
             <a:pPr algn="l">
@@ -15151,7 +15597,7 @@
               </a:spcAft>
             </a:pPr>
             <a:r>
-              <a:rPr sz="1500" b="0">
+              <a:rPr lang="pt-BR" sz="1500" b="0" noProof="0" dirty="0">
                 <a:solidFill>
                   <a:srgbClr val="6B7780"/>
                 </a:solidFill>
@@ -15197,7 +15643,7 @@
           </a:fontRef>
         </p:style>
         <p:txBody>
-          <a:bodyPr rtlCol="0" anchor="t" lIns="125999" rIns="125999" tIns="54000" bIns="54000" wrap="square"/>
+          <a:bodyPr wrap="square" lIns="125999" tIns="54000" rIns="125999" bIns="54000" rtlCol="0" anchor="t"/>
           <a:lstStyle/>
           <a:p>
             <a:pPr algn="l">
@@ -15206,7 +15652,7 @@
               </a:spcAft>
             </a:pPr>
             <a:r>
-              <a:rPr sz="1100" b="0">
+              <a:rPr lang="pt-BR" sz="1100" b="0" noProof="0" dirty="0">
                 <a:solidFill>
                   <a:srgbClr val="6B7780"/>
                 </a:solidFill>
@@ -15226,7 +15672,7 @@
 </file>
 
 <file path=ppt/slides/slide6.xml><?xml version="1.0" encoding="utf-8"?>
-<p:sld xmlns:a="http://schemas.openxmlformats.org/drawingml/2006/main" xmlns:p="http://schemas.openxmlformats.org/presentationml/2006/main" xmlns:r="http://schemas.openxmlformats.org/officeDocument/2006/relationships">
+<p:sld xmlns:a="http://schemas.openxmlformats.org/drawingml/2006/main" xmlns:r="http://schemas.openxmlformats.org/officeDocument/2006/relationships" xmlns:p="http://schemas.openxmlformats.org/presentationml/2006/main">
   <p:cSld>
     <p:spTree>
       <p:nvGrpSpPr>
@@ -15234,7 +15680,14 @@
         <p:cNvGrpSpPr/>
         <p:nvPr/>
       </p:nvGrpSpPr>
-      <p:grpSpPr/>
+      <p:grpSpPr>
+        <a:xfrm>
+          <a:off x="0" y="0"/>
+          <a:ext cx="0" cy="0"/>
+          <a:chOff x="0" y="0"/>
+          <a:chExt cx="0" cy="0"/>
+        </a:xfrm>
+      </p:grpSpPr>
       <p:sp>
         <p:nvSpPr>
           <p:cNvPr id="2" name="Rectangle 1"/>
@@ -15270,7 +15723,7 @@
           </a:fontRef>
         </p:style>
         <p:txBody>
-          <a:bodyPr rtlCol="0" anchor="t" lIns="125999" rIns="125999" tIns="54000" bIns="54000" wrap="square"/>
+          <a:bodyPr wrap="square" lIns="125999" tIns="54000" rIns="125999" bIns="54000" rtlCol="0" anchor="t"/>
           <a:lstStyle/>
           <a:p>
             <a:pPr algn="l">
@@ -15279,7 +15732,7 @@
               </a:spcAft>
             </a:pPr>
             <a:r>
-              <a:rPr sz="1300" b="1">
+              <a:rPr lang="pt-BR" sz="1300" b="1" noProof="0" dirty="0">
                 <a:solidFill>
                   <a:srgbClr val="3B848E"/>
                 </a:solidFill>
@@ -15325,7 +15778,7 @@
           </a:fontRef>
         </p:style>
         <p:txBody>
-          <a:bodyPr rtlCol="0" anchor="ctr" lIns="125999" rIns="125999" tIns="54000" bIns="54000" wrap="square"/>
+          <a:bodyPr wrap="square" lIns="125999" tIns="54000" rIns="125999" bIns="54000" rtlCol="0" anchor="ctr"/>
           <a:lstStyle/>
           <a:p>
             <a:pPr algn="l">
@@ -15334,7 +15787,7 @@
               </a:spcAft>
             </a:pPr>
             <a:r>
-              <a:rPr sz="2600" b="1">
+              <a:rPr lang="pt-BR" sz="2600" b="1" noProof="0" dirty="0">
                 <a:solidFill>
                   <a:srgbClr val="1F2A33"/>
                 </a:solidFill>
@@ -15404,7 +15857,7 @@
           </a:fontRef>
         </p:style>
         <p:txBody>
-          <a:bodyPr rtlCol="0" anchor="t" lIns="125999" rIns="125999" tIns="54000" bIns="54000" wrap="square"/>
+          <a:bodyPr wrap="square" lIns="125999" tIns="54000" rIns="125999" bIns="54000" rtlCol="0" anchor="t"/>
           <a:lstStyle/>
           <a:p>
             <a:pPr algn="l">
@@ -15413,7 +15866,7 @@
               </a:spcAft>
             </a:pPr>
             <a:r>
-              <a:rPr sz="1400" b="0">
+              <a:rPr lang="pt-BR" sz="1400" b="0" noProof="0" dirty="0">
                 <a:solidFill>
                   <a:srgbClr val="6B7780"/>
                 </a:solidFill>
@@ -15461,7 +15914,7 @@
           </a:fontRef>
         </p:style>
         <p:txBody>
-          <a:bodyPr rtlCol="0" anchor="t" lIns="125999" rIns="125999" tIns="54000" bIns="54000" wrap="square"/>
+          <a:bodyPr wrap="square" lIns="125999" tIns="54000" rIns="125999" bIns="54000" rtlCol="0" anchor="t"/>
           <a:lstStyle/>
           <a:p>
             <a:pPr algn="l">
@@ -15470,7 +15923,7 @@
               </a:spcAft>
             </a:pPr>
             <a:r>
-              <a:rPr sz="1900" b="1">
+              <a:rPr lang="pt-BR" sz="1900" b="1" noProof="0" dirty="0">
                 <a:solidFill>
                   <a:srgbClr val="3B848E"/>
                 </a:solidFill>
@@ -15486,7 +15939,7 @@
               </a:spcAft>
             </a:pPr>
             <a:r>
-              <a:rPr sz="2400" b="1">
+              <a:rPr lang="pt-BR" sz="2400" b="1" noProof="0" dirty="0">
                 <a:solidFill>
                   <a:srgbClr val="1F2A33"/>
                 </a:solidFill>
@@ -15502,7 +15955,7 @@
               </a:spcAft>
             </a:pPr>
             <a:r>
-              <a:rPr sz="1700" b="0">
+              <a:rPr lang="pt-BR" sz="1700" b="0" noProof="0" dirty="0">
                 <a:solidFill>
                   <a:srgbClr val="6B7780"/>
                 </a:solidFill>
@@ -15550,7 +16003,7 @@
           </a:fontRef>
         </p:style>
         <p:txBody>
-          <a:bodyPr rtlCol="0" anchor="t" lIns="125999" rIns="125999" tIns="54000" bIns="54000" wrap="square"/>
+          <a:bodyPr wrap="square" lIns="125999" tIns="54000" rIns="125999" bIns="54000" rtlCol="0" anchor="t"/>
           <a:lstStyle/>
           <a:p>
             <a:pPr algn="l">
@@ -15559,7 +16012,7 @@
               </a:spcAft>
             </a:pPr>
             <a:r>
-              <a:rPr sz="1900" b="1">
+              <a:rPr lang="pt-BR" sz="1900" b="1" noProof="0" dirty="0">
                 <a:solidFill>
                   <a:srgbClr val="D8634E"/>
                 </a:solidFill>
@@ -15575,7 +16028,7 @@
               </a:spcAft>
             </a:pPr>
             <a:r>
-              <a:rPr sz="1800" b="0">
+              <a:rPr lang="pt-BR" sz="1800" b="0" noProof="0" dirty="0">
                 <a:solidFill>
                   <a:srgbClr val="1F2A33"/>
                 </a:solidFill>
@@ -15621,7 +16074,7 @@
           </a:fontRef>
         </p:style>
         <p:txBody>
-          <a:bodyPr rtlCol="0" anchor="t" lIns="125999" rIns="125999" tIns="54000" bIns="54000" wrap="square"/>
+          <a:bodyPr wrap="square" lIns="125999" tIns="54000" rIns="125999" bIns="54000" rtlCol="0" anchor="t"/>
           <a:lstStyle/>
           <a:p>
             <a:pPr algn="l">
@@ -15630,7 +16083,7 @@
               </a:spcAft>
             </a:pPr>
             <a:r>
-              <a:rPr sz="1100" b="0">
+              <a:rPr lang="pt-BR" sz="1100" b="0" noProof="0" dirty="0">
                 <a:solidFill>
                   <a:srgbClr val="6B7780"/>
                 </a:solidFill>
@@ -15650,7 +16103,7 @@
 </file>
 
 <file path=ppt/slides/slide7.xml><?xml version="1.0" encoding="utf-8"?>
-<p:sld xmlns:a="http://schemas.openxmlformats.org/drawingml/2006/main" xmlns:p="http://schemas.openxmlformats.org/presentationml/2006/main" xmlns:r="http://schemas.openxmlformats.org/officeDocument/2006/relationships">
+<p:sld xmlns:a="http://schemas.openxmlformats.org/drawingml/2006/main" xmlns:r="http://schemas.openxmlformats.org/officeDocument/2006/relationships" xmlns:p="http://schemas.openxmlformats.org/presentationml/2006/main">
   <p:cSld>
     <p:spTree>
       <p:nvGrpSpPr>
@@ -15658,7 +16111,14 @@
         <p:cNvGrpSpPr/>
         <p:nvPr/>
       </p:nvGrpSpPr>
-      <p:grpSpPr/>
+      <p:grpSpPr>
+        <a:xfrm>
+          <a:off x="0" y="0"/>
+          <a:ext cx="0" cy="0"/>
+          <a:chOff x="0" y="0"/>
+          <a:chExt cx="0" cy="0"/>
+        </a:xfrm>
+      </p:grpSpPr>
       <p:sp>
         <p:nvSpPr>
           <p:cNvPr id="2" name="Rectangle 1"/>
@@ -15694,7 +16154,7 @@
           </a:fontRef>
         </p:style>
         <p:txBody>
-          <a:bodyPr rtlCol="0" anchor="t" lIns="125999" rIns="125999" tIns="54000" bIns="54000" wrap="square"/>
+          <a:bodyPr wrap="square" lIns="125999" tIns="54000" rIns="125999" bIns="54000" rtlCol="0" anchor="t"/>
           <a:lstStyle/>
           <a:p>
             <a:pPr algn="l">
@@ -15703,7 +16163,7 @@
               </a:spcAft>
             </a:pPr>
             <a:r>
-              <a:rPr sz="1300" b="1">
+              <a:rPr lang="pt-BR" sz="1300" b="1" noProof="0" dirty="0">
                 <a:solidFill>
                   <a:srgbClr val="3B848E"/>
                 </a:solidFill>
@@ -15749,7 +16209,7 @@
           </a:fontRef>
         </p:style>
         <p:txBody>
-          <a:bodyPr rtlCol="0" anchor="ctr" lIns="125999" rIns="125999" tIns="54000" bIns="54000" wrap="square"/>
+          <a:bodyPr wrap="square" lIns="125999" tIns="54000" rIns="125999" bIns="54000" rtlCol="0" anchor="ctr"/>
           <a:lstStyle/>
           <a:p>
             <a:pPr algn="l">
@@ -15758,7 +16218,7 @@
               </a:spcAft>
             </a:pPr>
             <a:r>
-              <a:rPr sz="2600" b="1">
+              <a:rPr lang="pt-BR" sz="2600" b="1" noProof="0" dirty="0">
                 <a:solidFill>
                   <a:srgbClr val="1F2A33"/>
                 </a:solidFill>
@@ -15830,7 +16290,7 @@
           </a:fontRef>
         </p:style>
         <p:txBody>
-          <a:bodyPr rtlCol="0" anchor="t" lIns="125999" rIns="125999" tIns="54000" bIns="54000" wrap="square"/>
+          <a:bodyPr wrap="square" lIns="125999" tIns="54000" rIns="125999" bIns="54000" rtlCol="0" anchor="t"/>
           <a:lstStyle/>
           <a:p>
             <a:pPr algn="l">
@@ -15839,7 +16299,7 @@
               </a:spcAft>
             </a:pPr>
             <a:r>
-              <a:rPr sz="4400" b="1">
+              <a:rPr lang="pt-BR" sz="4400" b="1" noProof="0" dirty="0">
                 <a:solidFill>
                   <a:srgbClr val="D8634E"/>
                 </a:solidFill>
@@ -15848,7 +16308,7 @@
               <a:t>16%</a:t>
             </a:r>
             <a:r>
-              <a:rPr sz="2000" b="1">
+              <a:rPr lang="pt-BR" sz="2000" b="1" noProof="0" dirty="0">
                 <a:solidFill>
                   <a:srgbClr val="1F2A33"/>
                 </a:solidFill>
@@ -15864,7 +16324,7 @@
               </a:spcAft>
             </a:pPr>
             <a:r>
-              <a:rPr sz="1700" b="0">
+              <a:rPr lang="pt-BR" sz="1700" b="0" noProof="0" dirty="0">
                 <a:solidFill>
                   <a:srgbClr val="1F2A33"/>
                 </a:solidFill>
@@ -15912,7 +16372,7 @@
           </a:fontRef>
         </p:style>
         <p:txBody>
-          <a:bodyPr rtlCol="0" anchor="t" lIns="125999" rIns="125999" tIns="54000" bIns="54000" wrap="square"/>
+          <a:bodyPr wrap="square" lIns="125999" tIns="54000" rIns="125999" bIns="54000" rtlCol="0" anchor="t"/>
           <a:lstStyle/>
           <a:p>
             <a:pPr algn="l">
@@ -15921,7 +16381,7 @@
               </a:spcAft>
             </a:pPr>
             <a:r>
-              <a:rPr sz="1900" b="1">
+              <a:rPr lang="pt-BR" sz="1900" b="1" noProof="0" dirty="0">
                 <a:solidFill>
                   <a:srgbClr val="D8634E"/>
                 </a:solidFill>
@@ -15937,7 +16397,7 @@
               </a:spcAft>
             </a:pPr>
             <a:r>
-              <a:rPr sz="1800" b="0">
+              <a:rPr lang="pt-BR" sz="1800" b="0" noProof="0" dirty="0">
                 <a:solidFill>
                   <a:srgbClr val="1F2A33"/>
                 </a:solidFill>
@@ -15946,7 +16406,7 @@
               <a:t>Média observada </a:t>
             </a:r>
             <a:r>
-              <a:rPr sz="1800" b="1">
+              <a:rPr lang="pt-BR" sz="1800" b="1" noProof="0" dirty="0">
                 <a:solidFill>
                   <a:srgbClr val="1F2A33"/>
                 </a:solidFill>
@@ -15955,7 +16415,7 @@
               <a:t>3,64%</a:t>
             </a:r>
             <a:r>
-              <a:rPr sz="1800" b="0">
+              <a:rPr lang="pt-BR" sz="1800" b="0" noProof="0" dirty="0">
                 <a:solidFill>
                   <a:srgbClr val="1F2A33"/>
                 </a:solidFill>
@@ -15964,7 +16424,7 @@
               <a:t>; a real fica entre </a:t>
             </a:r>
             <a:r>
-              <a:rPr sz="1800" b="1">
+              <a:rPr lang="pt-BR" sz="1800" b="1" noProof="0" dirty="0">
                 <a:solidFill>
                   <a:srgbClr val="1F2A33"/>
                 </a:solidFill>
@@ -15973,7 +16433,7 @@
               <a:t>3,14%</a:t>
             </a:r>
             <a:r>
-              <a:rPr sz="1800" b="0">
+              <a:rPr lang="pt-BR" sz="1800" b="0" noProof="0" dirty="0">
                 <a:solidFill>
                   <a:srgbClr val="1F2A33"/>
                 </a:solidFill>
@@ -15982,7 +16442,7 @@
               <a:t> e </a:t>
             </a:r>
             <a:r>
-              <a:rPr sz="1800" b="1">
+              <a:rPr lang="pt-BR" sz="1800" b="1" noProof="0" dirty="0">
                 <a:solidFill>
                   <a:srgbClr val="1F2A33"/>
                 </a:solidFill>
@@ -15991,7 +16451,7 @@
               <a:t>3,64%</a:t>
             </a:r>
             <a:r>
-              <a:rPr sz="1800" b="0">
+              <a:rPr lang="pt-BR" sz="1800" b="0" noProof="0" dirty="0">
                 <a:solidFill>
                   <a:srgbClr val="1F2A33"/>
                 </a:solidFill>
@@ -16007,7 +16467,7 @@
               </a:spcAft>
             </a:pPr>
             <a:r>
-              <a:rPr sz="1800" b="0">
+              <a:rPr lang="pt-BR" sz="1800" b="0" noProof="0" dirty="0">
                 <a:solidFill>
                   <a:srgbClr val="1F2A33"/>
                 </a:solidFill>
@@ -16053,7 +16513,7 @@
           </a:fontRef>
         </p:style>
         <p:txBody>
-          <a:bodyPr rtlCol="0" anchor="t" lIns="125999" rIns="125999" tIns="54000" bIns="54000" wrap="square"/>
+          <a:bodyPr wrap="square" lIns="125999" tIns="54000" rIns="125999" bIns="54000" rtlCol="0" anchor="t"/>
           <a:lstStyle/>
           <a:p>
             <a:pPr algn="l">
@@ -16062,7 +16522,7 @@
               </a:spcAft>
             </a:pPr>
             <a:r>
-              <a:rPr sz="1100" b="0">
+              <a:rPr lang="pt-BR" sz="1100" b="0" noProof="0" dirty="0">
                 <a:solidFill>
                   <a:srgbClr val="6B7780"/>
                 </a:solidFill>
@@ -16082,7 +16542,7 @@
 </file>
 
 <file path=ppt/slides/slide8.xml><?xml version="1.0" encoding="utf-8"?>
-<p:sld xmlns:a="http://schemas.openxmlformats.org/drawingml/2006/main" xmlns:p="http://schemas.openxmlformats.org/presentationml/2006/main" xmlns:r="http://schemas.openxmlformats.org/officeDocument/2006/relationships">
+<p:sld xmlns:a="http://schemas.openxmlformats.org/drawingml/2006/main" xmlns:r="http://schemas.openxmlformats.org/officeDocument/2006/relationships" xmlns:p="http://schemas.openxmlformats.org/presentationml/2006/main">
   <p:cSld>
     <p:spTree>
       <p:nvGrpSpPr>
@@ -16090,7 +16550,14 @@
         <p:cNvGrpSpPr/>
         <p:nvPr/>
       </p:nvGrpSpPr>
-      <p:grpSpPr/>
+      <p:grpSpPr>
+        <a:xfrm>
+          <a:off x="0" y="0"/>
+          <a:ext cx="0" cy="0"/>
+          <a:chOff x="0" y="0"/>
+          <a:chExt cx="0" cy="0"/>
+        </a:xfrm>
+      </p:grpSpPr>
       <p:sp>
         <p:nvSpPr>
           <p:cNvPr id="2" name="Rectangle 1"/>
@@ -16126,7 +16593,7 @@
           </a:fontRef>
         </p:style>
         <p:txBody>
-          <a:bodyPr rtlCol="0" anchor="t" lIns="125999" rIns="125999" tIns="54000" bIns="54000" wrap="square"/>
+          <a:bodyPr wrap="square" lIns="125999" tIns="54000" rIns="125999" bIns="54000" rtlCol="0" anchor="t"/>
           <a:lstStyle/>
           <a:p>
             <a:pPr algn="l">
@@ -16135,7 +16602,7 @@
               </a:spcAft>
             </a:pPr>
             <a:r>
-              <a:rPr sz="1300" b="1">
+              <a:rPr lang="pt-BR" sz="1300" b="1" noProof="0" dirty="0">
                 <a:solidFill>
                   <a:srgbClr val="3B848E"/>
                 </a:solidFill>
@@ -16181,7 +16648,7 @@
           </a:fontRef>
         </p:style>
         <p:txBody>
-          <a:bodyPr rtlCol="0" anchor="ctr" lIns="125999" rIns="125999" tIns="54000" bIns="54000" wrap="square"/>
+          <a:bodyPr wrap="square" lIns="125999" tIns="54000" rIns="125999" bIns="54000" rtlCol="0" anchor="ctr"/>
           <a:lstStyle/>
           <a:p>
             <a:pPr algn="l">
@@ -16190,7 +16657,7 @@
               </a:spcAft>
             </a:pPr>
             <a:r>
-              <a:rPr sz="2600" b="1">
+              <a:rPr lang="pt-BR" sz="2600" b="1" noProof="0" dirty="0">
                 <a:solidFill>
                   <a:srgbClr val="1F2A33"/>
                 </a:solidFill>
@@ -16262,7 +16729,7 @@
           </a:fontRef>
         </p:style>
         <p:txBody>
-          <a:bodyPr rtlCol="0" anchor="t" lIns="125999" rIns="125999" tIns="54000" bIns="54000" wrap="square"/>
+          <a:bodyPr wrap="square" lIns="125999" tIns="54000" rIns="125999" bIns="54000" rtlCol="0" anchor="t"/>
           <a:lstStyle/>
           <a:p>
             <a:pPr algn="l">
@@ -16271,7 +16738,7 @@
               </a:spcAft>
             </a:pPr>
             <a:r>
-              <a:rPr sz="1900" b="1">
+              <a:rPr lang="pt-BR" sz="1900" b="1" noProof="0" dirty="0">
                 <a:solidFill>
                   <a:srgbClr val="3B848E"/>
                 </a:solidFill>
@@ -16287,7 +16754,7 @@
               </a:spcAft>
             </a:pPr>
             <a:r>
-              <a:rPr sz="1700" b="0">
+              <a:rPr lang="pt-BR" sz="1700" b="0" noProof="0" dirty="0">
                 <a:solidFill>
                   <a:srgbClr val="1F2A33"/>
                 </a:solidFill>
@@ -16303,7 +16770,7 @@
               </a:spcAft>
             </a:pPr>
             <a:r>
-              <a:rPr sz="1700" b="1">
+              <a:rPr lang="pt-BR" sz="1700" b="1" noProof="0" dirty="0">
                 <a:solidFill>
                   <a:srgbClr val="1F2A33"/>
                 </a:solidFill>
@@ -16351,7 +16818,7 @@
           </a:fontRef>
         </p:style>
         <p:txBody>
-          <a:bodyPr rtlCol="0" anchor="t" lIns="125999" rIns="125999" tIns="54000" bIns="54000" wrap="square"/>
+          <a:bodyPr wrap="square" lIns="125999" tIns="54000" rIns="125999" bIns="54000" rtlCol="0" anchor="t"/>
           <a:lstStyle/>
           <a:p>
             <a:pPr algn="l">
@@ -16360,7 +16827,7 @@
               </a:spcAft>
             </a:pPr>
             <a:r>
-              <a:rPr sz="1900" b="1">
+              <a:rPr lang="pt-BR" sz="1900" b="1" noProof="0" dirty="0">
                 <a:solidFill>
                   <a:srgbClr val="D8634E"/>
                 </a:solidFill>
@@ -16376,7 +16843,7 @@
               </a:spcAft>
             </a:pPr>
             <a:r>
-              <a:rPr sz="1600" b="0">
+              <a:rPr lang="pt-BR" sz="1600" b="0" noProof="0" dirty="0">
                 <a:solidFill>
                   <a:srgbClr val="1F2A33"/>
                 </a:solidFill>
@@ -16422,7 +16889,7 @@
           </a:fontRef>
         </p:style>
         <p:txBody>
-          <a:bodyPr rtlCol="0" anchor="t" lIns="125999" rIns="125999" tIns="54000" bIns="54000" wrap="square"/>
+          <a:bodyPr wrap="square" lIns="125999" tIns="54000" rIns="125999" bIns="54000" rtlCol="0" anchor="t"/>
           <a:lstStyle/>
           <a:p>
             <a:pPr algn="l">
@@ -16431,13 +16898,31 @@
               </a:spcAft>
             </a:pPr>
             <a:r>
-              <a:rPr sz="1100" b="0">
+              <a:rPr lang="pt-BR" sz="1100" b="0" noProof="0" dirty="0">
                 <a:solidFill>
                   <a:srgbClr val="6B7780"/>
                 </a:solidFill>
                 <a:latin typeface="Calibri"/>
               </a:rPr>
-              <a:t>Correlação de Spearman nos 75.629 setores com os 12 indicadores completos (Figura 1 do relatório); renda invertida. Fonte: IBGE, Censo 2022.</a:t>
+              <a:t>Correlação de </a:t>
+            </a:r>
+            <a:r>
+              <a:rPr lang="pt-BR" sz="1100" b="0" noProof="0" dirty="0" err="1">
+                <a:solidFill>
+                  <a:srgbClr val="6B7780"/>
+                </a:solidFill>
+                <a:latin typeface="Calibri"/>
+              </a:rPr>
+              <a:t>Spearman</a:t>
+            </a:r>
+            <a:r>
+              <a:rPr lang="pt-BR" sz="1100" b="0" noProof="0" dirty="0">
+                <a:solidFill>
+                  <a:srgbClr val="6B7780"/>
+                </a:solidFill>
+                <a:latin typeface="Calibri"/>
+              </a:rPr>
+              <a:t> nos 75.629 setores com os 12 indicadores completos (Figura 1 do relatório); renda invertida. Fonte: IBGE, Censo 2022.</a:t>
             </a:r>
           </a:p>
         </p:txBody>
@@ -16451,7 +16936,7 @@
 </file>
 
 <file path=ppt/slides/slide9.xml><?xml version="1.0" encoding="utf-8"?>
-<p:sld xmlns:a="http://schemas.openxmlformats.org/drawingml/2006/main" xmlns:p="http://schemas.openxmlformats.org/presentationml/2006/main" xmlns:r="http://schemas.openxmlformats.org/officeDocument/2006/relationships">
+<p:sld xmlns:a="http://schemas.openxmlformats.org/drawingml/2006/main" xmlns:r="http://schemas.openxmlformats.org/officeDocument/2006/relationships" xmlns:p="http://schemas.openxmlformats.org/presentationml/2006/main">
   <p:cSld>
     <p:spTree>
       <p:nvGrpSpPr>
@@ -16459,7 +16944,14 @@
         <p:cNvGrpSpPr/>
         <p:nvPr/>
       </p:nvGrpSpPr>
-      <p:grpSpPr/>
+      <p:grpSpPr>
+        <a:xfrm>
+          <a:off x="0" y="0"/>
+          <a:ext cx="0" cy="0"/>
+          <a:chOff x="0" y="0"/>
+          <a:chExt cx="0" cy="0"/>
+        </a:xfrm>
+      </p:grpSpPr>
       <p:sp>
         <p:nvSpPr>
           <p:cNvPr id="2" name="Rectangle 1"/>
@@ -16495,7 +16987,7 @@
           </a:fontRef>
         </p:style>
         <p:txBody>
-          <a:bodyPr rtlCol="0" anchor="t" lIns="125999" rIns="125999" tIns="54000" bIns="54000" wrap="square"/>
+          <a:bodyPr wrap="square" lIns="125999" tIns="54000" rIns="125999" bIns="54000" rtlCol="0" anchor="t"/>
           <a:lstStyle/>
           <a:p>
             <a:pPr algn="l">
@@ -16504,7 +16996,7 @@
               </a:spcAft>
             </a:pPr>
             <a:r>
-              <a:rPr sz="1300" b="1">
+              <a:rPr lang="pt-BR" sz="1300" b="1" noProof="0" dirty="0">
                 <a:solidFill>
                   <a:srgbClr val="3B848E"/>
                 </a:solidFill>
@@ -16550,7 +17042,7 @@
           </a:fontRef>
         </p:style>
         <p:txBody>
-          <a:bodyPr rtlCol="0" anchor="ctr" lIns="125999" rIns="125999" tIns="54000" bIns="54000" wrap="square"/>
+          <a:bodyPr wrap="square" lIns="125999" tIns="54000" rIns="125999" bIns="54000" rtlCol="0" anchor="ctr"/>
           <a:lstStyle/>
           <a:p>
             <a:pPr algn="l">
@@ -16559,7 +17051,7 @@
               </a:spcAft>
             </a:pPr>
             <a:r>
-              <a:rPr sz="2600" b="1">
+              <a:rPr lang="pt-BR" sz="2600" b="1" noProof="0" dirty="0">
                 <a:solidFill>
                   <a:srgbClr val="1F2A33"/>
                 </a:solidFill>
@@ -16607,7 +17099,7 @@
           </a:fontRef>
         </p:style>
         <p:txBody>
-          <a:bodyPr rtlCol="0" anchor="ctr" lIns="125999" rIns="125999" tIns="54000" bIns="54000" wrap="square"/>
+          <a:bodyPr wrap="square" lIns="125999" tIns="54000" rIns="125999" bIns="54000" rtlCol="0" anchor="ctr"/>
           <a:lstStyle/>
           <a:p>
             <a:pPr algn="ctr">
@@ -16616,7 +17108,7 @@
               </a:spcAft>
             </a:pPr>
             <a:r>
-              <a:rPr sz="8800" b="1">
+              <a:rPr lang="pt-BR" sz="8800" b="1" noProof="0" dirty="0">
                 <a:solidFill>
                   <a:srgbClr val="D8634E"/>
                 </a:solidFill>
@@ -16632,7 +17124,7 @@
               </a:spcAft>
             </a:pPr>
             <a:r>
-              <a:rPr sz="2200" b="0">
+              <a:rPr lang="pt-BR" sz="2200" b="0" noProof="0" dirty="0">
                 <a:solidFill>
                   <a:srgbClr val="1F2A33"/>
                 </a:solidFill>
@@ -16648,7 +17140,7 @@
               </a:spcAft>
             </a:pPr>
             <a:r>
-              <a:rPr sz="1600" b="0">
+              <a:rPr lang="pt-BR" sz="1600" b="0" noProof="0" dirty="0">
                 <a:solidFill>
                   <a:srgbClr val="6B7780"/>
                 </a:solidFill>
@@ -16696,7 +17188,7 @@
           </a:fontRef>
         </p:style>
         <p:txBody>
-          <a:bodyPr rtlCol="0" anchor="ctr" lIns="125999" rIns="125999" tIns="54000" bIns="54000" wrap="square"/>
+          <a:bodyPr wrap="square" lIns="125999" tIns="54000" rIns="125999" bIns="54000" rtlCol="0" anchor="ctr"/>
           <a:lstStyle/>
           <a:p>
             <a:pPr algn="ctr">
@@ -16705,7 +17197,7 @@
               </a:spcAft>
             </a:pPr>
             <a:r>
-              <a:rPr sz="1900" b="1">
+              <a:rPr lang="pt-BR" sz="1900" b="1" noProof="0" dirty="0">
                 <a:solidFill>
                   <a:srgbClr val="3B848E"/>
                 </a:solidFill>
@@ -16721,7 +17213,7 @@
               </a:spcAft>
             </a:pPr>
             <a:r>
-              <a:rPr sz="1800" b="0">
+              <a:rPr lang="pt-BR" sz="1800" b="0" noProof="0" dirty="0">
                 <a:solidFill>
                   <a:srgbClr val="1F2A33"/>
                 </a:solidFill>
@@ -16737,7 +17229,7 @@
               </a:spcAft>
             </a:pPr>
             <a:r>
-              <a:rPr sz="4000" b="1">
+              <a:rPr lang="pt-BR" sz="4000" b="1" noProof="0" dirty="0">
                 <a:solidFill>
                   <a:srgbClr val="3B848E"/>
                 </a:solidFill>
@@ -16753,7 +17245,7 @@
               </a:spcAft>
             </a:pPr>
             <a:r>
-              <a:rPr sz="1800" b="0">
+              <a:rPr lang="pt-BR" sz="1800" b="0" noProof="0" dirty="0">
                 <a:solidFill>
                   <a:srgbClr val="1F2A33"/>
                 </a:solidFill>
@@ -16769,7 +17261,7 @@
               </a:spcAft>
             </a:pPr>
             <a:r>
-              <a:rPr sz="4000" b="1">
+              <a:rPr lang="pt-BR" sz="4000" b="1" noProof="0" dirty="0">
                 <a:solidFill>
                   <a:srgbClr val="D8634E"/>
                 </a:solidFill>
@@ -16785,7 +17277,7 @@
               </a:spcAft>
             </a:pPr>
             <a:r>
-              <a:rPr sz="1600" b="0">
+              <a:rPr lang="pt-BR" sz="1600" b="0" noProof="0" dirty="0">
                 <a:solidFill>
                   <a:srgbClr val="6B7780"/>
                 </a:solidFill>
@@ -16831,7 +17323,7 @@
           </a:fontRef>
         </p:style>
         <p:txBody>
-          <a:bodyPr rtlCol="0" anchor="t" lIns="125999" rIns="125999" tIns="54000" bIns="54000" wrap="square"/>
+          <a:bodyPr wrap="square" lIns="125999" tIns="54000" rIns="125999" bIns="54000" rtlCol="0" anchor="t"/>
           <a:lstStyle/>
           <a:p>
             <a:pPr algn="ctr">
@@ -16840,7 +17332,7 @@
               </a:spcAft>
             </a:pPr>
             <a:r>
-              <a:rPr sz="1700" b="1">
+              <a:rPr lang="pt-BR" sz="1700" b="1" noProof="0" dirty="0">
                 <a:solidFill>
                   <a:srgbClr val="1F2A33"/>
                 </a:solidFill>
@@ -16856,13 +17348,31 @@
               </a:spcAft>
             </a:pPr>
             <a:r>
-              <a:rPr sz="1300" b="0">
+              <a:rPr lang="pt-BR" sz="1300" b="0" noProof="0" dirty="0">
                 <a:solidFill>
                   <a:srgbClr val="6B7780"/>
                 </a:solidFill>
                 <a:latin typeface="Calibri"/>
               </a:rPr>
-              <a:t>Municípios com pelo menos 30 setores com dados completos (53 dos 70). Spearman; renda invertida.</a:t>
+              <a:t>Municípios com pelo menos 30 setores com dados completos (53 dos 70). </a:t>
+            </a:r>
+            <a:r>
+              <a:rPr lang="pt-BR" sz="1300" b="0" noProof="0" dirty="0" err="1">
+                <a:solidFill>
+                  <a:srgbClr val="6B7780"/>
+                </a:solidFill>
+                <a:latin typeface="Calibri"/>
+              </a:rPr>
+              <a:t>Spearman</a:t>
+            </a:r>
+            <a:r>
+              <a:rPr lang="pt-BR" sz="1300" b="0" noProof="0" dirty="0">
+                <a:solidFill>
+                  <a:srgbClr val="6B7780"/>
+                </a:solidFill>
+                <a:latin typeface="Calibri"/>
+              </a:rPr>
+              <a:t>; renda invertida.</a:t>
             </a:r>
           </a:p>
         </p:txBody>
@@ -16902,7 +17412,7 @@
           </a:fontRef>
         </p:style>
         <p:txBody>
-          <a:bodyPr rtlCol="0" anchor="t" lIns="125999" rIns="125999" tIns="54000" bIns="54000" wrap="square"/>
+          <a:bodyPr wrap="square" lIns="125999" tIns="54000" rIns="125999" bIns="54000" rtlCol="0" anchor="t"/>
           <a:lstStyle/>
           <a:p>
             <a:pPr algn="l">
@@ -16911,7 +17421,7 @@
               </a:spcAft>
             </a:pPr>
             <a:r>
-              <a:rPr sz="1100" b="0">
+              <a:rPr lang="pt-BR" sz="1100" b="0" noProof="0" dirty="0">
                 <a:solidFill>
                   <a:srgbClr val="6B7780"/>
                 </a:solidFill>
